--- a/docs/営業改革_柳沼さん共有資料.pptx
+++ b/docs/営業改革_柳沼さん共有資料.pptx
@@ -4309,7 +4309,7 @@
                 <a:ea typeface="Yu Gothic"/>
                 <a:cs typeface="Yu Gothic"/>
               </a:rPr>
-              <a:t>STO体制（専任2名＋兼務3名）</a:t>
+              <a:t>STO体制（専任1名＋兼務3名＋オーナー）</a:t>
             </a:r>
           </a:p>
         </p:txBody>
@@ -4770,7 +4770,7 @@
                           <a:ea typeface="Yu Gothic"/>
                           <a:cs typeface="Yu Gothic"/>
                         </a:rPr>
-                        <a:t>専任</a:t>
+                        <a:t>兼務</a:t>
                       </a:r>
                     </a:p>
                   </a:txBody>

--- a/docs/営業改革_柳沼さん共有資料.pptx
+++ b/docs/営業改革_柳沼さん共有資料.pptx
@@ -12,6 +12,7 @@
     <p:sldId id="260" r:id="rId11"/>
     <p:sldId id="261" r:id="rId12"/>
     <p:sldId id="262" r:id="rId13"/>
+    <p:sldId id="263" r:id="rId14"/>
   </p:sldIdLst>
   <p:sldSz cx="12191695" cy="6858000" type="screen4x3"/>
   <p:notesSz cx="6858000" cy="9144000"/>
@@ -3395,7 +3396,7 @@
                 <a:ea typeface="Yu Gothic"/>
                 <a:cs typeface="Yu Gothic"/>
               </a:rPr>
-              <a:t>STOとは（5分で概要）</a:t>
+              <a:t>1分で全体像</a:t>
             </a:r>
           </a:p>
         </p:txBody>
@@ -3436,7 +3437,7 @@
                 <a:ea typeface="Yu Gothic"/>
                 <a:cs typeface="Yu Gothic"/>
               </a:rPr>
-              <a:t>改革の「運転席」— 実行部隊ではなく、主役は各部長</a:t>
+              <a:t>このプロジェクトは何か（3行で）</a:t>
             </a:r>
           </a:p>
         </p:txBody>
@@ -3487,55 +3488,14 @@
       </p:sp>
       <p:sp>
         <p:nvSpPr>
-          <p:cNvPr id="5" name="TextBox 4"/>
-          <p:cNvSpPr txBox="1"/>
-          <p:nvPr/>
-        </p:nvSpPr>
-        <p:spPr>
-          <a:xfrm>
-            <a:off x="502920" y="1517904"/>
-            <a:ext cx="11155680" cy="310896"/>
-          </a:xfrm>
-          <a:prstGeom prst="rect">
-            <a:avLst/>
-          </a:prstGeom>
-          <a:noFill/>
-        </p:spPr>
-        <p:txBody>
-          <a:bodyPr wrap="square" lIns="0" rIns="0" tIns="0" bIns="0">
-            <a:spAutoFit/>
-          </a:bodyPr>
-          <a:lstStyle/>
-          <a:p>
-            <a:pPr algn="l">
-              <a:spcAft>
-                <a:spcPts val="400"/>
-              </a:spcAft>
-            </a:pPr>
-            <a:r>
-              <a:rPr sz="1150" b="1" i="0">
-                <a:solidFill>
-                  <a:srgbClr val="3A106E"/>
-                </a:solidFill>
-                <a:latin typeface="Yu Gothic"/>
-                <a:ea typeface="Yu Gothic"/>
-                <a:cs typeface="Yu Gothic"/>
-              </a:rPr>
-              <a:t>STOは3つの機能に徹します。案件の実行判断や顧客対応はしません</a:t>
-            </a:r>
-          </a:p>
-        </p:txBody>
-      </p:sp>
-      <p:sp>
-        <p:nvSpPr>
-          <p:cNvPr id="6" name="Rectangle 5"/>
+          <p:cNvPr id="5" name="Rectangle 4"/>
           <p:cNvSpPr/>
           <p:nvPr/>
         </p:nvSpPr>
         <p:spPr>
           <a:xfrm>
-            <a:off x="502920" y="1938528"/>
-            <a:ext cx="3538728" cy="1463040"/>
+            <a:off x="502920" y="1810512"/>
+            <a:ext cx="11183112" cy="1389888"/>
           </a:xfrm>
           <a:prstGeom prst="rect">
             <a:avLst/>
@@ -3574,14 +3534,14 @@
       </p:sp>
       <p:sp>
         <p:nvSpPr>
-          <p:cNvPr id="7" name="Rectangle 6"/>
+          <p:cNvPr id="6" name="Rectangle 5"/>
           <p:cNvSpPr/>
           <p:nvPr/>
         </p:nvSpPr>
         <p:spPr>
           <a:xfrm>
-            <a:off x="502920" y="1938528"/>
-            <a:ext cx="3538728" cy="82296"/>
+            <a:off x="502920" y="1810512"/>
+            <a:ext cx="64008" cy="1389888"/>
           </a:xfrm>
           <a:prstGeom prst="rect">
             <a:avLst/>
@@ -3618,14 +3578,14 @@
       </p:sp>
       <p:sp>
         <p:nvSpPr>
-          <p:cNvPr id="8" name="Oval 7"/>
+          <p:cNvPr id="7" name="Oval 6"/>
           <p:cNvSpPr/>
           <p:nvPr/>
         </p:nvSpPr>
         <p:spPr>
           <a:xfrm>
-            <a:off x="740664" y="2194560"/>
-            <a:ext cx="512064" cy="512064"/>
+            <a:off x="722376" y="2276856"/>
+            <a:ext cx="457200" cy="457200"/>
           </a:xfrm>
           <a:prstGeom prst="ellipse">
             <a:avLst/>
@@ -3662,7 +3622,7 @@
               </a:spcAft>
             </a:pPr>
             <a:r>
-              <a:rPr sz="2000" b="1" i="0">
+              <a:rPr sz="1800" b="1" i="0">
                 <a:solidFill>
                   <a:srgbClr val="FFFFFF"/>
                 </a:solidFill>
@@ -3677,14 +3637,14 @@
       </p:sp>
       <p:sp>
         <p:nvSpPr>
-          <p:cNvPr id="9" name="TextBox 8"/>
+          <p:cNvPr id="8" name="TextBox 7"/>
           <p:cNvSpPr txBox="1"/>
           <p:nvPr/>
         </p:nvSpPr>
         <p:spPr>
           <a:xfrm>
-            <a:off x="1380744" y="2249424"/>
-            <a:ext cx="2496313" cy="457200"/>
+            <a:off x="1362456" y="1956816"/>
+            <a:ext cx="10122408" cy="1133856"/>
           </a:xfrm>
           <a:prstGeom prst="rect">
             <a:avLst/>
@@ -3692,18 +3652,18 @@
           <a:noFill/>
         </p:spPr>
         <p:txBody>
-          <a:bodyPr wrap="square" lIns="0" rIns="0" tIns="0" bIns="0">
+          <a:bodyPr wrap="square" lIns="0" rIns="0" tIns="0" bIns="0" anchor="ctr">
             <a:spAutoFit/>
           </a:bodyPr>
           <a:lstStyle/>
           <a:p>
             <a:pPr algn="l">
               <a:spcAft>
-                <a:spcPts val="0"/>
+                <a:spcPts val="400"/>
               </a:spcAft>
             </a:pPr>
             <a:r>
-              <a:rPr sz="1350" b="1" i="0">
+              <a:rPr sz="1450" b="1" i="0">
                 <a:solidFill>
                   <a:srgbClr val="3A106E"/>
                 </a:solidFill>
@@ -3711,80 +3671,21 @@
                 <a:ea typeface="Yu Gothic"/>
                 <a:cs typeface="Yu Gothic"/>
               </a:rPr>
-              <a:t>データを回す</a:t>
-            </a:r>
-          </a:p>
-        </p:txBody>
-      </p:sp>
-      <p:sp>
-        <p:nvSpPr>
-          <p:cNvPr id="10" name="TextBox 9"/>
-          <p:cNvSpPr txBox="1"/>
-          <p:nvPr/>
-        </p:nvSpPr>
-        <p:spPr>
-          <a:xfrm>
-            <a:off x="758952" y="2834640"/>
-            <a:ext cx="3063240" cy="512064"/>
-          </a:xfrm>
-          <a:prstGeom prst="rect">
-            <a:avLst/>
-          </a:prstGeom>
-          <a:noFill/>
-        </p:spPr>
-        <p:txBody>
-          <a:bodyPr wrap="square" lIns="0" rIns="0" tIns="0" bIns="0">
-            <a:spAutoFit/>
-          </a:bodyPr>
-          <a:lstStyle/>
-          <a:p>
-            <a:pPr algn="l">
-              <a:spcAft>
-                <a:spcPts val="100"/>
-              </a:spcAft>
-            </a:pPr>
-            <a:r>
-              <a:rPr sz="980" b="0" i="0">
-                <a:solidFill>
-                  <a:srgbClr val="262630"/>
-                </a:solidFill>
-                <a:latin typeface="Yu Gothic"/>
-                <a:ea typeface="Yu Gothic"/>
-                <a:cs typeface="Yu Gothic"/>
-              </a:rPr>
-              <a:t>棚卸し・スコアリング・KPIを、</a:t>
-            </a:r>
-          </a:p>
-          <a:p>
-            <a:pPr algn="l">
-              <a:spcAft>
-                <a:spcPts val="100"/>
-              </a:spcAft>
-            </a:pPr>
-            <a:r>
-              <a:rPr sz="980" b="0" i="0">
-                <a:solidFill>
-                  <a:srgbClr val="262630"/>
-                </a:solidFill>
-                <a:latin typeface="Yu Gothic"/>
-                <a:ea typeface="Yu Gothic"/>
-                <a:cs typeface="Yu Gothic"/>
-              </a:rPr>
-              <a:t>正しく速く供給する</a:t>
-            </a:r>
-          </a:p>
-        </p:txBody>
-      </p:sp>
-      <p:sp>
-        <p:nvSpPr>
-          <p:cNvPr id="11" name="Rectangle 10"/>
+              <a:t>営業のデータと財務のデータをつないで、どの顧客・どの案件に力を注ぐかを「数字で選べる会社」になるプロジェクトです</a:t>
+            </a:r>
+          </a:p>
+        </p:txBody>
+      </p:sp>
+      <p:sp>
+        <p:nvSpPr>
+          <p:cNvPr id="9" name="Rectangle 8"/>
           <p:cNvSpPr/>
           <p:nvPr/>
         </p:nvSpPr>
         <p:spPr>
           <a:xfrm>
-            <a:off x="4325112" y="1938528"/>
-            <a:ext cx="3538728" cy="1463040"/>
+            <a:off x="502920" y="3383280"/>
+            <a:ext cx="11183112" cy="1389888"/>
           </a:xfrm>
           <a:prstGeom prst="rect">
             <a:avLst/>
@@ -3823,14 +3724,14 @@
       </p:sp>
       <p:sp>
         <p:nvSpPr>
-          <p:cNvPr id="12" name="Rectangle 11"/>
+          <p:cNvPr id="10" name="Rectangle 9"/>
           <p:cNvSpPr/>
           <p:nvPr/>
         </p:nvSpPr>
         <p:spPr>
           <a:xfrm>
-            <a:off x="4325112" y="1938528"/>
-            <a:ext cx="3538728" cy="82296"/>
+            <a:off x="502920" y="3383280"/>
+            <a:ext cx="64008" cy="1389888"/>
           </a:xfrm>
           <a:prstGeom prst="rect">
             <a:avLst/>
@@ -3867,14 +3768,14 @@
       </p:sp>
       <p:sp>
         <p:nvSpPr>
-          <p:cNvPr id="13" name="Oval 12"/>
+          <p:cNvPr id="11" name="Oval 10"/>
           <p:cNvSpPr/>
           <p:nvPr/>
         </p:nvSpPr>
         <p:spPr>
           <a:xfrm>
-            <a:off x="4562856" y="2194560"/>
-            <a:ext cx="512064" cy="512064"/>
+            <a:off x="722376" y="3849624"/>
+            <a:ext cx="457200" cy="457200"/>
           </a:xfrm>
           <a:prstGeom prst="ellipse">
             <a:avLst/>
@@ -3911,7 +3812,7 @@
               </a:spcAft>
             </a:pPr>
             <a:r>
-              <a:rPr sz="2000" b="1" i="0">
+              <a:rPr sz="1800" b="1" i="0">
                 <a:solidFill>
                   <a:srgbClr val="FFFFFF"/>
                 </a:solidFill>
@@ -3926,14 +3827,14 @@
       </p:sp>
       <p:sp>
         <p:nvSpPr>
-          <p:cNvPr id="14" name="TextBox 13"/>
+          <p:cNvPr id="12" name="TextBox 11"/>
           <p:cNvSpPr txBox="1"/>
           <p:nvPr/>
         </p:nvSpPr>
         <p:spPr>
           <a:xfrm>
-            <a:off x="5202936" y="2249424"/>
-            <a:ext cx="2496313" cy="457200"/>
+            <a:off x="1362456" y="3529584"/>
+            <a:ext cx="10122408" cy="1133856"/>
           </a:xfrm>
           <a:prstGeom prst="rect">
             <a:avLst/>
@@ -3941,10 +3842,28 @@
           <a:noFill/>
         </p:spPr>
         <p:txBody>
-          <a:bodyPr wrap="square" lIns="0" rIns="0" tIns="0" bIns="0">
+          <a:bodyPr wrap="square" lIns="0" rIns="0" tIns="0" bIns="0" anchor="ctr">
             <a:spAutoFit/>
           </a:bodyPr>
           <a:lstStyle/>
+          <a:p>
+            <a:pPr algn="l">
+              <a:spcAft>
+                <a:spcPts val="400"/>
+              </a:spcAft>
+            </a:pPr>
+            <a:r>
+              <a:rPr sz="1450" b="1" i="0">
+                <a:solidFill>
+                  <a:srgbClr val="3A106E"/>
+                </a:solidFill>
+                <a:latin typeface="Yu Gothic"/>
+                <a:ea typeface="Yu Gothic"/>
+                <a:cs typeface="Yu Gothic"/>
+              </a:rPr>
+              <a:t>売上が伸びても利益につながらない構造を変えます</a:t>
+            </a:r>
+          </a:p>
           <a:p>
             <a:pPr algn="l">
               <a:spcAft>
@@ -3952,88 +3871,29 @@
               </a:spcAft>
             </a:pPr>
             <a:r>
-              <a:rPr sz="1350" b="1" i="0">
-                <a:solidFill>
-                  <a:srgbClr val="3A106E"/>
+              <a:rPr sz="1150" b="0" i="0">
+                <a:solidFill>
+                  <a:srgbClr val="262630"/>
                 </a:solidFill>
                 <a:latin typeface="Yu Gothic"/>
                 <a:ea typeface="Yu Gothic"/>
                 <a:cs typeface="Yu Gothic"/>
               </a:rPr>
-              <a:t>会議を回す</a:t>
-            </a:r>
-          </a:p>
-        </p:txBody>
-      </p:sp>
-      <p:sp>
-        <p:nvSpPr>
-          <p:cNvPr id="15" name="TextBox 14"/>
-          <p:cNvSpPr txBox="1"/>
-          <p:nvPr/>
-        </p:nvSpPr>
-        <p:spPr>
-          <a:xfrm>
-            <a:off x="4581144" y="2834640"/>
-            <a:ext cx="3063240" cy="512064"/>
-          </a:xfrm>
-          <a:prstGeom prst="rect">
-            <a:avLst/>
-          </a:prstGeom>
-          <a:noFill/>
-        </p:spPr>
-        <p:txBody>
-          <a:bodyPr wrap="square" lIns="0" rIns="0" tIns="0" bIns="0">
-            <a:spAutoFit/>
-          </a:bodyPr>
-          <a:lstStyle/>
-          <a:p>
-            <a:pPr algn="l">
-              <a:spcAft>
-                <a:spcPts val="100"/>
-              </a:spcAft>
-            </a:pPr>
-            <a:r>
-              <a:rPr sz="980" b="0" i="0">
-                <a:solidFill>
-                  <a:srgbClr val="262630"/>
-                </a:solidFill>
-                <a:latin typeface="Yu Gothic"/>
-                <a:ea typeface="Yu Gothic"/>
-                <a:cs typeface="Yu Gothic"/>
-              </a:rPr>
-              <a:t>分科会→戦略会議→点検会議の</a:t>
-            </a:r>
-          </a:p>
-          <a:p>
-            <a:pPr algn="l">
-              <a:spcAft>
-                <a:spcPts val="100"/>
-              </a:spcAft>
-            </a:pPr>
-            <a:r>
-              <a:rPr sz="980" b="0" i="0">
-                <a:solidFill>
-                  <a:srgbClr val="262630"/>
-                </a:solidFill>
-                <a:latin typeface="Yu Gothic"/>
-                <a:ea typeface="Yu Gothic"/>
-                <a:cs typeface="Yu Gothic"/>
-              </a:rPr>
-              <a:t>サイクルを運転する</a:t>
-            </a:r>
-          </a:p>
-        </p:txBody>
-      </p:sp>
-      <p:sp>
-        <p:nvSpPr>
-          <p:cNvPr id="16" name="Rectangle 15"/>
+              <a:t>65期：売上▲21%・粗利率▲19pt。今期も売上は予算超過なのに利益は未達見込み</a:t>
+            </a:r>
+          </a:p>
+        </p:txBody>
+      </p:sp>
+      <p:sp>
+        <p:nvSpPr>
+          <p:cNvPr id="13" name="Rectangle 12"/>
           <p:cNvSpPr/>
           <p:nvPr/>
         </p:nvSpPr>
         <p:spPr>
           <a:xfrm>
-            <a:off x="8147304" y="1938528"/>
-            <a:ext cx="3538728" cy="1463040"/>
+            <a:off x="502920" y="4956048"/>
+            <a:ext cx="11183112" cy="1389888"/>
           </a:xfrm>
           <a:prstGeom prst="rect">
             <a:avLst/>
@@ -4072,14 +3932,14 @@
       </p:sp>
       <p:sp>
         <p:nvSpPr>
-          <p:cNvPr id="17" name="Rectangle 16"/>
+          <p:cNvPr id="14" name="Rectangle 13"/>
           <p:cNvSpPr/>
           <p:nvPr/>
         </p:nvSpPr>
         <p:spPr>
           <a:xfrm>
-            <a:off x="8147304" y="1938528"/>
-            <a:ext cx="3538728" cy="82296"/>
+            <a:off x="502920" y="4956048"/>
+            <a:ext cx="64008" cy="1389888"/>
           </a:xfrm>
           <a:prstGeom prst="rect">
             <a:avLst/>
@@ -4116,14 +3976,14 @@
       </p:sp>
       <p:sp>
         <p:nvSpPr>
-          <p:cNvPr id="18" name="Oval 17"/>
+          <p:cNvPr id="15" name="Oval 14"/>
           <p:cNvSpPr/>
           <p:nvPr/>
         </p:nvSpPr>
         <p:spPr>
           <a:xfrm>
-            <a:off x="8385048" y="2194560"/>
-            <a:ext cx="512064" cy="512064"/>
+            <a:off x="722376" y="5422392"/>
+            <a:ext cx="457200" cy="457200"/>
           </a:xfrm>
           <a:prstGeom prst="ellipse">
             <a:avLst/>
@@ -4160,7 +4020,7 @@
               </a:spcAft>
             </a:pPr>
             <a:r>
-              <a:rPr sz="2000" b="1" i="0">
+              <a:rPr sz="1800" b="1" i="0">
                 <a:solidFill>
                   <a:srgbClr val="FFFFFF"/>
                 </a:solidFill>
@@ -4175,14 +4035,240 @@
       </p:sp>
       <p:sp>
         <p:nvSpPr>
+          <p:cNvPr id="16" name="TextBox 15"/>
+          <p:cNvSpPr txBox="1"/>
+          <p:nvPr/>
+        </p:nvSpPr>
+        <p:spPr>
+          <a:xfrm>
+            <a:off x="1362456" y="5102352"/>
+            <a:ext cx="10122408" cy="1133856"/>
+          </a:xfrm>
+          <a:prstGeom prst="rect">
+            <a:avLst/>
+          </a:prstGeom>
+          <a:noFill/>
+        </p:spPr>
+        <p:txBody>
+          <a:bodyPr wrap="square" lIns="0" rIns="0" tIns="0" bIns="0" anchor="ctr">
+            <a:spAutoFit/>
+          </a:bodyPr>
+          <a:lstStyle/>
+          <a:p>
+            <a:pPr algn="l">
+              <a:spcAft>
+                <a:spcPts val="400"/>
+              </a:spcAft>
+            </a:pPr>
+            <a:r>
+              <a:rPr sz="1450" b="1" i="0">
+                <a:solidFill>
+                  <a:srgbClr val="3A106E"/>
+                </a:solidFill>
+                <a:latin typeface="Yu Gothic"/>
+                <a:ea typeface="Yu Gothic"/>
+                <a:cs typeface="Yu Gothic"/>
+              </a:rPr>
+              <a:t>山本会長・ホールディングスがコミットし、円谷プロ全体を対象にします</a:t>
+            </a:r>
+          </a:p>
+        </p:txBody>
+      </p:sp>
+      <p:sp>
+        <p:nvSpPr>
+          <p:cNvPr id="17" name="Rectangle 16"/>
+          <p:cNvSpPr/>
+          <p:nvPr/>
+        </p:nvSpPr>
+        <p:spPr>
+          <a:xfrm>
+            <a:off x="502920" y="6510528"/>
+            <a:ext cx="11183112" cy="15240"/>
+          </a:xfrm>
+          <a:prstGeom prst="rect">
+            <a:avLst/>
+          </a:prstGeom>
+          <a:solidFill>
+            <a:srgbClr val="D9D9E0"/>
+          </a:solidFill>
+          <a:ln>
+            <a:noFill/>
+          </a:ln>
+          <a:effectLst/>
+        </p:spPr>
+        <p:style>
+          <a:lnRef idx="1">
+            <a:schemeClr val="accent1"/>
+          </a:lnRef>
+          <a:fillRef idx="3">
+            <a:schemeClr val="accent1"/>
+          </a:fillRef>
+          <a:effectRef idx="2">
+            <a:schemeClr val="accent1"/>
+          </a:effectRef>
+          <a:fontRef idx="minor">
+            <a:schemeClr val="lt1"/>
+          </a:fontRef>
+        </p:style>
+        <p:txBody>
+          <a:bodyPr rtlCol="0" anchor="ctr"/>
+          <a:lstStyle/>
+          <a:p>
+            <a:pPr algn="ctr"/>
+          </a:p>
+        </p:txBody>
+      </p:sp>
+      <p:sp>
+        <p:nvSpPr>
+          <p:cNvPr id="18" name="TextBox 17"/>
+          <p:cNvSpPr txBox="1"/>
+          <p:nvPr/>
+        </p:nvSpPr>
+        <p:spPr>
+          <a:xfrm>
+            <a:off x="502920" y="6565392"/>
+            <a:ext cx="8686800" cy="274320"/>
+          </a:xfrm>
+          <a:prstGeom prst="rect">
+            <a:avLst/>
+          </a:prstGeom>
+          <a:noFill/>
+        </p:spPr>
+        <p:txBody>
+          <a:bodyPr wrap="square" lIns="0" rIns="0" tIns="0" bIns="0">
+            <a:spAutoFit/>
+          </a:bodyPr>
+          <a:lstStyle/>
+          <a:p>
+            <a:pPr algn="l">
+              <a:spcAft>
+                <a:spcPts val="400"/>
+              </a:spcAft>
+            </a:pPr>
+            <a:r>
+              <a:rPr sz="750" b="0" i="0">
+                <a:solidFill>
+                  <a:srgbClr val="8A8A99"/>
+                </a:solidFill>
+                <a:latin typeface="Yu Gothic"/>
+                <a:ea typeface="Yu Gothic"/>
+                <a:cs typeface="Yu Gothic"/>
+              </a:rPr>
+              <a:t>円谷プロダクション 営業改革 | 社外秘</a:t>
+            </a:r>
+          </a:p>
+        </p:txBody>
+      </p:sp>
+      <p:sp>
+        <p:nvSpPr>
           <p:cNvPr id="19" name="TextBox 18"/>
           <p:cNvSpPr txBox="1"/>
           <p:nvPr/>
         </p:nvSpPr>
         <p:spPr>
           <a:xfrm>
-            <a:off x="9025128" y="2249424"/>
-            <a:ext cx="2496313" cy="457200"/>
+            <a:off x="11247120" y="6565392"/>
+            <a:ext cx="457200" cy="274320"/>
+          </a:xfrm>
+          <a:prstGeom prst="rect">
+            <a:avLst/>
+          </a:prstGeom>
+          <a:noFill/>
+        </p:spPr>
+        <p:txBody>
+          <a:bodyPr wrap="square" lIns="0" rIns="0" tIns="0" bIns="0">
+            <a:spAutoFit/>
+          </a:bodyPr>
+          <a:lstStyle/>
+          <a:p>
+            <a:pPr algn="r">
+              <a:spcAft>
+                <a:spcPts val="400"/>
+              </a:spcAft>
+            </a:pPr>
+            <a:r>
+              <a:rPr sz="900" b="0" i="0">
+                <a:solidFill>
+                  <a:srgbClr val="5F5F6E"/>
+                </a:solidFill>
+                <a:latin typeface="Yu Gothic"/>
+                <a:ea typeface="Yu Gothic"/>
+                <a:cs typeface="Yu Gothic"/>
+              </a:rPr>
+              <a:t>2</a:t>
+            </a:r>
+          </a:p>
+        </p:txBody>
+      </p:sp>
+    </p:spTree>
+  </p:cSld>
+  <p:clrMapOvr>
+    <a:masterClrMapping/>
+  </p:clrMapOvr>
+</p:sld>
+</file>
+
+<file path=ppt/slides/slide3.xml><?xml version="1.0" encoding="utf-8"?>
+<p:sld xmlns:a="http://schemas.openxmlformats.org/drawingml/2006/main" xmlns:p="http://schemas.openxmlformats.org/presentationml/2006/main" xmlns:r="http://schemas.openxmlformats.org/officeDocument/2006/relationships">
+  <p:cSld>
+    <p:spTree>
+      <p:nvGrpSpPr>
+        <p:cNvPr id="1" name=""/>
+        <p:cNvGrpSpPr/>
+        <p:nvPr/>
+      </p:nvGrpSpPr>
+      <p:grpSpPr/>
+      <p:sp>
+        <p:nvSpPr>
+          <p:cNvPr id="2" name="TextBox 1"/>
+          <p:cNvSpPr txBox="1"/>
+          <p:nvPr/>
+        </p:nvSpPr>
+        <p:spPr>
+          <a:xfrm>
+            <a:off x="502920" y="256032"/>
+            <a:ext cx="11155680" cy="256032"/>
+          </a:xfrm>
+          <a:prstGeom prst="rect">
+            <a:avLst/>
+          </a:prstGeom>
+          <a:noFill/>
+        </p:spPr>
+        <p:txBody>
+          <a:bodyPr wrap="square" lIns="0" rIns="0" tIns="0" bIns="0">
+            <a:spAutoFit/>
+          </a:bodyPr>
+          <a:lstStyle/>
+          <a:p>
+            <a:pPr algn="l">
+              <a:spcAft>
+                <a:spcPts val="400"/>
+              </a:spcAft>
+            </a:pPr>
+            <a:r>
+              <a:rPr sz="1000" b="1" i="0">
+                <a:solidFill>
+                  <a:srgbClr val="7823DC"/>
+                </a:solidFill>
+                <a:latin typeface="Yu Gothic"/>
+                <a:ea typeface="Yu Gothic"/>
+                <a:cs typeface="Yu Gothic"/>
+              </a:rPr>
+              <a:t>全体像のうち、いま走っているのは</a:t>
+            </a:r>
+          </a:p>
+        </p:txBody>
+      </p:sp>
+      <p:sp>
+        <p:nvSpPr>
+          <p:cNvPr id="3" name="TextBox 2"/>
+          <p:cNvSpPr txBox="1"/>
+          <p:nvPr/>
+        </p:nvSpPr>
+        <p:spPr>
+          <a:xfrm>
+            <a:off x="502920" y="512064"/>
+            <a:ext cx="11155680" cy="868680"/>
           </a:xfrm>
           <a:prstGeom prst="rect">
             <a:avLst/>
@@ -4201,88 +4287,263 @@
               </a:spcAft>
             </a:pPr>
             <a:r>
-              <a:rPr sz="1350" b="1" i="0">
-                <a:solidFill>
-                  <a:srgbClr val="3A106E"/>
+              <a:rPr sz="1900" b="1" i="0">
+                <a:solidFill>
+                  <a:srgbClr val="262630"/>
                 </a:solidFill>
                 <a:latin typeface="Yu Gothic"/>
                 <a:ea typeface="Yu Gothic"/>
                 <a:cs typeface="Yu Gothic"/>
               </a:rPr>
-              <a:t>意思決定に上げる</a:t>
-            </a:r>
-          </a:p>
-        </p:txBody>
-      </p:sp>
-      <p:sp>
-        <p:nvSpPr>
-          <p:cNvPr id="20" name="TextBox 19"/>
-          <p:cNvSpPr txBox="1"/>
-          <p:nvPr/>
-        </p:nvSpPr>
-        <p:spPr>
-          <a:xfrm>
-            <a:off x="8403336" y="2834640"/>
-            <a:ext cx="3063240" cy="512064"/>
-          </a:xfrm>
-          <a:prstGeom prst="rect">
-            <a:avLst/>
-          </a:prstGeom>
-          <a:noFill/>
-        </p:spPr>
-        <p:txBody>
-          <a:bodyPr wrap="square" lIns="0" rIns="0" tIns="0" bIns="0">
-            <a:spAutoFit/>
-          </a:bodyPr>
-          <a:lstStyle/>
-          <a:p>
-            <a:pPr algn="l">
+              <a:t>いま動いているのは3本だけ</a:t>
+            </a:r>
+          </a:p>
+        </p:txBody>
+      </p:sp>
+      <p:sp>
+        <p:nvSpPr>
+          <p:cNvPr id="4" name="Rectangle 3"/>
+          <p:cNvSpPr/>
+          <p:nvPr/>
+        </p:nvSpPr>
+        <p:spPr>
+          <a:xfrm>
+            <a:off x="502920" y="1389888"/>
+            <a:ext cx="1463040" cy="33020"/>
+          </a:xfrm>
+          <a:prstGeom prst="rect">
+            <a:avLst/>
+          </a:prstGeom>
+          <a:solidFill>
+            <a:srgbClr val="7823DC"/>
+          </a:solidFill>
+          <a:ln>
+            <a:noFill/>
+          </a:ln>
+          <a:effectLst/>
+        </p:spPr>
+        <p:style>
+          <a:lnRef idx="1">
+            <a:schemeClr val="accent1"/>
+          </a:lnRef>
+          <a:fillRef idx="3">
+            <a:schemeClr val="accent1"/>
+          </a:fillRef>
+          <a:effectRef idx="2">
+            <a:schemeClr val="accent1"/>
+          </a:effectRef>
+          <a:fontRef idx="minor">
+            <a:schemeClr val="lt1"/>
+          </a:fontRef>
+        </p:style>
+        <p:txBody>
+          <a:bodyPr rtlCol="0" anchor="ctr"/>
+          <a:lstStyle/>
+          <a:p>
+            <a:pPr algn="ctr"/>
+          </a:p>
+        </p:txBody>
+      </p:sp>
+      <p:sp>
+        <p:nvSpPr>
+          <p:cNvPr id="5" name="Rectangle 4"/>
+          <p:cNvSpPr/>
+          <p:nvPr/>
+        </p:nvSpPr>
+        <p:spPr>
+          <a:xfrm>
+            <a:off x="502920" y="2139696"/>
+            <a:ext cx="3383280" cy="2889504"/>
+          </a:xfrm>
+          <a:prstGeom prst="rect">
+            <a:avLst/>
+          </a:prstGeom>
+          <a:solidFill>
+            <a:srgbClr val="FFFFFF"/>
+          </a:solidFill>
+          <a:ln w="9525">
+            <a:solidFill>
+              <a:srgbClr val="D9D9E0"/>
+            </a:solidFill>
+          </a:ln>
+          <a:effectLst/>
+        </p:spPr>
+        <p:style>
+          <a:lnRef idx="1">
+            <a:schemeClr val="accent1"/>
+          </a:lnRef>
+          <a:fillRef idx="3">
+            <a:schemeClr val="accent1"/>
+          </a:fillRef>
+          <a:effectRef idx="2">
+            <a:schemeClr val="accent1"/>
+          </a:effectRef>
+          <a:fontRef idx="minor">
+            <a:schemeClr val="lt1"/>
+          </a:fontRef>
+        </p:style>
+        <p:txBody>
+          <a:bodyPr rtlCol="0" anchor="ctr"/>
+          <a:lstStyle/>
+          <a:p>
+            <a:pPr algn="ctr"/>
+          </a:p>
+        </p:txBody>
+      </p:sp>
+      <p:sp>
+        <p:nvSpPr>
+          <p:cNvPr id="6" name="Rectangle 5"/>
+          <p:cNvSpPr/>
+          <p:nvPr/>
+        </p:nvSpPr>
+        <p:spPr>
+          <a:xfrm>
+            <a:off x="502920" y="2139696"/>
+            <a:ext cx="3383280" cy="82296"/>
+          </a:xfrm>
+          <a:prstGeom prst="rect">
+            <a:avLst/>
+          </a:prstGeom>
+          <a:solidFill>
+            <a:srgbClr val="7823DC"/>
+          </a:solidFill>
+          <a:ln>
+            <a:noFill/>
+          </a:ln>
+          <a:effectLst/>
+        </p:spPr>
+        <p:style>
+          <a:lnRef idx="1">
+            <a:schemeClr val="accent1"/>
+          </a:lnRef>
+          <a:fillRef idx="3">
+            <a:schemeClr val="accent1"/>
+          </a:fillRef>
+          <a:effectRef idx="2">
+            <a:schemeClr val="accent1"/>
+          </a:effectRef>
+          <a:fontRef idx="minor">
+            <a:schemeClr val="lt1"/>
+          </a:fontRef>
+        </p:style>
+        <p:txBody>
+          <a:bodyPr rtlCol="0" anchor="ctr"/>
+          <a:lstStyle/>
+          <a:p>
+            <a:pPr algn="ctr"/>
+          </a:p>
+        </p:txBody>
+      </p:sp>
+      <p:sp>
+        <p:nvSpPr>
+          <p:cNvPr id="7" name="Oval 6"/>
+          <p:cNvSpPr/>
+          <p:nvPr/>
+        </p:nvSpPr>
+        <p:spPr>
+          <a:xfrm>
+            <a:off x="1901952" y="2450592"/>
+            <a:ext cx="585216" cy="585216"/>
+          </a:xfrm>
+          <a:prstGeom prst="ellipse">
+            <a:avLst/>
+          </a:prstGeom>
+          <a:solidFill>
+            <a:srgbClr val="7823DC"/>
+          </a:solidFill>
+          <a:ln>
+            <a:noFill/>
+          </a:ln>
+          <a:effectLst/>
+        </p:spPr>
+        <p:style>
+          <a:lnRef idx="1">
+            <a:schemeClr val="accent1"/>
+          </a:lnRef>
+          <a:fillRef idx="3">
+            <a:schemeClr val="accent1"/>
+          </a:fillRef>
+          <a:effectRef idx="2">
+            <a:schemeClr val="accent1"/>
+          </a:effectRef>
+          <a:fontRef idx="minor">
+            <a:schemeClr val="lt1"/>
+          </a:fontRef>
+        </p:style>
+        <p:txBody>
+          <a:bodyPr rtlCol="0" anchor="ctr" wrap="none" lIns="0" rIns="0" tIns="0" bIns="0"/>
+          <a:lstStyle/>
+          <a:p>
+            <a:pPr algn="ctr">
               <a:spcAft>
-                <a:spcPts val="100"/>
+                <a:spcPts val="0"/>
               </a:spcAft>
             </a:pPr>
             <a:r>
-              <a:rPr sz="980" b="0" i="0">
-                <a:solidFill>
-                  <a:srgbClr val="262630"/>
+              <a:rPr sz="2200" b="1" i="0">
+                <a:solidFill>
+                  <a:srgbClr val="FFFFFF"/>
                 </a:solidFill>
                 <a:latin typeface="Yu Gothic"/>
                 <a:ea typeface="Yu Gothic"/>
                 <a:cs typeface="Yu Gothic"/>
               </a:rPr>
-              <a:t>詰まりは早期にオーナー（新谷）</a:t>
-            </a:r>
-          </a:p>
-          <a:p>
-            <a:pPr algn="l">
+              <a:t>①</a:t>
+            </a:r>
+          </a:p>
+        </p:txBody>
+      </p:sp>
+      <p:sp>
+        <p:nvSpPr>
+          <p:cNvPr id="8" name="TextBox 7"/>
+          <p:cNvSpPr txBox="1"/>
+          <p:nvPr/>
+        </p:nvSpPr>
+        <p:spPr>
+          <a:xfrm>
+            <a:off x="649224" y="3182111"/>
+            <a:ext cx="3090672" cy="457200"/>
+          </a:xfrm>
+          <a:prstGeom prst="rect">
+            <a:avLst/>
+          </a:prstGeom>
+          <a:noFill/>
+        </p:spPr>
+        <p:txBody>
+          <a:bodyPr wrap="square" lIns="0" rIns="0" tIns="0" bIns="0" anchor="ctr">
+            <a:spAutoFit/>
+          </a:bodyPr>
+          <a:lstStyle/>
+          <a:p>
+            <a:pPr algn="ctr">
               <a:spcAft>
-                <a:spcPts val="100"/>
+                <a:spcPts val="0"/>
               </a:spcAft>
             </a:pPr>
             <a:r>
-              <a:rPr sz="980" b="0" i="0">
-                <a:solidFill>
-                  <a:srgbClr val="262630"/>
+              <a:rPr sz="1400" b="1" i="0">
+                <a:solidFill>
+                  <a:srgbClr val="3A106E"/>
                 </a:solidFill>
                 <a:latin typeface="Yu Gothic"/>
                 <a:ea typeface="Yu Gothic"/>
                 <a:cs typeface="Yu Gothic"/>
               </a:rPr>
-              <a:t>へ渡して解く</a:t>
-            </a:r>
-          </a:p>
-        </p:txBody>
-      </p:sp>
-      <p:sp>
-        <p:nvSpPr>
-          <p:cNvPr id="21" name="TextBox 20"/>
+              <a:t>確認会</a:t>
+            </a:r>
+          </a:p>
+        </p:txBody>
+      </p:sp>
+      <p:sp>
+        <p:nvSpPr>
+          <p:cNvPr id="9" name="TextBox 8"/>
           <p:cNvSpPr txBox="1"/>
           <p:nvPr/>
         </p:nvSpPr>
         <p:spPr>
           <a:xfrm>
-            <a:off x="502920" y="3602736"/>
-            <a:ext cx="11183112" cy="274320"/>
+            <a:off x="758952" y="3712464"/>
+            <a:ext cx="2871216" cy="960120"/>
           </a:xfrm>
           <a:prstGeom prst="rect">
             <a:avLst/>
@@ -4291,6 +4552,680 @@
         </p:spPr>
         <p:txBody>
           <a:bodyPr wrap="square" lIns="0" rIns="0" tIns="0" bIns="0">
+            <a:spAutoFit/>
+          </a:bodyPr>
+          <a:lstStyle/>
+          <a:p>
+            <a:pPr algn="ctr">
+              <a:spcAft>
+                <a:spcPts val="0"/>
+              </a:spcAft>
+            </a:pPr>
+            <a:r>
+              <a:rPr sz="1050" b="0" i="0">
+                <a:solidFill>
+                  <a:srgbClr val="262630"/>
+                </a:solidFill>
+                <a:latin typeface="Yu Gothic"/>
+                <a:ea typeface="Yu Gothic"/>
+                <a:cs typeface="Yu Gothic"/>
+              </a:rPr>
+              <a:t>顧客746社・案件299件の「主担当」を各部長と確定</a:t>
+            </a:r>
+          </a:p>
+        </p:txBody>
+      </p:sp>
+      <p:sp>
+        <p:nvSpPr>
+          <p:cNvPr id="10" name="Rectangle 9"/>
+          <p:cNvSpPr/>
+          <p:nvPr/>
+        </p:nvSpPr>
+        <p:spPr>
+          <a:xfrm>
+            <a:off x="4402836" y="2139696"/>
+            <a:ext cx="3383280" cy="2889504"/>
+          </a:xfrm>
+          <a:prstGeom prst="rect">
+            <a:avLst/>
+          </a:prstGeom>
+          <a:solidFill>
+            <a:srgbClr val="7823DC"/>
+          </a:solidFill>
+          <a:ln>
+            <a:noFill/>
+          </a:ln>
+          <a:effectLst/>
+        </p:spPr>
+        <p:style>
+          <a:lnRef idx="1">
+            <a:schemeClr val="accent1"/>
+          </a:lnRef>
+          <a:fillRef idx="3">
+            <a:schemeClr val="accent1"/>
+          </a:fillRef>
+          <a:effectRef idx="2">
+            <a:schemeClr val="accent1"/>
+          </a:effectRef>
+          <a:fontRef idx="minor">
+            <a:schemeClr val="lt1"/>
+          </a:fontRef>
+        </p:style>
+        <p:txBody>
+          <a:bodyPr rtlCol="0" anchor="ctr"/>
+          <a:lstStyle/>
+          <a:p>
+            <a:pPr algn="ctr"/>
+          </a:p>
+        </p:txBody>
+      </p:sp>
+      <p:sp>
+        <p:nvSpPr>
+          <p:cNvPr id="11" name="Oval 10"/>
+          <p:cNvSpPr/>
+          <p:nvPr/>
+        </p:nvSpPr>
+        <p:spPr>
+          <a:xfrm>
+            <a:off x="5801868" y="2450592"/>
+            <a:ext cx="585216" cy="585216"/>
+          </a:xfrm>
+          <a:prstGeom prst="ellipse">
+            <a:avLst/>
+          </a:prstGeom>
+          <a:solidFill>
+            <a:srgbClr val="FFFFFF"/>
+          </a:solidFill>
+          <a:ln>
+            <a:noFill/>
+          </a:ln>
+          <a:effectLst/>
+        </p:spPr>
+        <p:style>
+          <a:lnRef idx="1">
+            <a:schemeClr val="accent1"/>
+          </a:lnRef>
+          <a:fillRef idx="3">
+            <a:schemeClr val="accent1"/>
+          </a:fillRef>
+          <a:effectRef idx="2">
+            <a:schemeClr val="accent1"/>
+          </a:effectRef>
+          <a:fontRef idx="minor">
+            <a:schemeClr val="lt1"/>
+          </a:fontRef>
+        </p:style>
+        <p:txBody>
+          <a:bodyPr rtlCol="0" anchor="ctr" wrap="none" lIns="0" rIns="0" tIns="0" bIns="0"/>
+          <a:lstStyle/>
+          <a:p>
+            <a:pPr algn="ctr">
+              <a:spcAft>
+                <a:spcPts val="0"/>
+              </a:spcAft>
+            </a:pPr>
+            <a:r>
+              <a:rPr sz="2200" b="1" i="0">
+                <a:solidFill>
+                  <a:srgbClr val="7823DC"/>
+                </a:solidFill>
+                <a:latin typeface="Yu Gothic"/>
+                <a:ea typeface="Yu Gothic"/>
+                <a:cs typeface="Yu Gothic"/>
+              </a:rPr>
+              <a:t>②</a:t>
+            </a:r>
+          </a:p>
+        </p:txBody>
+      </p:sp>
+      <p:sp>
+        <p:nvSpPr>
+          <p:cNvPr id="12" name="TextBox 11"/>
+          <p:cNvSpPr txBox="1"/>
+          <p:nvPr/>
+        </p:nvSpPr>
+        <p:spPr>
+          <a:xfrm>
+            <a:off x="4549140" y="3182111"/>
+            <a:ext cx="3090672" cy="457200"/>
+          </a:xfrm>
+          <a:prstGeom prst="rect">
+            <a:avLst/>
+          </a:prstGeom>
+          <a:noFill/>
+        </p:spPr>
+        <p:txBody>
+          <a:bodyPr wrap="square" lIns="0" rIns="0" tIns="0" bIns="0" anchor="ctr">
+            <a:spAutoFit/>
+          </a:bodyPr>
+          <a:lstStyle/>
+          <a:p>
+            <a:pPr algn="ctr">
+              <a:spcAft>
+                <a:spcPts val="0"/>
+              </a:spcAft>
+            </a:pPr>
+            <a:r>
+              <a:rPr sz="1400" b="1" i="0">
+                <a:solidFill>
+                  <a:srgbClr val="FFFFFF"/>
+                </a:solidFill>
+                <a:latin typeface="Yu Gothic"/>
+                <a:ea typeface="Yu Gothic"/>
+                <a:cs typeface="Yu Gothic"/>
+              </a:rPr>
+              <a:t>財務ひも付け</a:t>
+            </a:r>
+          </a:p>
+        </p:txBody>
+      </p:sp>
+      <p:sp>
+        <p:nvSpPr>
+          <p:cNvPr id="13" name="TextBox 12"/>
+          <p:cNvSpPr txBox="1"/>
+          <p:nvPr/>
+        </p:nvSpPr>
+        <p:spPr>
+          <a:xfrm>
+            <a:off x="4658868" y="3712464"/>
+            <a:ext cx="2871216" cy="960120"/>
+          </a:xfrm>
+          <a:prstGeom prst="rect">
+            <a:avLst/>
+          </a:prstGeom>
+          <a:noFill/>
+        </p:spPr>
+        <p:txBody>
+          <a:bodyPr wrap="square" lIns="0" rIns="0" tIns="0" bIns="0">
+            <a:spAutoFit/>
+          </a:bodyPr>
+          <a:lstStyle/>
+          <a:p>
+            <a:pPr algn="ctr">
+              <a:spcAft>
+                <a:spcPts val="0"/>
+              </a:spcAft>
+            </a:pPr>
+            <a:r>
+              <a:rPr sz="1050" b="0" i="0">
+                <a:solidFill>
+                  <a:srgbClr val="FFFFFF"/>
+                </a:solidFill>
+                <a:latin typeface="Yu Gothic"/>
+                <a:ea typeface="Yu Gothic"/>
+                <a:cs typeface="Yu Gothic"/>
+              </a:rPr>
+              <a:t>財務チームのデータで顧客・案件に金額を付ける</a:t>
+            </a:r>
+          </a:p>
+        </p:txBody>
+      </p:sp>
+      <p:sp>
+        <p:nvSpPr>
+          <p:cNvPr id="14" name="TextBox 13"/>
+          <p:cNvSpPr txBox="1"/>
+          <p:nvPr/>
+        </p:nvSpPr>
+        <p:spPr>
+          <a:xfrm>
+            <a:off x="4585716" y="4553712"/>
+            <a:ext cx="3017520" cy="329184"/>
+          </a:xfrm>
+          <a:prstGeom prst="rect">
+            <a:avLst/>
+          </a:prstGeom>
+          <a:noFill/>
+        </p:spPr>
+        <p:txBody>
+          <a:bodyPr wrap="square" lIns="0" rIns="0" tIns="0" bIns="0" anchor="ctr">
+            <a:spAutoFit/>
+          </a:bodyPr>
+          <a:lstStyle/>
+          <a:p>
+            <a:pPr algn="ctr">
+              <a:spcAft>
+                <a:spcPts val="0"/>
+              </a:spcAft>
+            </a:pPr>
+            <a:r>
+              <a:rPr sz="1050" b="1" i="0">
+                <a:solidFill>
+                  <a:srgbClr val="E0D2F6"/>
+                </a:solidFill>
+                <a:latin typeface="Yu Gothic"/>
+                <a:ea typeface="Yu Gothic"/>
+                <a:cs typeface="Yu Gothic"/>
+              </a:rPr>
+              <a:t>← 柳沼さんにしかできない部分</a:t>
+            </a:r>
+          </a:p>
+        </p:txBody>
+      </p:sp>
+      <p:sp>
+        <p:nvSpPr>
+          <p:cNvPr id="15" name="Rectangle 14"/>
+          <p:cNvSpPr/>
+          <p:nvPr/>
+        </p:nvSpPr>
+        <p:spPr>
+          <a:xfrm>
+            <a:off x="8302752" y="2139696"/>
+            <a:ext cx="3383280" cy="2889504"/>
+          </a:xfrm>
+          <a:prstGeom prst="rect">
+            <a:avLst/>
+          </a:prstGeom>
+          <a:solidFill>
+            <a:srgbClr val="FFFFFF"/>
+          </a:solidFill>
+          <a:ln w="9525">
+            <a:solidFill>
+              <a:srgbClr val="D9D9E0"/>
+            </a:solidFill>
+          </a:ln>
+          <a:effectLst/>
+        </p:spPr>
+        <p:style>
+          <a:lnRef idx="1">
+            <a:schemeClr val="accent1"/>
+          </a:lnRef>
+          <a:fillRef idx="3">
+            <a:schemeClr val="accent1"/>
+          </a:fillRef>
+          <a:effectRef idx="2">
+            <a:schemeClr val="accent1"/>
+          </a:effectRef>
+          <a:fontRef idx="minor">
+            <a:schemeClr val="lt1"/>
+          </a:fontRef>
+        </p:style>
+        <p:txBody>
+          <a:bodyPr rtlCol="0" anchor="ctr"/>
+          <a:lstStyle/>
+          <a:p>
+            <a:pPr algn="ctr"/>
+          </a:p>
+        </p:txBody>
+      </p:sp>
+      <p:sp>
+        <p:nvSpPr>
+          <p:cNvPr id="16" name="Rectangle 15"/>
+          <p:cNvSpPr/>
+          <p:nvPr/>
+        </p:nvSpPr>
+        <p:spPr>
+          <a:xfrm>
+            <a:off x="8302752" y="2139696"/>
+            <a:ext cx="3383280" cy="82296"/>
+          </a:xfrm>
+          <a:prstGeom prst="rect">
+            <a:avLst/>
+          </a:prstGeom>
+          <a:solidFill>
+            <a:srgbClr val="7823DC"/>
+          </a:solidFill>
+          <a:ln>
+            <a:noFill/>
+          </a:ln>
+          <a:effectLst/>
+        </p:spPr>
+        <p:style>
+          <a:lnRef idx="1">
+            <a:schemeClr val="accent1"/>
+          </a:lnRef>
+          <a:fillRef idx="3">
+            <a:schemeClr val="accent1"/>
+          </a:fillRef>
+          <a:effectRef idx="2">
+            <a:schemeClr val="accent1"/>
+          </a:effectRef>
+          <a:fontRef idx="minor">
+            <a:schemeClr val="lt1"/>
+          </a:fontRef>
+        </p:style>
+        <p:txBody>
+          <a:bodyPr rtlCol="0" anchor="ctr"/>
+          <a:lstStyle/>
+          <a:p>
+            <a:pPr algn="ctr"/>
+          </a:p>
+        </p:txBody>
+      </p:sp>
+      <p:sp>
+        <p:nvSpPr>
+          <p:cNvPr id="17" name="Oval 16"/>
+          <p:cNvSpPr/>
+          <p:nvPr/>
+        </p:nvSpPr>
+        <p:spPr>
+          <a:xfrm>
+            <a:off x="9701784" y="2450592"/>
+            <a:ext cx="585216" cy="585216"/>
+          </a:xfrm>
+          <a:prstGeom prst="ellipse">
+            <a:avLst/>
+          </a:prstGeom>
+          <a:solidFill>
+            <a:srgbClr val="7823DC"/>
+          </a:solidFill>
+          <a:ln>
+            <a:noFill/>
+          </a:ln>
+          <a:effectLst/>
+        </p:spPr>
+        <p:style>
+          <a:lnRef idx="1">
+            <a:schemeClr val="accent1"/>
+          </a:lnRef>
+          <a:fillRef idx="3">
+            <a:schemeClr val="accent1"/>
+          </a:fillRef>
+          <a:effectRef idx="2">
+            <a:schemeClr val="accent1"/>
+          </a:effectRef>
+          <a:fontRef idx="minor">
+            <a:schemeClr val="lt1"/>
+          </a:fontRef>
+        </p:style>
+        <p:txBody>
+          <a:bodyPr rtlCol="0" anchor="ctr" wrap="none" lIns="0" rIns="0" tIns="0" bIns="0"/>
+          <a:lstStyle/>
+          <a:p>
+            <a:pPr algn="ctr">
+              <a:spcAft>
+                <a:spcPts val="0"/>
+              </a:spcAft>
+            </a:pPr>
+            <a:r>
+              <a:rPr sz="2200" b="1" i="0">
+                <a:solidFill>
+                  <a:srgbClr val="FFFFFF"/>
+                </a:solidFill>
+                <a:latin typeface="Yu Gothic"/>
+                <a:ea typeface="Yu Gothic"/>
+                <a:cs typeface="Yu Gothic"/>
+              </a:rPr>
+              <a:t>③</a:t>
+            </a:r>
+          </a:p>
+        </p:txBody>
+      </p:sp>
+      <p:sp>
+        <p:nvSpPr>
+          <p:cNvPr id="18" name="TextBox 17"/>
+          <p:cNvSpPr txBox="1"/>
+          <p:nvPr/>
+        </p:nvSpPr>
+        <p:spPr>
+          <a:xfrm>
+            <a:off x="8449056" y="3182111"/>
+            <a:ext cx="3090672" cy="457200"/>
+          </a:xfrm>
+          <a:prstGeom prst="rect">
+            <a:avLst/>
+          </a:prstGeom>
+          <a:noFill/>
+        </p:spPr>
+        <p:txBody>
+          <a:bodyPr wrap="square" lIns="0" rIns="0" tIns="0" bIns="0" anchor="ctr">
+            <a:spAutoFit/>
+          </a:bodyPr>
+          <a:lstStyle/>
+          <a:p>
+            <a:pPr algn="ctr">
+              <a:spcAft>
+                <a:spcPts val="0"/>
+              </a:spcAft>
+            </a:pPr>
+            <a:r>
+              <a:rPr sz="1400" b="1" i="0">
+                <a:solidFill>
+                  <a:srgbClr val="3A106E"/>
+                </a:solidFill>
+                <a:latin typeface="Yu Gothic"/>
+                <a:ea typeface="Yu Gothic"/>
+                <a:cs typeface="Yu Gothic"/>
+              </a:rPr>
+              <a:t>採点 → 力の入れ直し</a:t>
+            </a:r>
+          </a:p>
+        </p:txBody>
+      </p:sp>
+      <p:sp>
+        <p:nvSpPr>
+          <p:cNvPr id="19" name="TextBox 18"/>
+          <p:cNvSpPr txBox="1"/>
+          <p:nvPr/>
+        </p:nvSpPr>
+        <p:spPr>
+          <a:xfrm>
+            <a:off x="8558784" y="3712464"/>
+            <a:ext cx="2871216" cy="960120"/>
+          </a:xfrm>
+          <a:prstGeom prst="rect">
+            <a:avLst/>
+          </a:prstGeom>
+          <a:noFill/>
+        </p:spPr>
+        <p:txBody>
+          <a:bodyPr wrap="square" lIns="0" rIns="0" tIns="0" bIns="0">
+            <a:spAutoFit/>
+          </a:bodyPr>
+          <a:lstStyle/>
+          <a:p>
+            <a:pPr algn="ctr">
+              <a:spcAft>
+                <a:spcPts val="0"/>
+              </a:spcAft>
+            </a:pPr>
+            <a:r>
+              <a:rPr sz="1050" b="0" i="0">
+                <a:solidFill>
+                  <a:srgbClr val="262630"/>
+                </a:solidFill>
+                <a:latin typeface="Yu Gothic"/>
+                <a:ea typeface="Yu Gothic"/>
+                <a:cs typeface="Yu Gothic"/>
+              </a:rPr>
+              <a:t>ランクを決め、力の注ぎ先を変える（①②の完了後）</a:t>
+            </a:r>
+          </a:p>
+        </p:txBody>
+      </p:sp>
+      <p:sp>
+        <p:nvSpPr>
+          <p:cNvPr id="20" name="Chevron 19"/>
+          <p:cNvSpPr/>
+          <p:nvPr/>
+        </p:nvSpPr>
+        <p:spPr>
+          <a:xfrm>
+            <a:off x="3913632" y="3346704"/>
+            <a:ext cx="438912" cy="475488"/>
+          </a:xfrm>
+          <a:prstGeom prst="chevron">
+            <a:avLst/>
+          </a:prstGeom>
+          <a:solidFill>
+            <a:srgbClr val="7823DC"/>
+          </a:solidFill>
+          <a:ln>
+            <a:noFill/>
+          </a:ln>
+          <a:effectLst/>
+        </p:spPr>
+        <p:style>
+          <a:lnRef idx="1">
+            <a:schemeClr val="accent1"/>
+          </a:lnRef>
+          <a:fillRef idx="3">
+            <a:schemeClr val="accent1"/>
+          </a:fillRef>
+          <a:effectRef idx="2">
+            <a:schemeClr val="accent1"/>
+          </a:effectRef>
+          <a:fontRef idx="minor">
+            <a:schemeClr val="lt1"/>
+          </a:fontRef>
+        </p:style>
+        <p:txBody>
+          <a:bodyPr rtlCol="0" anchor="ctr"/>
+          <a:lstStyle/>
+          <a:p>
+            <a:pPr algn="ctr"/>
+          </a:p>
+        </p:txBody>
+      </p:sp>
+      <p:sp>
+        <p:nvSpPr>
+          <p:cNvPr id="21" name="Chevron 20"/>
+          <p:cNvSpPr/>
+          <p:nvPr/>
+        </p:nvSpPr>
+        <p:spPr>
+          <a:xfrm>
+            <a:off x="7813548" y="3346704"/>
+            <a:ext cx="438912" cy="475488"/>
+          </a:xfrm>
+          <a:prstGeom prst="chevron">
+            <a:avLst/>
+          </a:prstGeom>
+          <a:solidFill>
+            <a:srgbClr val="7823DC"/>
+          </a:solidFill>
+          <a:ln>
+            <a:noFill/>
+          </a:ln>
+          <a:effectLst/>
+        </p:spPr>
+        <p:style>
+          <a:lnRef idx="1">
+            <a:schemeClr val="accent1"/>
+          </a:lnRef>
+          <a:fillRef idx="3">
+            <a:schemeClr val="accent1"/>
+          </a:fillRef>
+          <a:effectRef idx="2">
+            <a:schemeClr val="accent1"/>
+          </a:effectRef>
+          <a:fontRef idx="minor">
+            <a:schemeClr val="lt1"/>
+          </a:fontRef>
+        </p:style>
+        <p:txBody>
+          <a:bodyPr rtlCol="0" anchor="ctr"/>
+          <a:lstStyle/>
+          <a:p>
+            <a:pPr algn="ctr"/>
+          </a:p>
+        </p:txBody>
+      </p:sp>
+      <p:sp>
+        <p:nvSpPr>
+          <p:cNvPr id="22" name="Rectangle 21"/>
+          <p:cNvSpPr/>
+          <p:nvPr/>
+        </p:nvSpPr>
+        <p:spPr>
+          <a:xfrm>
+            <a:off x="502920" y="5248656"/>
+            <a:ext cx="11183112" cy="859536"/>
+          </a:xfrm>
+          <a:prstGeom prst="rect">
+            <a:avLst/>
+          </a:prstGeom>
+          <a:solidFill>
+            <a:srgbClr val="3A106E"/>
+          </a:solidFill>
+          <a:ln>
+            <a:noFill/>
+          </a:ln>
+          <a:effectLst/>
+        </p:spPr>
+        <p:style>
+          <a:lnRef idx="1">
+            <a:schemeClr val="accent1"/>
+          </a:lnRef>
+          <a:fillRef idx="3">
+            <a:schemeClr val="accent1"/>
+          </a:fillRef>
+          <a:effectRef idx="2">
+            <a:schemeClr val="accent1"/>
+          </a:effectRef>
+          <a:fontRef idx="minor">
+            <a:schemeClr val="lt1"/>
+          </a:fontRef>
+        </p:style>
+        <p:txBody>
+          <a:bodyPr rtlCol="0" anchor="ctr"/>
+          <a:lstStyle/>
+          <a:p>
+            <a:pPr algn="ctr"/>
+          </a:p>
+        </p:txBody>
+      </p:sp>
+      <p:sp>
+        <p:nvSpPr>
+          <p:cNvPr id="23" name="Rectangle 22"/>
+          <p:cNvSpPr/>
+          <p:nvPr/>
+        </p:nvSpPr>
+        <p:spPr>
+          <a:xfrm>
+            <a:off x="502920" y="5248656"/>
+            <a:ext cx="38100" cy="859536"/>
+          </a:xfrm>
+          <a:prstGeom prst="rect">
+            <a:avLst/>
+          </a:prstGeom>
+          <a:solidFill>
+            <a:srgbClr val="7823DC"/>
+          </a:solidFill>
+          <a:ln>
+            <a:noFill/>
+          </a:ln>
+          <a:effectLst/>
+        </p:spPr>
+        <p:style>
+          <a:lnRef idx="1">
+            <a:schemeClr val="accent1"/>
+          </a:lnRef>
+          <a:fillRef idx="3">
+            <a:schemeClr val="accent1"/>
+          </a:fillRef>
+          <a:effectRef idx="2">
+            <a:schemeClr val="accent1"/>
+          </a:effectRef>
+          <a:fontRef idx="minor">
+            <a:schemeClr val="lt1"/>
+          </a:fontRef>
+        </p:style>
+        <p:txBody>
+          <a:bodyPr rtlCol="0" anchor="ctr"/>
+          <a:lstStyle/>
+          <a:p>
+            <a:pPr algn="ctr"/>
+          </a:p>
+        </p:txBody>
+      </p:sp>
+      <p:sp>
+        <p:nvSpPr>
+          <p:cNvPr id="24" name="TextBox 23"/>
+          <p:cNvSpPr txBox="1"/>
+          <p:nvPr/>
+        </p:nvSpPr>
+        <p:spPr>
+          <a:xfrm>
+            <a:off x="777240" y="5340096"/>
+            <a:ext cx="10698480" cy="676656"/>
+          </a:xfrm>
+          <a:prstGeom prst="rect">
+            <a:avLst/>
+          </a:prstGeom>
+          <a:noFill/>
+        </p:spPr>
+        <p:txBody>
+          <a:bodyPr wrap="square" lIns="0" rIns="0" tIns="0" bIns="0" anchor="ctr">
             <a:spAutoFit/>
           </a:bodyPr>
           <a:lstStyle/>
@@ -4301,30 +5236,311 @@
               </a:spcAft>
             </a:pPr>
             <a:r>
-              <a:rPr sz="1100" b="1" i="0">
-                <a:solidFill>
-                  <a:srgbClr val="3A106E"/>
+              <a:rPr sz="1200" b="1" i="0">
+                <a:solidFill>
+                  <a:srgbClr val="E0D2F6"/>
                 </a:solidFill>
                 <a:latin typeface="Yu Gothic"/>
                 <a:ea typeface="Yu Gothic"/>
                 <a:cs typeface="Yu Gothic"/>
               </a:rPr>
-              <a:t>STO体制（専任1名＋兼務3名＋オーナー）</a:t>
-            </a:r>
+              <a:t>90日の約束　</a:t>
+            </a:r>
+            <a:r>
+              <a:rPr sz="1200" b="1" i="0">
+                <a:solidFill>
+                  <a:srgbClr val="FFFFFF"/>
+                </a:solidFill>
+                <a:latin typeface="Yu Gothic"/>
+                <a:ea typeface="Yu Gothic"/>
+                <a:cs typeface="Yu Gothic"/>
+              </a:rPr>
+              <a:t>30日 = 数字がつながる ／ 60日 = ランクが決まる ／ 90日 = 力の入れ直しを実行</a:t>
+            </a:r>
+          </a:p>
+        </p:txBody>
+      </p:sp>
+      <p:sp>
+        <p:nvSpPr>
+          <p:cNvPr id="25" name="Rectangle 24"/>
+          <p:cNvSpPr/>
+          <p:nvPr/>
+        </p:nvSpPr>
+        <p:spPr>
+          <a:xfrm>
+            <a:off x="502920" y="6510528"/>
+            <a:ext cx="11183112" cy="15240"/>
+          </a:xfrm>
+          <a:prstGeom prst="rect">
+            <a:avLst/>
+          </a:prstGeom>
+          <a:solidFill>
+            <a:srgbClr val="D9D9E0"/>
+          </a:solidFill>
+          <a:ln>
+            <a:noFill/>
+          </a:ln>
+          <a:effectLst/>
+        </p:spPr>
+        <p:style>
+          <a:lnRef idx="1">
+            <a:schemeClr val="accent1"/>
+          </a:lnRef>
+          <a:fillRef idx="3">
+            <a:schemeClr val="accent1"/>
+          </a:fillRef>
+          <a:effectRef idx="2">
+            <a:schemeClr val="accent1"/>
+          </a:effectRef>
+          <a:fontRef idx="minor">
+            <a:schemeClr val="lt1"/>
+          </a:fontRef>
+        </p:style>
+        <p:txBody>
+          <a:bodyPr rtlCol="0" anchor="ctr"/>
+          <a:lstStyle/>
+          <a:p>
+            <a:pPr algn="ctr"/>
+          </a:p>
+        </p:txBody>
+      </p:sp>
+      <p:sp>
+        <p:nvSpPr>
+          <p:cNvPr id="26" name="TextBox 25"/>
+          <p:cNvSpPr txBox="1"/>
+          <p:nvPr/>
+        </p:nvSpPr>
+        <p:spPr>
+          <a:xfrm>
+            <a:off x="502920" y="6565392"/>
+            <a:ext cx="8686800" cy="274320"/>
+          </a:xfrm>
+          <a:prstGeom prst="rect">
+            <a:avLst/>
+          </a:prstGeom>
+          <a:noFill/>
+        </p:spPr>
+        <p:txBody>
+          <a:bodyPr wrap="square" lIns="0" rIns="0" tIns="0" bIns="0">
+            <a:spAutoFit/>
+          </a:bodyPr>
+          <a:lstStyle/>
+          <a:p>
+            <a:pPr algn="l">
+              <a:spcAft>
+                <a:spcPts val="400"/>
+              </a:spcAft>
+            </a:pPr>
+            <a:r>
+              <a:rPr sz="750" b="0" i="0">
+                <a:solidFill>
+                  <a:srgbClr val="8A8A99"/>
+                </a:solidFill>
+                <a:latin typeface="Yu Gothic"/>
+                <a:ea typeface="Yu Gothic"/>
+                <a:cs typeface="Yu Gothic"/>
+              </a:rPr>
+              <a:t>円谷プロダクション 営業改革 | 社外秘</a:t>
+            </a:r>
+          </a:p>
+        </p:txBody>
+      </p:sp>
+      <p:sp>
+        <p:nvSpPr>
+          <p:cNvPr id="27" name="TextBox 26"/>
+          <p:cNvSpPr txBox="1"/>
+          <p:nvPr/>
+        </p:nvSpPr>
+        <p:spPr>
+          <a:xfrm>
+            <a:off x="11247120" y="6565392"/>
+            <a:ext cx="457200" cy="274320"/>
+          </a:xfrm>
+          <a:prstGeom prst="rect">
+            <a:avLst/>
+          </a:prstGeom>
+          <a:noFill/>
+        </p:spPr>
+        <p:txBody>
+          <a:bodyPr wrap="square" lIns="0" rIns="0" tIns="0" bIns="0">
+            <a:spAutoFit/>
+          </a:bodyPr>
+          <a:lstStyle/>
+          <a:p>
+            <a:pPr algn="r">
+              <a:spcAft>
+                <a:spcPts val="400"/>
+              </a:spcAft>
+            </a:pPr>
+            <a:r>
+              <a:rPr sz="900" b="0" i="0">
+                <a:solidFill>
+                  <a:srgbClr val="5F5F6E"/>
+                </a:solidFill>
+                <a:latin typeface="Yu Gothic"/>
+                <a:ea typeface="Yu Gothic"/>
+                <a:cs typeface="Yu Gothic"/>
+              </a:rPr>
+              <a:t>3</a:t>
+            </a:r>
+          </a:p>
+        </p:txBody>
+      </p:sp>
+    </p:spTree>
+  </p:cSld>
+  <p:clrMapOvr>
+    <a:masterClrMapping/>
+  </p:clrMapOvr>
+</p:sld>
+</file>
+
+<file path=ppt/slides/slide4.xml><?xml version="1.0" encoding="utf-8"?>
+<p:sld xmlns:a="http://schemas.openxmlformats.org/drawingml/2006/main" xmlns:p="http://schemas.openxmlformats.org/presentationml/2006/main" xmlns:r="http://schemas.openxmlformats.org/officeDocument/2006/relationships">
+  <p:cSld>
+    <p:spTree>
+      <p:nvGrpSpPr>
+        <p:cNvPr id="1" name=""/>
+        <p:cNvGrpSpPr/>
+        <p:nvPr/>
+      </p:nvGrpSpPr>
+      <p:grpSpPr/>
+      <p:sp>
+        <p:nvSpPr>
+          <p:cNvPr id="2" name="TextBox 1"/>
+          <p:cNvSpPr txBox="1"/>
+          <p:nvPr/>
+        </p:nvSpPr>
+        <p:spPr>
+          <a:xfrm>
+            <a:off x="502920" y="256032"/>
+            <a:ext cx="11155680" cy="256032"/>
+          </a:xfrm>
+          <a:prstGeom prst="rect">
+            <a:avLst/>
+          </a:prstGeom>
+          <a:noFill/>
+        </p:spPr>
+        <p:txBody>
+          <a:bodyPr wrap="square" lIns="0" rIns="0" tIns="0" bIns="0">
+            <a:spAutoFit/>
+          </a:bodyPr>
+          <a:lstStyle/>
+          <a:p>
+            <a:pPr algn="l">
+              <a:spcAft>
+                <a:spcPts val="400"/>
+              </a:spcAft>
+            </a:pPr>
+            <a:r>
+              <a:rPr sz="1000" b="1" i="0">
+                <a:solidFill>
+                  <a:srgbClr val="7823DC"/>
+                </a:solidFill>
+                <a:latin typeface="Yu Gothic"/>
+                <a:ea typeface="Yu Gothic"/>
+                <a:cs typeface="Yu Gothic"/>
+              </a:rPr>
+              <a:t>体制（専任1名＋兼務3名＋オーナー）</a:t>
+            </a:r>
+          </a:p>
+        </p:txBody>
+      </p:sp>
+      <p:sp>
+        <p:nvSpPr>
+          <p:cNvPr id="3" name="TextBox 2"/>
+          <p:cNvSpPr txBox="1"/>
+          <p:nvPr/>
+        </p:nvSpPr>
+        <p:spPr>
+          <a:xfrm>
+            <a:off x="502920" y="512064"/>
+            <a:ext cx="11155680" cy="868680"/>
+          </a:xfrm>
+          <a:prstGeom prst="rect">
+            <a:avLst/>
+          </a:prstGeom>
+          <a:noFill/>
+        </p:spPr>
+        <p:txBody>
+          <a:bodyPr wrap="square" lIns="0" rIns="0" tIns="0" bIns="0">
+            <a:spAutoFit/>
+          </a:bodyPr>
+          <a:lstStyle/>
+          <a:p>
+            <a:pPr algn="l">
+              <a:spcAft>
+                <a:spcPts val="0"/>
+              </a:spcAft>
+            </a:pPr>
+            <a:r>
+              <a:rPr sz="1900" b="1" i="0">
+                <a:solidFill>
+                  <a:srgbClr val="262630"/>
+                </a:solidFill>
+                <a:latin typeface="Yu Gothic"/>
+                <a:ea typeface="Yu Gothic"/>
+                <a:cs typeface="Yu Gothic"/>
+              </a:rPr>
+              <a:t>STOはデータと会議を整える運転席。実行の主役は各部長です</a:t>
+            </a:r>
+          </a:p>
+        </p:txBody>
+      </p:sp>
+      <p:sp>
+        <p:nvSpPr>
+          <p:cNvPr id="4" name="Rectangle 3"/>
+          <p:cNvSpPr/>
+          <p:nvPr/>
+        </p:nvSpPr>
+        <p:spPr>
+          <a:xfrm>
+            <a:off x="502920" y="1389888"/>
+            <a:ext cx="1463040" cy="33020"/>
+          </a:xfrm>
+          <a:prstGeom prst="rect">
+            <a:avLst/>
+          </a:prstGeom>
+          <a:solidFill>
+            <a:srgbClr val="7823DC"/>
+          </a:solidFill>
+          <a:ln>
+            <a:noFill/>
+          </a:ln>
+          <a:effectLst/>
+        </p:spPr>
+        <p:style>
+          <a:lnRef idx="1">
+            <a:schemeClr val="accent1"/>
+          </a:lnRef>
+          <a:fillRef idx="3">
+            <a:schemeClr val="accent1"/>
+          </a:fillRef>
+          <a:effectRef idx="2">
+            <a:schemeClr val="accent1"/>
+          </a:effectRef>
+          <a:fontRef idx="minor">
+            <a:schemeClr val="lt1"/>
+          </a:fontRef>
+        </p:style>
+        <p:txBody>
+          <a:bodyPr rtlCol="0" anchor="ctr"/>
+          <a:lstStyle/>
+          <a:p>
+            <a:pPr algn="ctr"/>
           </a:p>
         </p:txBody>
       </p:sp>
       <p:graphicFrame>
         <p:nvGraphicFramePr>
-          <p:cNvPr id="22" name="Table 21"/>
+          <p:cNvPr id="5" name="Table 4"/>
           <p:cNvGraphicFramePr>
             <a:graphicFrameLocks noGrp="1"/>
           </p:cNvGraphicFramePr>
           <p:nvPr/>
         </p:nvGraphicFramePr>
         <p:xfrm>
-          <a:off x="502920" y="3913632"/>
-          <a:ext cx="11183110" cy="1947672"/>
+          <a:off x="502920" y="2212848"/>
+          <a:ext cx="11183110" cy="2523744"/>
         </p:xfrm>
         <a:graphic>
           <a:graphicData uri="http://schemas.openxmlformats.org/drawingml/2006/table">
@@ -4338,7 +5554,7 @@
                 <a:gridCol w="1818392"/>
                 <a:gridCol w="5455176"/>
               </a:tblGrid>
-              <a:tr h="324612">
+              <a:tr h="420624">
                 <a:tc>
                   <a:txBody>
                     <a:bodyPr wrap="square"/>
@@ -4350,7 +5566,7 @@
                         </a:spcAft>
                       </a:pPr>
                       <a:r>
-                        <a:rPr sz="1000" b="1" i="0">
+                        <a:rPr sz="1050" b="1" i="0">
                           <a:solidFill>
                             <a:srgbClr val="FFFFFF"/>
                           </a:solidFill>
@@ -4379,7 +5595,7 @@
                         </a:spcAft>
                       </a:pPr>
                       <a:r>
-                        <a:rPr sz="1000" b="1" i="0">
+                        <a:rPr sz="1050" b="1" i="0">
                           <a:solidFill>
                             <a:srgbClr val="FFFFFF"/>
                           </a:solidFill>
@@ -4408,7 +5624,7 @@
                         </a:spcAft>
                       </a:pPr>
                       <a:r>
-                        <a:rPr sz="1000" b="1" i="0">
+                        <a:rPr sz="1050" b="1" i="0">
                           <a:solidFill>
                             <a:srgbClr val="FFFFFF"/>
                           </a:solidFill>
@@ -4437,7 +5653,7 @@
                         </a:spcAft>
                       </a:pPr>
                       <a:r>
-                        <a:rPr sz="1000" b="1" i="0">
+                        <a:rPr sz="1050" b="1" i="0">
                           <a:solidFill>
                             <a:srgbClr val="FFFFFF"/>
                           </a:solidFill>
@@ -4456,7 +5672,7 @@
                   </a:tcPr>
                 </a:tc>
               </a:tr>
-              <a:tr h="324612">
+              <a:tr h="420624">
                 <a:tc>
                   <a:txBody>
                     <a:bodyPr wrap="square"/>
@@ -4468,7 +5684,7 @@
                         </a:spcAft>
                       </a:pPr>
                       <a:r>
-                        <a:rPr sz="950" b="1" i="0">
+                        <a:rPr sz="1000" b="1" i="0">
                           <a:solidFill>
                             <a:srgbClr val="3A106E"/>
                           </a:solidFill>
@@ -4497,7 +5713,7 @@
                         </a:spcAft>
                       </a:pPr>
                       <a:r>
-                        <a:rPr sz="950" b="0" i="0">
+                        <a:rPr sz="1000" b="0" i="0">
                           <a:solidFill>
                             <a:srgbClr val="262630"/>
                           </a:solidFill>
@@ -4526,7 +5742,7 @@
                         </a:spcAft>
                       </a:pPr>
                       <a:r>
-                        <a:rPr sz="950" b="0" i="0">
+                        <a:rPr sz="1000" b="0" i="0">
                           <a:solidFill>
                             <a:srgbClr val="262630"/>
                           </a:solidFill>
@@ -4555,7 +5771,7 @@
                         </a:spcAft>
                       </a:pPr>
                       <a:r>
-                        <a:rPr sz="950" b="0" i="0">
+                        <a:rPr sz="1000" b="0" i="0">
                           <a:solidFill>
                             <a:srgbClr val="262630"/>
                           </a:solidFill>
@@ -4574,7 +5790,7 @@
                   </a:tcPr>
                 </a:tc>
               </a:tr>
-              <a:tr h="324612">
+              <a:tr h="420624">
                 <a:tc>
                   <a:txBody>
                     <a:bodyPr wrap="square"/>
@@ -4586,7 +5802,7 @@
                         </a:spcAft>
                       </a:pPr>
                       <a:r>
-                        <a:rPr sz="950" b="1" i="0">
+                        <a:rPr sz="1000" b="1" i="0">
                           <a:solidFill>
                             <a:srgbClr val="3A106E"/>
                           </a:solidFill>
@@ -4615,7 +5831,7 @@
                         </a:spcAft>
                       </a:pPr>
                       <a:r>
-                        <a:rPr sz="950" b="0" i="0">
+                        <a:rPr sz="1000" b="0" i="0">
                           <a:solidFill>
                             <a:srgbClr val="262630"/>
                           </a:solidFill>
@@ -4644,7 +5860,7 @@
                         </a:spcAft>
                       </a:pPr>
                       <a:r>
-                        <a:rPr sz="950" b="0" i="0">
+                        <a:rPr sz="1000" b="0" i="0">
                           <a:solidFill>
                             <a:srgbClr val="262630"/>
                           </a:solidFill>
@@ -4673,7 +5889,7 @@
                         </a:spcAft>
                       </a:pPr>
                       <a:r>
-                        <a:rPr sz="950" b="0" i="0">
+                        <a:rPr sz="1000" b="0" i="0">
                           <a:solidFill>
                             <a:srgbClr val="262630"/>
                           </a:solidFill>
@@ -4692,7 +5908,7 @@
                   </a:tcPr>
                 </a:tc>
               </a:tr>
-              <a:tr h="324612">
+              <a:tr h="420624">
                 <a:tc>
                   <a:txBody>
                     <a:bodyPr wrap="square"/>
@@ -4704,7 +5920,7 @@
                         </a:spcAft>
                       </a:pPr>
                       <a:r>
-                        <a:rPr sz="950" b="1" i="0">
+                        <a:rPr sz="1000" b="1" i="0">
                           <a:solidFill>
                             <a:srgbClr val="3A106E"/>
                           </a:solidFill>
@@ -4733,7 +5949,7 @@
                         </a:spcAft>
                       </a:pPr>
                       <a:r>
-                        <a:rPr sz="950" b="0" i="0">
+                        <a:rPr sz="1000" b="0" i="0">
                           <a:solidFill>
                             <a:srgbClr val="262630"/>
                           </a:solidFill>
@@ -4762,7 +5978,7 @@
                         </a:spcAft>
                       </a:pPr>
                       <a:r>
-                        <a:rPr sz="950" b="0" i="0">
+                        <a:rPr sz="1000" b="0" i="0">
                           <a:solidFill>
                             <a:srgbClr val="262630"/>
                           </a:solidFill>
@@ -4791,7 +6007,7 @@
                         </a:spcAft>
                       </a:pPr>
                       <a:r>
-                        <a:rPr sz="950" b="0" i="0">
+                        <a:rPr sz="1000" b="0" i="0">
                           <a:solidFill>
                             <a:srgbClr val="262630"/>
                           </a:solidFill>
@@ -4810,7 +6026,7 @@
                   </a:tcPr>
                 </a:tc>
               </a:tr>
-              <a:tr h="324612">
+              <a:tr h="420624">
                 <a:tc>
                   <a:txBody>
                     <a:bodyPr wrap="square"/>
@@ -4822,7 +6038,7 @@
                         </a:spcAft>
                       </a:pPr>
                       <a:r>
-                        <a:rPr sz="950" b="1" i="0">
+                        <a:rPr sz="1000" b="1" i="0">
                           <a:solidFill>
                             <a:srgbClr val="3A106E"/>
                           </a:solidFill>
@@ -4851,7 +6067,7 @@
                         </a:spcAft>
                       </a:pPr>
                       <a:r>
-                        <a:rPr sz="950" b="0" i="0">
+                        <a:rPr sz="1000" b="0" i="0">
                           <a:solidFill>
                             <a:srgbClr val="262630"/>
                           </a:solidFill>
@@ -4880,7 +6096,7 @@
                         </a:spcAft>
                       </a:pPr>
                       <a:r>
-                        <a:rPr sz="950" b="0" i="0">
+                        <a:rPr sz="1000" b="0" i="0">
                           <a:solidFill>
                             <a:srgbClr val="262630"/>
                           </a:solidFill>
@@ -4909,7 +6125,7 @@
                         </a:spcAft>
                       </a:pPr>
                       <a:r>
-                        <a:rPr sz="950" b="0" i="0">
+                        <a:rPr sz="1000" b="0" i="0">
                           <a:solidFill>
                             <a:srgbClr val="262630"/>
                           </a:solidFill>
@@ -4928,7 +6144,7 @@
                   </a:tcPr>
                 </a:tc>
               </a:tr>
-              <a:tr h="324612">
+              <a:tr h="420624">
                 <a:tc>
                   <a:txBody>
                     <a:bodyPr wrap="square"/>
@@ -4940,7 +6156,7 @@
                         </a:spcAft>
                       </a:pPr>
                       <a:r>
-                        <a:rPr sz="950" b="1" i="0">
+                        <a:rPr sz="1000" b="1" i="0">
                           <a:solidFill>
                             <a:srgbClr val="3A106E"/>
                           </a:solidFill>
@@ -4969,7 +6185,7 @@
                         </a:spcAft>
                       </a:pPr>
                       <a:r>
-                        <a:rPr sz="950" b="1" i="0">
+                        <a:rPr sz="1000" b="1" i="0">
                           <a:solidFill>
                             <a:srgbClr val="3A106E"/>
                           </a:solidFill>
@@ -4998,7 +6214,7 @@
                         </a:spcAft>
                       </a:pPr>
                       <a:r>
-                        <a:rPr sz="950" b="1" i="0">
+                        <a:rPr sz="1000" b="1" i="0">
                           <a:solidFill>
                             <a:srgbClr val="3A106E"/>
                           </a:solidFill>
@@ -5027,7 +6243,7 @@
                         </a:spcAft>
                       </a:pPr>
                       <a:r>
-                        <a:rPr sz="950" b="1" i="0">
+                        <a:rPr sz="1000" b="1" i="0">
                           <a:solidFill>
                             <a:srgbClr val="3A106E"/>
                           </a:solidFill>
@@ -5052,14 +6268,14 @@
       </p:graphicFrame>
       <p:sp>
         <p:nvSpPr>
-          <p:cNvPr id="23" name="Rectangle 22"/>
+          <p:cNvPr id="6" name="Rectangle 5"/>
           <p:cNvSpPr/>
           <p:nvPr/>
         </p:nvSpPr>
         <p:spPr>
           <a:xfrm>
-            <a:off x="502920" y="5870448"/>
-            <a:ext cx="11183112" cy="530352"/>
+            <a:off x="502920" y="5358384"/>
+            <a:ext cx="11183112" cy="640080"/>
           </a:xfrm>
           <a:prstGeom prst="rect">
             <a:avLst/>
@@ -5096,14 +6312,14 @@
       </p:sp>
       <p:sp>
         <p:nvSpPr>
-          <p:cNvPr id="24" name="Rectangle 23"/>
+          <p:cNvPr id="7" name="Rectangle 6"/>
           <p:cNvSpPr/>
           <p:nvPr/>
         </p:nvSpPr>
         <p:spPr>
           <a:xfrm>
-            <a:off x="502920" y="5870448"/>
-            <a:ext cx="38100" cy="530352"/>
+            <a:off x="502920" y="5358384"/>
+            <a:ext cx="38100" cy="640080"/>
           </a:xfrm>
           <a:prstGeom prst="rect">
             <a:avLst/>
@@ -5140,14 +6356,14 @@
       </p:sp>
       <p:sp>
         <p:nvSpPr>
-          <p:cNvPr id="25" name="TextBox 24"/>
+          <p:cNvPr id="8" name="TextBox 7"/>
           <p:cNvSpPr txBox="1"/>
           <p:nvPr/>
         </p:nvSpPr>
         <p:spPr>
           <a:xfrm>
-            <a:off x="713232" y="5925312"/>
-            <a:ext cx="10835640" cy="420624"/>
+            <a:off x="713232" y="5413248"/>
+            <a:ext cx="10835640" cy="530352"/>
           </a:xfrm>
           <a:prstGeom prst="rect">
             <a:avLst/>
@@ -5181,7 +6397,7 @@
       </p:sp>
       <p:sp>
         <p:nvSpPr>
-          <p:cNvPr id="26" name="Rectangle 25"/>
+          <p:cNvPr id="9" name="Rectangle 8"/>
           <p:cNvSpPr/>
           <p:nvPr/>
         </p:nvSpPr>
@@ -5225,7 +6441,7 @@
       </p:sp>
       <p:sp>
         <p:nvSpPr>
-          <p:cNvPr id="27" name="TextBox 26"/>
+          <p:cNvPr id="10" name="TextBox 9"/>
           <p:cNvSpPr txBox="1"/>
           <p:nvPr/>
         </p:nvSpPr>
@@ -5266,7 +6482,7 @@
       </p:sp>
       <p:sp>
         <p:nvSpPr>
-          <p:cNvPr id="28" name="TextBox 27"/>
+          <p:cNvPr id="11" name="TextBox 10"/>
           <p:cNvSpPr txBox="1"/>
           <p:nvPr/>
         </p:nvSpPr>
@@ -5300,7 +6516,7 @@
                 <a:ea typeface="Yu Gothic"/>
                 <a:cs typeface="Yu Gothic"/>
               </a:rPr>
-              <a:t>2</a:t>
+              <a:t>4</a:t>
             </a:r>
           </a:p>
         </p:txBody>
@@ -5313,7 +6529,7 @@
 </p:sld>
 </file>
 
-<file path=ppt/slides/slide3.xml><?xml version="1.0" encoding="utf-8"?>
+<file path=ppt/slides/slide5.xml><?xml version="1.0" encoding="utf-8"?>
 <p:sld xmlns:a="http://schemas.openxmlformats.org/drawingml/2006/main" xmlns:p="http://schemas.openxmlformats.org/presentationml/2006/main" xmlns:r="http://schemas.openxmlformats.org/officeDocument/2006/relationships">
   <p:cSld>
     <p:spTree>
@@ -6334,7 +7550,7 @@
                 <a:ea typeface="Yu Gothic"/>
                 <a:cs typeface="Yu Gothic"/>
               </a:rPr>
-              <a:t>3</a:t>
+              <a:t>5</a:t>
             </a:r>
           </a:p>
         </p:txBody>
@@ -6347,7 +7563,7 @@
 </p:sld>
 </file>
 
-<file path=ppt/slides/slide4.xml><?xml version="1.0" encoding="utf-8"?>
+<file path=ppt/slides/slide6.xml><?xml version="1.0" encoding="utf-8"?>
 <p:sld xmlns:a="http://schemas.openxmlformats.org/drawingml/2006/main" xmlns:p="http://schemas.openxmlformats.org/presentationml/2006/main" xmlns:r="http://schemas.openxmlformats.org/officeDocument/2006/relationships">
   <p:cSld>
     <p:spTree>
@@ -7305,2156 +8521,6 @@
                 <a:ea typeface="Yu Gothic"/>
                 <a:cs typeface="Yu Gothic"/>
               </a:rPr>
-              <a:t>4</a:t>
-            </a:r>
-          </a:p>
-        </p:txBody>
-      </p:sp>
-    </p:spTree>
-  </p:cSld>
-  <p:clrMapOvr>
-    <a:masterClrMapping/>
-  </p:clrMapOvr>
-</p:sld>
-</file>
-
-<file path=ppt/slides/slide5.xml><?xml version="1.0" encoding="utf-8"?>
-<p:sld xmlns:a="http://schemas.openxmlformats.org/drawingml/2006/main" xmlns:p="http://schemas.openxmlformats.org/presentationml/2006/main" xmlns:r="http://schemas.openxmlformats.org/officeDocument/2006/relationships">
-  <p:cSld>
-    <p:spTree>
-      <p:nvGrpSpPr>
-        <p:cNvPr id="1" name=""/>
-        <p:cNvGrpSpPr/>
-        <p:nvPr/>
-      </p:nvGrpSpPr>
-      <p:grpSpPr/>
-      <p:sp>
-        <p:nvSpPr>
-          <p:cNvPr id="2" name="TextBox 1"/>
-          <p:cNvSpPr txBox="1"/>
-          <p:nvPr/>
-        </p:nvSpPr>
-        <p:spPr>
-          <a:xfrm>
-            <a:off x="502920" y="256032"/>
-            <a:ext cx="11155680" cy="256032"/>
-          </a:xfrm>
-          <a:prstGeom prst="rect">
-            <a:avLst/>
-          </a:prstGeom>
-          <a:noFill/>
-        </p:spPr>
-        <p:txBody>
-          <a:bodyPr wrap="square" lIns="0" rIns="0" tIns="0" bIns="0">
-            <a:spAutoFit/>
-          </a:bodyPr>
-          <a:lstStyle/>
-          <a:p>
-            <a:pPr algn="l">
-              <a:spcAft>
-                <a:spcPts val="400"/>
-              </a:spcAft>
-            </a:pPr>
-            <a:r>
-              <a:rPr sz="1000" b="1" i="0">
-                <a:solidFill>
-                  <a:srgbClr val="7823DC"/>
-                </a:solidFill>
-                <a:latin typeface="Yu Gothic"/>
-                <a:ea typeface="Yu Gothic"/>
-                <a:cs typeface="Yu Gothic"/>
-              </a:rPr>
-              <a:t>お願い② 知恵のご提供（2点）</a:t>
-            </a:r>
-          </a:p>
-        </p:txBody>
-      </p:sp>
-      <p:sp>
-        <p:nvSpPr>
-          <p:cNvPr id="3" name="TextBox 2"/>
-          <p:cNvSpPr txBox="1"/>
-          <p:nvPr/>
-        </p:nvSpPr>
-        <p:spPr>
-          <a:xfrm>
-            <a:off x="502920" y="512064"/>
-            <a:ext cx="11155680" cy="868680"/>
-          </a:xfrm>
-          <a:prstGeom prst="rect">
-            <a:avLst/>
-          </a:prstGeom>
-          <a:noFill/>
-        </p:spPr>
-        <p:txBody>
-          <a:bodyPr wrap="square" lIns="0" rIns="0" tIns="0" bIns="0">
-            <a:spAutoFit/>
-          </a:bodyPr>
-          <a:lstStyle/>
-          <a:p>
-            <a:pPr algn="l">
-              <a:spcAft>
-                <a:spcPts val="0"/>
-              </a:spcAft>
-            </a:pPr>
-            <a:r>
-              <a:rPr sz="1900" b="1" i="0">
-                <a:solidFill>
-                  <a:srgbClr val="262630"/>
-                </a:solidFill>
-                <a:latin typeface="Yu Gothic"/>
-                <a:ea typeface="Yu Gothic"/>
-                <a:cs typeface="Yu Gothic"/>
-              </a:rPr>
-              <a:t>データだけでなく、読み方と算定ルールの知恵をお借りしたい</a:t>
-            </a:r>
-          </a:p>
-        </p:txBody>
-      </p:sp>
-      <p:sp>
-        <p:nvSpPr>
-          <p:cNvPr id="4" name="Rectangle 3"/>
-          <p:cNvSpPr/>
-          <p:nvPr/>
-        </p:nvSpPr>
-        <p:spPr>
-          <a:xfrm>
-            <a:off x="502920" y="1389888"/>
-            <a:ext cx="1463040" cy="33020"/>
-          </a:xfrm>
-          <a:prstGeom prst="rect">
-            <a:avLst/>
-          </a:prstGeom>
-          <a:solidFill>
-            <a:srgbClr val="7823DC"/>
-          </a:solidFill>
-          <a:ln>
-            <a:noFill/>
-          </a:ln>
-          <a:effectLst/>
-        </p:spPr>
-        <p:style>
-          <a:lnRef idx="1">
-            <a:schemeClr val="accent1"/>
-          </a:lnRef>
-          <a:fillRef idx="3">
-            <a:schemeClr val="accent1"/>
-          </a:fillRef>
-          <a:effectRef idx="2">
-            <a:schemeClr val="accent1"/>
-          </a:effectRef>
-          <a:fontRef idx="minor">
-            <a:schemeClr val="lt1"/>
-          </a:fontRef>
-        </p:style>
-        <p:txBody>
-          <a:bodyPr rtlCol="0" anchor="ctr"/>
-          <a:lstStyle/>
-          <a:p>
-            <a:pPr algn="ctr"/>
-          </a:p>
-        </p:txBody>
-      </p:sp>
-      <p:sp>
-        <p:nvSpPr>
-          <p:cNvPr id="5" name="Rectangle 4"/>
-          <p:cNvSpPr/>
-          <p:nvPr/>
-        </p:nvSpPr>
-        <p:spPr>
-          <a:xfrm>
-            <a:off x="502920" y="1920240"/>
-            <a:ext cx="5504688" cy="3017520"/>
-          </a:xfrm>
-          <a:prstGeom prst="rect">
-            <a:avLst/>
-          </a:prstGeom>
-          <a:solidFill>
-            <a:srgbClr val="FFFFFF"/>
-          </a:solidFill>
-          <a:ln w="9525">
-            <a:solidFill>
-              <a:srgbClr val="D9D9E0"/>
-            </a:solidFill>
-          </a:ln>
-          <a:effectLst/>
-        </p:spPr>
-        <p:style>
-          <a:lnRef idx="1">
-            <a:schemeClr val="accent1"/>
-          </a:lnRef>
-          <a:fillRef idx="3">
-            <a:schemeClr val="accent1"/>
-          </a:fillRef>
-          <a:effectRef idx="2">
-            <a:schemeClr val="accent1"/>
-          </a:effectRef>
-          <a:fontRef idx="minor">
-            <a:schemeClr val="lt1"/>
-          </a:fontRef>
-        </p:style>
-        <p:txBody>
-          <a:bodyPr rtlCol="0" anchor="ctr"/>
-          <a:lstStyle/>
-          <a:p>
-            <a:pPr algn="ctr"/>
-          </a:p>
-        </p:txBody>
-      </p:sp>
-      <p:sp>
-        <p:nvSpPr>
-          <p:cNvPr id="6" name="Rectangle 5"/>
-          <p:cNvSpPr/>
-          <p:nvPr/>
-        </p:nvSpPr>
-        <p:spPr>
-          <a:xfrm>
-            <a:off x="502920" y="1920240"/>
-            <a:ext cx="5504688" cy="82296"/>
-          </a:xfrm>
-          <a:prstGeom prst="rect">
-            <a:avLst/>
-          </a:prstGeom>
-          <a:solidFill>
-            <a:srgbClr val="7823DC"/>
-          </a:solidFill>
-          <a:ln>
-            <a:noFill/>
-          </a:ln>
-          <a:effectLst/>
-        </p:spPr>
-        <p:style>
-          <a:lnRef idx="1">
-            <a:schemeClr val="accent1"/>
-          </a:lnRef>
-          <a:fillRef idx="3">
-            <a:schemeClr val="accent1"/>
-          </a:fillRef>
-          <a:effectRef idx="2">
-            <a:schemeClr val="accent1"/>
-          </a:effectRef>
-          <a:fontRef idx="minor">
-            <a:schemeClr val="lt1"/>
-          </a:fontRef>
-        </p:style>
-        <p:txBody>
-          <a:bodyPr rtlCol="0" anchor="ctr"/>
-          <a:lstStyle/>
-          <a:p>
-            <a:pPr algn="ctr"/>
-          </a:p>
-        </p:txBody>
-      </p:sp>
-      <p:sp>
-        <p:nvSpPr>
-          <p:cNvPr id="7" name="Oval 6"/>
-          <p:cNvSpPr/>
-          <p:nvPr/>
-        </p:nvSpPr>
-        <p:spPr>
-          <a:xfrm>
-            <a:off x="777240" y="2231136"/>
-            <a:ext cx="566928" cy="566928"/>
-          </a:xfrm>
-          <a:prstGeom prst="ellipse">
-            <a:avLst/>
-          </a:prstGeom>
-          <a:solidFill>
-            <a:srgbClr val="7823DC"/>
-          </a:solidFill>
-          <a:ln>
-            <a:noFill/>
-          </a:ln>
-          <a:effectLst/>
-        </p:spPr>
-        <p:style>
-          <a:lnRef idx="1">
-            <a:schemeClr val="accent1"/>
-          </a:lnRef>
-          <a:fillRef idx="3">
-            <a:schemeClr val="accent1"/>
-          </a:fillRef>
-          <a:effectRef idx="2">
-            <a:schemeClr val="accent1"/>
-          </a:effectRef>
-          <a:fontRef idx="minor">
-            <a:schemeClr val="lt1"/>
-          </a:fontRef>
-        </p:style>
-        <p:txBody>
-          <a:bodyPr rtlCol="0" anchor="ctr" wrap="none" lIns="0" rIns="0" tIns="0" bIns="0"/>
-          <a:lstStyle/>
-          <a:p>
-            <a:pPr algn="ctr">
-              <a:spcAft>
-                <a:spcPts val="0"/>
-              </a:spcAft>
-            </a:pPr>
-            <a:r>
-              <a:rPr sz="2200" b="1" i="0">
-                <a:solidFill>
-                  <a:srgbClr val="FFFFFF"/>
-                </a:solidFill>
-                <a:latin typeface="Yu Gothic"/>
-                <a:ea typeface="Yu Gothic"/>
-                <a:cs typeface="Yu Gothic"/>
-              </a:rPr>
-              <a:t>①</a:t>
-            </a:r>
-          </a:p>
-        </p:txBody>
-      </p:sp>
-      <p:sp>
-        <p:nvSpPr>
-          <p:cNvPr id="8" name="TextBox 7"/>
-          <p:cNvSpPr txBox="1"/>
-          <p:nvPr/>
-        </p:nvSpPr>
-        <p:spPr>
-          <a:xfrm>
-            <a:off x="1508760" y="2267712"/>
-            <a:ext cx="4261104" cy="566928"/>
-          </a:xfrm>
-          <a:prstGeom prst="rect">
-            <a:avLst/>
-          </a:prstGeom>
-          <a:noFill/>
-        </p:spPr>
-        <p:txBody>
-          <a:bodyPr wrap="square" lIns="0" rIns="0" tIns="0" bIns="0" anchor="ctr">
-            <a:spAutoFit/>
-          </a:bodyPr>
-          <a:lstStyle/>
-          <a:p>
-            <a:pPr algn="l">
-              <a:spcAft>
-                <a:spcPts val="0"/>
-              </a:spcAft>
-            </a:pPr>
-            <a:r>
-              <a:rPr sz="1350" b="1" i="0">
-                <a:solidFill>
-                  <a:srgbClr val="3A106E"/>
-                </a:solidFill>
-                <a:latin typeface="Yu Gothic"/>
-                <a:ea typeface="Yu Gothic"/>
-                <a:cs typeface="Yu Gothic"/>
-              </a:rPr>
-              <a:t>対応表づくりのヒアリング（1時間×1回）</a:t>
-            </a:r>
-          </a:p>
-        </p:txBody>
-      </p:sp>
-      <p:sp>
-        <p:nvSpPr>
-          <p:cNvPr id="9" name="TextBox 8"/>
-          <p:cNvSpPr txBox="1"/>
-          <p:nvPr/>
-        </p:nvSpPr>
-        <p:spPr>
-          <a:xfrm>
-            <a:off x="813816" y="3090672"/>
-            <a:ext cx="4882896" cy="1737360"/>
-          </a:xfrm>
-          <a:prstGeom prst="rect">
-            <a:avLst/>
-          </a:prstGeom>
-          <a:noFill/>
-        </p:spPr>
-        <p:txBody>
-          <a:bodyPr wrap="square" lIns="0" rIns="0" tIns="0" bIns="0">
-            <a:spAutoFit/>
-          </a:bodyPr>
-          <a:lstStyle/>
-          <a:p>
-            <a:pPr algn="l">
-              <a:spcAft>
-                <a:spcPts val="700"/>
-              </a:spcAft>
-            </a:pPr>
-            <a:r>
-              <a:rPr sz="1100" b="0" i="0">
-                <a:solidFill>
-                  <a:srgbClr val="262630"/>
-                </a:solidFill>
-                <a:latin typeface="Yu Gothic"/>
-                <a:ea typeface="Yu Gothic"/>
-                <a:cs typeface="Yu Gothic"/>
-              </a:rPr>
-              <a:t>営業の顧客 ⇔ 財務の取引先 ⇔ 委員会・中間支払先 の対応表を設計したい。</a:t>
-            </a:r>
-          </a:p>
-          <a:p>
-            <a:pPr algn="l">
-              <a:spcAft>
-                <a:spcPts val="700"/>
-              </a:spcAft>
-            </a:pPr>
-            <a:r>
-              <a:rPr sz="1100" b="0" i="0">
-                <a:solidFill>
-                  <a:srgbClr val="262630"/>
-                </a:solidFill>
-                <a:latin typeface="Yu Gothic"/>
-                <a:ea typeface="Yu Gothic"/>
-                <a:cs typeface="Yu Gothic"/>
-              </a:rPr>
-              <a:t>財務側データの「この名義は何か」（実取引先か・決済代行か・委員会か）を教えてください。</a:t>
-            </a:r>
-          </a:p>
-          <a:p>
-            <a:pPr algn="l">
-              <a:spcAft>
-                <a:spcPts val="700"/>
-              </a:spcAft>
-            </a:pPr>
-            <a:r>
-              <a:rPr sz="1100" b="0" i="0">
-                <a:solidFill>
-                  <a:srgbClr val="262630"/>
-                </a:solidFill>
-                <a:latin typeface="Yu Gothic"/>
-                <a:ea typeface="Yu Gothic"/>
-                <a:cs typeface="Yu Gothic"/>
-              </a:rPr>
-              <a:t>坪井が設計案を持参し、新谷も同席します。</a:t>
-            </a:r>
-          </a:p>
-        </p:txBody>
-      </p:sp>
-      <p:sp>
-        <p:nvSpPr>
-          <p:cNvPr id="10" name="Rectangle 9"/>
-          <p:cNvSpPr/>
-          <p:nvPr/>
-        </p:nvSpPr>
-        <p:spPr>
-          <a:xfrm>
-            <a:off x="6181344" y="1920240"/>
-            <a:ext cx="5504688" cy="3017520"/>
-          </a:xfrm>
-          <a:prstGeom prst="rect">
-            <a:avLst/>
-          </a:prstGeom>
-          <a:solidFill>
-            <a:srgbClr val="FFFFFF"/>
-          </a:solidFill>
-          <a:ln w="9525">
-            <a:solidFill>
-              <a:srgbClr val="D9D9E0"/>
-            </a:solidFill>
-          </a:ln>
-          <a:effectLst/>
-        </p:spPr>
-        <p:style>
-          <a:lnRef idx="1">
-            <a:schemeClr val="accent1"/>
-          </a:lnRef>
-          <a:fillRef idx="3">
-            <a:schemeClr val="accent1"/>
-          </a:fillRef>
-          <a:effectRef idx="2">
-            <a:schemeClr val="accent1"/>
-          </a:effectRef>
-          <a:fontRef idx="minor">
-            <a:schemeClr val="lt1"/>
-          </a:fontRef>
-        </p:style>
-        <p:txBody>
-          <a:bodyPr rtlCol="0" anchor="ctr"/>
-          <a:lstStyle/>
-          <a:p>
-            <a:pPr algn="ctr"/>
-          </a:p>
-        </p:txBody>
-      </p:sp>
-      <p:sp>
-        <p:nvSpPr>
-          <p:cNvPr id="11" name="Rectangle 10"/>
-          <p:cNvSpPr/>
-          <p:nvPr/>
-        </p:nvSpPr>
-        <p:spPr>
-          <a:xfrm>
-            <a:off x="6181344" y="1920240"/>
-            <a:ext cx="5504688" cy="82296"/>
-          </a:xfrm>
-          <a:prstGeom prst="rect">
-            <a:avLst/>
-          </a:prstGeom>
-          <a:solidFill>
-            <a:srgbClr val="7823DC"/>
-          </a:solidFill>
-          <a:ln>
-            <a:noFill/>
-          </a:ln>
-          <a:effectLst/>
-        </p:spPr>
-        <p:style>
-          <a:lnRef idx="1">
-            <a:schemeClr val="accent1"/>
-          </a:lnRef>
-          <a:fillRef idx="3">
-            <a:schemeClr val="accent1"/>
-          </a:fillRef>
-          <a:effectRef idx="2">
-            <a:schemeClr val="accent1"/>
-          </a:effectRef>
-          <a:fontRef idx="minor">
-            <a:schemeClr val="lt1"/>
-          </a:fontRef>
-        </p:style>
-        <p:txBody>
-          <a:bodyPr rtlCol="0" anchor="ctr"/>
-          <a:lstStyle/>
-          <a:p>
-            <a:pPr algn="ctr"/>
-          </a:p>
-        </p:txBody>
-      </p:sp>
-      <p:sp>
-        <p:nvSpPr>
-          <p:cNvPr id="12" name="Oval 11"/>
-          <p:cNvSpPr/>
-          <p:nvPr/>
-        </p:nvSpPr>
-        <p:spPr>
-          <a:xfrm>
-            <a:off x="6455664" y="2231136"/>
-            <a:ext cx="566928" cy="566928"/>
-          </a:xfrm>
-          <a:prstGeom prst="ellipse">
-            <a:avLst/>
-          </a:prstGeom>
-          <a:solidFill>
-            <a:srgbClr val="7823DC"/>
-          </a:solidFill>
-          <a:ln>
-            <a:noFill/>
-          </a:ln>
-          <a:effectLst/>
-        </p:spPr>
-        <p:style>
-          <a:lnRef idx="1">
-            <a:schemeClr val="accent1"/>
-          </a:lnRef>
-          <a:fillRef idx="3">
-            <a:schemeClr val="accent1"/>
-          </a:fillRef>
-          <a:effectRef idx="2">
-            <a:schemeClr val="accent1"/>
-          </a:effectRef>
-          <a:fontRef idx="minor">
-            <a:schemeClr val="lt1"/>
-          </a:fontRef>
-        </p:style>
-        <p:txBody>
-          <a:bodyPr rtlCol="0" anchor="ctr" wrap="none" lIns="0" rIns="0" tIns="0" bIns="0"/>
-          <a:lstStyle/>
-          <a:p>
-            <a:pPr algn="ctr">
-              <a:spcAft>
-                <a:spcPts val="0"/>
-              </a:spcAft>
-            </a:pPr>
-            <a:r>
-              <a:rPr sz="2200" b="1" i="0">
-                <a:solidFill>
-                  <a:srgbClr val="FFFFFF"/>
-                </a:solidFill>
-                <a:latin typeface="Yu Gothic"/>
-                <a:ea typeface="Yu Gothic"/>
-                <a:cs typeface="Yu Gothic"/>
-              </a:rPr>
-              <a:t>②</a:t>
-            </a:r>
-          </a:p>
-        </p:txBody>
-      </p:sp>
-      <p:sp>
-        <p:nvSpPr>
-          <p:cNvPr id="13" name="TextBox 12"/>
-          <p:cNvSpPr txBox="1"/>
-          <p:nvPr/>
-        </p:nvSpPr>
-        <p:spPr>
-          <a:xfrm>
-            <a:off x="7187184" y="2267712"/>
-            <a:ext cx="4261104" cy="566928"/>
-          </a:xfrm>
-          <a:prstGeom prst="rect">
-            <a:avLst/>
-          </a:prstGeom>
-          <a:noFill/>
-        </p:spPr>
-        <p:txBody>
-          <a:bodyPr wrap="square" lIns="0" rIns="0" tIns="0" bIns="0" anchor="ctr">
-            <a:spAutoFit/>
-          </a:bodyPr>
-          <a:lstStyle/>
-          <a:p>
-            <a:pPr algn="l">
-              <a:spcAft>
-                <a:spcPts val="0"/>
-              </a:spcAft>
-            </a:pPr>
-            <a:r>
-              <a:rPr sz="1350" b="1" i="0">
-                <a:solidFill>
-                  <a:srgbClr val="3A106E"/>
-                </a:solidFill>
-                <a:latin typeface="Yu Gothic"/>
-                <a:ea typeface="Yu Gothic"/>
-                <a:cs typeface="Yu Gothic"/>
-              </a:rPr>
-              <a:t>粗利算定ルールの検証</a:t>
-            </a:r>
-          </a:p>
-        </p:txBody>
-      </p:sp>
-      <p:sp>
-        <p:nvSpPr>
-          <p:cNvPr id="14" name="TextBox 13"/>
-          <p:cNvSpPr txBox="1"/>
-          <p:nvPr/>
-        </p:nvSpPr>
-        <p:spPr>
-          <a:xfrm>
-            <a:off x="6492240" y="3090672"/>
-            <a:ext cx="4882896" cy="1737360"/>
-          </a:xfrm>
-          <a:prstGeom prst="rect">
-            <a:avLst/>
-          </a:prstGeom>
-          <a:noFill/>
-        </p:spPr>
-        <p:txBody>
-          <a:bodyPr wrap="square" lIns="0" rIns="0" tIns="0" bIns="0">
-            <a:spAutoFit/>
-          </a:bodyPr>
-          <a:lstStyle/>
-          <a:p>
-            <a:pPr algn="l">
-              <a:spcAft>
-                <a:spcPts val="700"/>
-              </a:spcAft>
-            </a:pPr>
-            <a:r>
-              <a:rPr sz="1100" b="0" i="0">
-                <a:solidFill>
-                  <a:srgbClr val="262630"/>
-                </a:solidFill>
-                <a:latin typeface="Yu Gothic"/>
-                <a:ea typeface="Yu Gothic"/>
-                <a:cs typeface="Yu Gothic"/>
-              </a:rPr>
-              <a:t>「案件別粗利 ≒ グロス収入 × 作品別実効取り分率」という推計方法の妥当性を見てください。</a:t>
-            </a:r>
-          </a:p>
-          <a:p>
-            <a:pPr algn="l">
-              <a:spcAft>
-                <a:spcPts val="700"/>
-              </a:spcAft>
-            </a:pPr>
-            <a:r>
-              <a:rPr sz="1100" b="0" i="0">
-                <a:solidFill>
-                  <a:srgbClr val="262630"/>
-                </a:solidFill>
-                <a:latin typeface="Yu Gothic"/>
-                <a:ea typeface="Yu Gothic"/>
-                <a:cs typeface="Yu Gothic"/>
-              </a:rPr>
-              <a:t>他社分消去のパターンA（純額）／B（総額）の使い分け、</a:t>
-            </a:r>
-          </a:p>
-          <a:p>
-            <a:pPr algn="l">
-              <a:spcAft>
-                <a:spcPts val="700"/>
-              </a:spcAft>
-            </a:pPr>
-            <a:r>
-              <a:rPr sz="1100" b="0" i="0">
-                <a:solidFill>
-                  <a:srgbClr val="262630"/>
-                </a:solidFill>
-                <a:latin typeface="Yu Gothic"/>
-                <a:ea typeface="Yu Gothic"/>
-                <a:cs typeface="Yu Gothic"/>
-              </a:rPr>
-              <a:t>消去とグロスの突合キーの有無なども確認したい。</a:t>
-            </a:r>
-          </a:p>
-        </p:txBody>
-      </p:sp>
-      <p:sp>
-        <p:nvSpPr>
-          <p:cNvPr id="15" name="Rectangle 14"/>
-          <p:cNvSpPr/>
-          <p:nvPr/>
-        </p:nvSpPr>
-        <p:spPr>
-          <a:xfrm>
-            <a:off x="502920" y="5175504"/>
-            <a:ext cx="11183112" cy="859536"/>
-          </a:xfrm>
-          <a:prstGeom prst="rect">
-            <a:avLst/>
-          </a:prstGeom>
-          <a:solidFill>
-            <a:srgbClr val="F3EFFB"/>
-          </a:solidFill>
-          <a:ln>
-            <a:noFill/>
-          </a:ln>
-          <a:effectLst/>
-        </p:spPr>
-        <p:style>
-          <a:lnRef idx="1">
-            <a:schemeClr val="accent1"/>
-          </a:lnRef>
-          <a:fillRef idx="3">
-            <a:schemeClr val="accent1"/>
-          </a:fillRef>
-          <a:effectRef idx="2">
-            <a:schemeClr val="accent1"/>
-          </a:effectRef>
-          <a:fontRef idx="minor">
-            <a:schemeClr val="lt1"/>
-          </a:fontRef>
-        </p:style>
-        <p:txBody>
-          <a:bodyPr rtlCol="0" anchor="ctr"/>
-          <a:lstStyle/>
-          <a:p>
-            <a:pPr algn="ctr"/>
-          </a:p>
-        </p:txBody>
-      </p:sp>
-      <p:sp>
-        <p:nvSpPr>
-          <p:cNvPr id="16" name="Rectangle 15"/>
-          <p:cNvSpPr/>
-          <p:nvPr/>
-        </p:nvSpPr>
-        <p:spPr>
-          <a:xfrm>
-            <a:off x="502920" y="5175504"/>
-            <a:ext cx="38100" cy="859536"/>
-          </a:xfrm>
-          <a:prstGeom prst="rect">
-            <a:avLst/>
-          </a:prstGeom>
-          <a:solidFill>
-            <a:srgbClr val="3A106E"/>
-          </a:solidFill>
-          <a:ln>
-            <a:noFill/>
-          </a:ln>
-          <a:effectLst/>
-        </p:spPr>
-        <p:style>
-          <a:lnRef idx="1">
-            <a:schemeClr val="accent1"/>
-          </a:lnRef>
-          <a:fillRef idx="3">
-            <a:schemeClr val="accent1"/>
-          </a:fillRef>
-          <a:effectRef idx="2">
-            <a:schemeClr val="accent1"/>
-          </a:effectRef>
-          <a:fontRef idx="minor">
-            <a:schemeClr val="lt1"/>
-          </a:fontRef>
-        </p:style>
-        <p:txBody>
-          <a:bodyPr rtlCol="0" anchor="ctr"/>
-          <a:lstStyle/>
-          <a:p>
-            <a:pPr algn="ctr"/>
-          </a:p>
-        </p:txBody>
-      </p:sp>
-      <p:sp>
-        <p:nvSpPr>
-          <p:cNvPr id="17" name="TextBox 16"/>
-          <p:cNvSpPr txBox="1"/>
-          <p:nvPr/>
-        </p:nvSpPr>
-        <p:spPr>
-          <a:xfrm>
-            <a:off x="713232" y="5230368"/>
-            <a:ext cx="10835640" cy="749808"/>
-          </a:xfrm>
-          <a:prstGeom prst="rect">
-            <a:avLst/>
-          </a:prstGeom>
-          <a:noFill/>
-        </p:spPr>
-        <p:txBody>
-          <a:bodyPr wrap="square" lIns="0" rIns="0" tIns="0" bIns="0" anchor="ctr">
-            <a:spAutoFit/>
-          </a:bodyPr>
-          <a:lstStyle/>
-          <a:p>
-            <a:pPr algn="l">
-              <a:spcAft>
-                <a:spcPts val="0"/>
-              </a:spcAft>
-            </a:pPr>
-            <a:r>
-              <a:rPr sz="1050" b="1" i="0">
-                <a:solidFill>
-                  <a:srgbClr val="7823DC"/>
-                </a:solidFill>
-                <a:latin typeface="Yu Gothic"/>
-                <a:ea typeface="Yu Gothic"/>
-                <a:cs typeface="Yu Gothic"/>
-              </a:rPr>
-              <a:t>出発点　</a:t>
-            </a:r>
-            <a:r>
-              <a:rPr sz="1050" b="0" i="0">
-                <a:solidFill>
-                  <a:srgbClr val="262630"/>
-                </a:solidFill>
-                <a:latin typeface="Yu Gothic"/>
-                <a:ea typeface="Yu Gothic"/>
-                <a:cs typeface="Yu Gothic"/>
-              </a:rPr>
-              <a:t>青山さんからいただいた他社分消去のご説明が出発点です。『間違ってたらご指摘を』とのことでしたので、まさにそのご指摘をいただく場を作りたいと思っています。</a:t>
-            </a:r>
-          </a:p>
-        </p:txBody>
-      </p:sp>
-      <p:sp>
-        <p:nvSpPr>
-          <p:cNvPr id="18" name="Rectangle 17"/>
-          <p:cNvSpPr/>
-          <p:nvPr/>
-        </p:nvSpPr>
-        <p:spPr>
-          <a:xfrm>
-            <a:off x="502920" y="6510528"/>
-            <a:ext cx="11183112" cy="15240"/>
-          </a:xfrm>
-          <a:prstGeom prst="rect">
-            <a:avLst/>
-          </a:prstGeom>
-          <a:solidFill>
-            <a:srgbClr val="D9D9E0"/>
-          </a:solidFill>
-          <a:ln>
-            <a:noFill/>
-          </a:ln>
-          <a:effectLst/>
-        </p:spPr>
-        <p:style>
-          <a:lnRef idx="1">
-            <a:schemeClr val="accent1"/>
-          </a:lnRef>
-          <a:fillRef idx="3">
-            <a:schemeClr val="accent1"/>
-          </a:fillRef>
-          <a:effectRef idx="2">
-            <a:schemeClr val="accent1"/>
-          </a:effectRef>
-          <a:fontRef idx="minor">
-            <a:schemeClr val="lt1"/>
-          </a:fontRef>
-        </p:style>
-        <p:txBody>
-          <a:bodyPr rtlCol="0" anchor="ctr"/>
-          <a:lstStyle/>
-          <a:p>
-            <a:pPr algn="ctr"/>
-          </a:p>
-        </p:txBody>
-      </p:sp>
-      <p:sp>
-        <p:nvSpPr>
-          <p:cNvPr id="19" name="TextBox 18"/>
-          <p:cNvSpPr txBox="1"/>
-          <p:nvPr/>
-        </p:nvSpPr>
-        <p:spPr>
-          <a:xfrm>
-            <a:off x="502920" y="6565392"/>
-            <a:ext cx="8686800" cy="274320"/>
-          </a:xfrm>
-          <a:prstGeom prst="rect">
-            <a:avLst/>
-          </a:prstGeom>
-          <a:noFill/>
-        </p:spPr>
-        <p:txBody>
-          <a:bodyPr wrap="square" lIns="0" rIns="0" tIns="0" bIns="0">
-            <a:spAutoFit/>
-          </a:bodyPr>
-          <a:lstStyle/>
-          <a:p>
-            <a:pPr algn="l">
-              <a:spcAft>
-                <a:spcPts val="400"/>
-              </a:spcAft>
-            </a:pPr>
-            <a:r>
-              <a:rPr sz="750" b="0" i="0">
-                <a:solidFill>
-                  <a:srgbClr val="8A8A99"/>
-                </a:solidFill>
-                <a:latin typeface="Yu Gothic"/>
-                <a:ea typeface="Yu Gothic"/>
-                <a:cs typeface="Yu Gothic"/>
-              </a:rPr>
-              <a:t>円谷プロダクション 営業改革 | 社外秘</a:t>
-            </a:r>
-          </a:p>
-        </p:txBody>
-      </p:sp>
-      <p:sp>
-        <p:nvSpPr>
-          <p:cNvPr id="20" name="TextBox 19"/>
-          <p:cNvSpPr txBox="1"/>
-          <p:nvPr/>
-        </p:nvSpPr>
-        <p:spPr>
-          <a:xfrm>
-            <a:off x="11247120" y="6565392"/>
-            <a:ext cx="457200" cy="274320"/>
-          </a:xfrm>
-          <a:prstGeom prst="rect">
-            <a:avLst/>
-          </a:prstGeom>
-          <a:noFill/>
-        </p:spPr>
-        <p:txBody>
-          <a:bodyPr wrap="square" lIns="0" rIns="0" tIns="0" bIns="0">
-            <a:spAutoFit/>
-          </a:bodyPr>
-          <a:lstStyle/>
-          <a:p>
-            <a:pPr algn="r">
-              <a:spcAft>
-                <a:spcPts val="400"/>
-              </a:spcAft>
-            </a:pPr>
-            <a:r>
-              <a:rPr sz="900" b="0" i="0">
-                <a:solidFill>
-                  <a:srgbClr val="5F5F6E"/>
-                </a:solidFill>
-                <a:latin typeface="Yu Gothic"/>
-                <a:ea typeface="Yu Gothic"/>
-                <a:cs typeface="Yu Gothic"/>
-              </a:rPr>
-              <a:t>5</a:t>
-            </a:r>
-          </a:p>
-        </p:txBody>
-      </p:sp>
-    </p:spTree>
-  </p:cSld>
-  <p:clrMapOvr>
-    <a:masterClrMapping/>
-  </p:clrMapOvr>
-</p:sld>
-</file>
-
-<file path=ppt/slides/slide6.xml><?xml version="1.0" encoding="utf-8"?>
-<p:sld xmlns:a="http://schemas.openxmlformats.org/drawingml/2006/main" xmlns:p="http://schemas.openxmlformats.org/presentationml/2006/main" xmlns:r="http://schemas.openxmlformats.org/officeDocument/2006/relationships">
-  <p:cSld>
-    <p:spTree>
-      <p:nvGrpSpPr>
-        <p:cNvPr id="1" name=""/>
-        <p:cNvGrpSpPr/>
-        <p:nvPr/>
-      </p:nvGrpSpPr>
-      <p:grpSpPr/>
-      <p:sp>
-        <p:nvSpPr>
-          <p:cNvPr id="2" name="TextBox 1"/>
-          <p:cNvSpPr txBox="1"/>
-          <p:nvPr/>
-        </p:nvSpPr>
-        <p:spPr>
-          <a:xfrm>
-            <a:off x="502920" y="256032"/>
-            <a:ext cx="11155680" cy="256032"/>
-          </a:xfrm>
-          <a:prstGeom prst="rect">
-            <a:avLst/>
-          </a:prstGeom>
-          <a:noFill/>
-        </p:spPr>
-        <p:txBody>
-          <a:bodyPr wrap="square" lIns="0" rIns="0" tIns="0" bIns="0">
-            <a:spAutoFit/>
-          </a:bodyPr>
-          <a:lstStyle/>
-          <a:p>
-            <a:pPr algn="l">
-              <a:spcAft>
-                <a:spcPts val="400"/>
-              </a:spcAft>
-            </a:pPr>
-            <a:r>
-              <a:rPr sz="1000" b="1" i="0">
-                <a:solidFill>
-                  <a:srgbClr val="7823DC"/>
-                </a:solidFill>
-                <a:latin typeface="Yu Gothic"/>
-                <a:ea typeface="Yu Gothic"/>
-                <a:cs typeface="Yu Gothic"/>
-              </a:rPr>
-              <a:t>進め方（負荷の設計）</a:t>
-            </a:r>
-          </a:p>
-        </p:txBody>
-      </p:sp>
-      <p:sp>
-        <p:nvSpPr>
-          <p:cNvPr id="3" name="TextBox 2"/>
-          <p:cNvSpPr txBox="1"/>
-          <p:nvPr/>
-        </p:nvSpPr>
-        <p:spPr>
-          <a:xfrm>
-            <a:off x="502920" y="512064"/>
-            <a:ext cx="11155680" cy="868680"/>
-          </a:xfrm>
-          <a:prstGeom prst="rect">
-            <a:avLst/>
-          </a:prstGeom>
-          <a:noFill/>
-        </p:spPr>
-        <p:txBody>
-          <a:bodyPr wrap="square" lIns="0" rIns="0" tIns="0" bIns="0">
-            <a:spAutoFit/>
-          </a:bodyPr>
-          <a:lstStyle/>
-          <a:p>
-            <a:pPr algn="l">
-              <a:spcAft>
-                <a:spcPts val="0"/>
-              </a:spcAft>
-            </a:pPr>
-            <a:r>
-              <a:rPr sz="1900" b="1" i="0">
-                <a:solidFill>
-                  <a:srgbClr val="262630"/>
-                </a:solidFill>
-                <a:latin typeface="Yu Gothic"/>
-                <a:ea typeface="Yu Gothic"/>
-                <a:cs typeface="Yu Gothic"/>
-              </a:rPr>
-              <a:t>柳沼さんの負荷を最小に設計します</a:t>
-            </a:r>
-          </a:p>
-        </p:txBody>
-      </p:sp>
-      <p:sp>
-        <p:nvSpPr>
-          <p:cNvPr id="4" name="Rectangle 3"/>
-          <p:cNvSpPr/>
-          <p:nvPr/>
-        </p:nvSpPr>
-        <p:spPr>
-          <a:xfrm>
-            <a:off x="502920" y="1389888"/>
-            <a:ext cx="1463040" cy="33020"/>
-          </a:xfrm>
-          <a:prstGeom prst="rect">
-            <a:avLst/>
-          </a:prstGeom>
-          <a:solidFill>
-            <a:srgbClr val="7823DC"/>
-          </a:solidFill>
-          <a:ln>
-            <a:noFill/>
-          </a:ln>
-          <a:effectLst/>
-        </p:spPr>
-        <p:style>
-          <a:lnRef idx="1">
-            <a:schemeClr val="accent1"/>
-          </a:lnRef>
-          <a:fillRef idx="3">
-            <a:schemeClr val="accent1"/>
-          </a:fillRef>
-          <a:effectRef idx="2">
-            <a:schemeClr val="accent1"/>
-          </a:effectRef>
-          <a:fontRef idx="minor">
-            <a:schemeClr val="lt1"/>
-          </a:fontRef>
-        </p:style>
-        <p:txBody>
-          <a:bodyPr rtlCol="0" anchor="ctr"/>
-          <a:lstStyle/>
-          <a:p>
-            <a:pPr algn="ctr"/>
-          </a:p>
-        </p:txBody>
-      </p:sp>
-      <p:sp>
-        <p:nvSpPr>
-          <p:cNvPr id="5" name="Rectangle 4"/>
-          <p:cNvSpPr/>
-          <p:nvPr/>
-        </p:nvSpPr>
-        <p:spPr>
-          <a:xfrm>
-            <a:off x="502920" y="1883664"/>
-            <a:ext cx="11183112" cy="969264"/>
-          </a:xfrm>
-          <a:prstGeom prst="rect">
-            <a:avLst/>
-          </a:prstGeom>
-          <a:solidFill>
-            <a:srgbClr val="FFFFFF"/>
-          </a:solidFill>
-          <a:ln w="9525">
-            <a:solidFill>
-              <a:srgbClr val="D9D9E0"/>
-            </a:solidFill>
-          </a:ln>
-          <a:effectLst/>
-        </p:spPr>
-        <p:style>
-          <a:lnRef idx="1">
-            <a:schemeClr val="accent1"/>
-          </a:lnRef>
-          <a:fillRef idx="3">
-            <a:schemeClr val="accent1"/>
-          </a:fillRef>
-          <a:effectRef idx="2">
-            <a:schemeClr val="accent1"/>
-          </a:effectRef>
-          <a:fontRef idx="minor">
-            <a:schemeClr val="lt1"/>
-          </a:fontRef>
-        </p:style>
-        <p:txBody>
-          <a:bodyPr rtlCol="0" anchor="ctr"/>
-          <a:lstStyle/>
-          <a:p>
-            <a:pPr algn="ctr"/>
-          </a:p>
-        </p:txBody>
-      </p:sp>
-      <p:sp>
-        <p:nvSpPr>
-          <p:cNvPr id="6" name="Rectangle 5"/>
-          <p:cNvSpPr/>
-          <p:nvPr/>
-        </p:nvSpPr>
-        <p:spPr>
-          <a:xfrm>
-            <a:off x="502920" y="1883664"/>
-            <a:ext cx="64008" cy="969264"/>
-          </a:xfrm>
-          <a:prstGeom prst="rect">
-            <a:avLst/>
-          </a:prstGeom>
-          <a:solidFill>
-            <a:srgbClr val="7823DC"/>
-          </a:solidFill>
-          <a:ln>
-            <a:noFill/>
-          </a:ln>
-          <a:effectLst/>
-        </p:spPr>
-        <p:style>
-          <a:lnRef idx="1">
-            <a:schemeClr val="accent1"/>
-          </a:lnRef>
-          <a:fillRef idx="3">
-            <a:schemeClr val="accent1"/>
-          </a:fillRef>
-          <a:effectRef idx="2">
-            <a:schemeClr val="accent1"/>
-          </a:effectRef>
-          <a:fontRef idx="minor">
-            <a:schemeClr val="lt1"/>
-          </a:fontRef>
-        </p:style>
-        <p:txBody>
-          <a:bodyPr rtlCol="0" anchor="ctr"/>
-          <a:lstStyle/>
-          <a:p>
-            <a:pPr algn="ctr"/>
-          </a:p>
-        </p:txBody>
-      </p:sp>
-      <p:sp>
-        <p:nvSpPr>
-          <p:cNvPr id="7" name="Rectangle 6"/>
-          <p:cNvSpPr/>
-          <p:nvPr/>
-        </p:nvSpPr>
-        <p:spPr>
-          <a:xfrm>
-            <a:off x="749808" y="2112264"/>
-            <a:ext cx="1170432" cy="512064"/>
-          </a:xfrm>
-          <a:prstGeom prst="rect">
-            <a:avLst/>
-          </a:prstGeom>
-          <a:solidFill>
-            <a:srgbClr val="3A106E"/>
-          </a:solidFill>
-          <a:ln>
-            <a:noFill/>
-          </a:ln>
-          <a:effectLst/>
-        </p:spPr>
-        <p:style>
-          <a:lnRef idx="1">
-            <a:schemeClr val="accent1"/>
-          </a:lnRef>
-          <a:fillRef idx="3">
-            <a:schemeClr val="accent1"/>
-          </a:fillRef>
-          <a:effectRef idx="2">
-            <a:schemeClr val="accent1"/>
-          </a:effectRef>
-          <a:fontRef idx="minor">
-            <a:schemeClr val="lt1"/>
-          </a:fontRef>
-        </p:style>
-        <p:txBody>
-          <a:bodyPr rtlCol="0" anchor="ctr"/>
-          <a:lstStyle/>
-          <a:p>
-            <a:pPr algn="ctr"/>
-          </a:p>
-        </p:txBody>
-      </p:sp>
-      <p:sp>
-        <p:nvSpPr>
-          <p:cNvPr id="8" name="TextBox 7"/>
-          <p:cNvSpPr txBox="1"/>
-          <p:nvPr/>
-        </p:nvSpPr>
-        <p:spPr>
-          <a:xfrm>
-            <a:off x="749808" y="2112264"/>
-            <a:ext cx="1170432" cy="512064"/>
-          </a:xfrm>
-          <a:prstGeom prst="rect">
-            <a:avLst/>
-          </a:prstGeom>
-          <a:noFill/>
-        </p:spPr>
-        <p:txBody>
-          <a:bodyPr wrap="square" lIns="0" rIns="0" tIns="0" bIns="0" anchor="ctr">
-            <a:spAutoFit/>
-          </a:bodyPr>
-          <a:lstStyle/>
-          <a:p>
-            <a:pPr algn="ctr">
-              <a:spcAft>
-                <a:spcPts val="0"/>
-              </a:spcAft>
-            </a:pPr>
-            <a:r>
-              <a:rPr sz="1300" b="1" i="0">
-                <a:solidFill>
-                  <a:srgbClr val="FFFFFF"/>
-                </a:solidFill>
-                <a:latin typeface="Yu Gothic"/>
-                <a:ea typeface="Yu Gothic"/>
-                <a:cs typeface="Yu Gothic"/>
-              </a:rPr>
-              <a:t>時間</a:t>
-            </a:r>
-          </a:p>
-        </p:txBody>
-      </p:sp>
-      <p:sp>
-        <p:nvSpPr>
-          <p:cNvPr id="9" name="TextBox 8"/>
-          <p:cNvSpPr txBox="1"/>
-          <p:nvPr/>
-        </p:nvSpPr>
-        <p:spPr>
-          <a:xfrm>
-            <a:off x="2139696" y="2002536"/>
-            <a:ext cx="9400032" cy="731520"/>
-          </a:xfrm>
-          <a:prstGeom prst="rect">
-            <a:avLst/>
-          </a:prstGeom>
-          <a:noFill/>
-        </p:spPr>
-        <p:txBody>
-          <a:bodyPr wrap="square" lIns="0" rIns="0" tIns="0" bIns="0" anchor="ctr">
-            <a:spAutoFit/>
-          </a:bodyPr>
-          <a:lstStyle/>
-          <a:p>
-            <a:pPr algn="l">
-              <a:spcAft>
-                <a:spcPts val="300"/>
-              </a:spcAft>
-            </a:pPr>
-            <a:r>
-              <a:rPr sz="1300" b="1" i="0">
-                <a:solidFill>
-                  <a:srgbClr val="3A106E"/>
-                </a:solidFill>
-                <a:latin typeface="Yu Gothic"/>
-                <a:ea typeface="Yu Gothic"/>
-                <a:cs typeface="Yu Gothic"/>
-              </a:rPr>
-              <a:t>週2〜3時間の範囲で設計します</a:t>
-            </a:r>
-          </a:p>
-          <a:p>
-            <a:pPr algn="l">
-              <a:spcAft>
-                <a:spcPts val="0"/>
-              </a:spcAft>
-            </a:pPr>
-            <a:r>
-              <a:rPr sz="1000" b="0" i="0">
-                <a:solidFill>
-                  <a:srgbClr val="262630"/>
-                </a:solidFill>
-                <a:latin typeface="Yu Gothic"/>
-                <a:ea typeface="Yu Gothic"/>
-                <a:cs typeface="Yu Gothic"/>
-              </a:rPr>
-              <a:t>STOの定例出席は不要。受け渡しと検証のときだけお時間をいただきます</a:t>
-            </a:r>
-          </a:p>
-        </p:txBody>
-      </p:sp>
-      <p:sp>
-        <p:nvSpPr>
-          <p:cNvPr id="10" name="Rectangle 9"/>
-          <p:cNvSpPr/>
-          <p:nvPr/>
-        </p:nvSpPr>
-        <p:spPr>
-          <a:xfrm>
-            <a:off x="502920" y="2980944"/>
-            <a:ext cx="11183112" cy="969264"/>
-          </a:xfrm>
-          <a:prstGeom prst="rect">
-            <a:avLst/>
-          </a:prstGeom>
-          <a:solidFill>
-            <a:srgbClr val="FFFFFF"/>
-          </a:solidFill>
-          <a:ln w="9525">
-            <a:solidFill>
-              <a:srgbClr val="D9D9E0"/>
-            </a:solidFill>
-          </a:ln>
-          <a:effectLst/>
-        </p:spPr>
-        <p:style>
-          <a:lnRef idx="1">
-            <a:schemeClr val="accent1"/>
-          </a:lnRef>
-          <a:fillRef idx="3">
-            <a:schemeClr val="accent1"/>
-          </a:fillRef>
-          <a:effectRef idx="2">
-            <a:schemeClr val="accent1"/>
-          </a:effectRef>
-          <a:fontRef idx="minor">
-            <a:schemeClr val="lt1"/>
-          </a:fontRef>
-        </p:style>
-        <p:txBody>
-          <a:bodyPr rtlCol="0" anchor="ctr"/>
-          <a:lstStyle/>
-          <a:p>
-            <a:pPr algn="ctr"/>
-          </a:p>
-        </p:txBody>
-      </p:sp>
-      <p:sp>
-        <p:nvSpPr>
-          <p:cNvPr id="11" name="Rectangle 10"/>
-          <p:cNvSpPr/>
-          <p:nvPr/>
-        </p:nvSpPr>
-        <p:spPr>
-          <a:xfrm>
-            <a:off x="502920" y="2980944"/>
-            <a:ext cx="64008" cy="969264"/>
-          </a:xfrm>
-          <a:prstGeom prst="rect">
-            <a:avLst/>
-          </a:prstGeom>
-          <a:solidFill>
-            <a:srgbClr val="7823DC"/>
-          </a:solidFill>
-          <a:ln>
-            <a:noFill/>
-          </a:ln>
-          <a:effectLst/>
-        </p:spPr>
-        <p:style>
-          <a:lnRef idx="1">
-            <a:schemeClr val="accent1"/>
-          </a:lnRef>
-          <a:fillRef idx="3">
-            <a:schemeClr val="accent1"/>
-          </a:fillRef>
-          <a:effectRef idx="2">
-            <a:schemeClr val="accent1"/>
-          </a:effectRef>
-          <a:fontRef idx="minor">
-            <a:schemeClr val="lt1"/>
-          </a:fontRef>
-        </p:style>
-        <p:txBody>
-          <a:bodyPr rtlCol="0" anchor="ctr"/>
-          <a:lstStyle/>
-          <a:p>
-            <a:pPr algn="ctr"/>
-          </a:p>
-        </p:txBody>
-      </p:sp>
-      <p:sp>
-        <p:nvSpPr>
-          <p:cNvPr id="12" name="Rectangle 11"/>
-          <p:cNvSpPr/>
-          <p:nvPr/>
-        </p:nvSpPr>
-        <p:spPr>
-          <a:xfrm>
-            <a:off x="749808" y="3209544"/>
-            <a:ext cx="1170432" cy="512064"/>
-          </a:xfrm>
-          <a:prstGeom prst="rect">
-            <a:avLst/>
-          </a:prstGeom>
-          <a:solidFill>
-            <a:srgbClr val="3A106E"/>
-          </a:solidFill>
-          <a:ln>
-            <a:noFill/>
-          </a:ln>
-          <a:effectLst/>
-        </p:spPr>
-        <p:style>
-          <a:lnRef idx="1">
-            <a:schemeClr val="accent1"/>
-          </a:lnRef>
-          <a:fillRef idx="3">
-            <a:schemeClr val="accent1"/>
-          </a:fillRef>
-          <a:effectRef idx="2">
-            <a:schemeClr val="accent1"/>
-          </a:effectRef>
-          <a:fontRef idx="minor">
-            <a:schemeClr val="lt1"/>
-          </a:fontRef>
-        </p:style>
-        <p:txBody>
-          <a:bodyPr rtlCol="0" anchor="ctr"/>
-          <a:lstStyle/>
-          <a:p>
-            <a:pPr algn="ctr"/>
-          </a:p>
-        </p:txBody>
-      </p:sp>
-      <p:sp>
-        <p:nvSpPr>
-          <p:cNvPr id="13" name="TextBox 12"/>
-          <p:cNvSpPr txBox="1"/>
-          <p:nvPr/>
-        </p:nvSpPr>
-        <p:spPr>
-          <a:xfrm>
-            <a:off x="749808" y="3209544"/>
-            <a:ext cx="1170432" cy="512064"/>
-          </a:xfrm>
-          <a:prstGeom prst="rect">
-            <a:avLst/>
-          </a:prstGeom>
-          <a:noFill/>
-        </p:spPr>
-        <p:txBody>
-          <a:bodyPr wrap="square" lIns="0" rIns="0" tIns="0" bIns="0" anchor="ctr">
-            <a:spAutoFit/>
-          </a:bodyPr>
-          <a:lstStyle/>
-          <a:p>
-            <a:pPr algn="ctr">
-              <a:spcAft>
-                <a:spcPts val="0"/>
-              </a:spcAft>
-            </a:pPr>
-            <a:r>
-              <a:rPr sz="1300" b="1" i="0">
-                <a:solidFill>
-                  <a:srgbClr val="FFFFFF"/>
-                </a:solidFill>
-                <a:latin typeface="Yu Gothic"/>
-                <a:ea typeface="Yu Gothic"/>
-                <a:cs typeface="Yu Gothic"/>
-              </a:rPr>
-              <a:t>窓口</a:t>
-            </a:r>
-          </a:p>
-        </p:txBody>
-      </p:sp>
-      <p:sp>
-        <p:nvSpPr>
-          <p:cNvPr id="14" name="TextBox 13"/>
-          <p:cNvSpPr txBox="1"/>
-          <p:nvPr/>
-        </p:nvSpPr>
-        <p:spPr>
-          <a:xfrm>
-            <a:off x="2139696" y="3099816"/>
-            <a:ext cx="9400032" cy="731520"/>
-          </a:xfrm>
-          <a:prstGeom prst="rect">
-            <a:avLst/>
-          </a:prstGeom>
-          <a:noFill/>
-        </p:spPr>
-        <p:txBody>
-          <a:bodyPr wrap="square" lIns="0" rIns="0" tIns="0" bIns="0" anchor="ctr">
-            <a:spAutoFit/>
-          </a:bodyPr>
-          <a:lstStyle/>
-          <a:p>
-            <a:pPr algn="l">
-              <a:spcAft>
-                <a:spcPts val="300"/>
-              </a:spcAft>
-            </a:pPr>
-            <a:r>
-              <a:rPr sz="1300" b="1" i="0">
-                <a:solidFill>
-                  <a:srgbClr val="3A106E"/>
-                </a:solidFill>
-                <a:latin typeface="Yu Gothic"/>
-                <a:ea typeface="Yu Gothic"/>
-                <a:cs typeface="Yu Gothic"/>
-              </a:rPr>
-              <a:t>窓口は坪井に一本化します</a:t>
-            </a:r>
-          </a:p>
-          <a:p>
-            <a:pPr algn="l">
-              <a:spcAft>
-                <a:spcPts val="0"/>
-              </a:spcAft>
-            </a:pPr>
-            <a:r>
-              <a:rPr sz="1000" b="0" i="0">
-                <a:solidFill>
-                  <a:srgbClr val="262630"/>
-                </a:solidFill>
-                <a:latin typeface="Yu Gothic"/>
-                <a:ea typeface="Yu Gothic"/>
-                <a:cs typeface="Yu Gothic"/>
-              </a:rPr>
-              <a:t>細かいやり取りで柳沼さんの時間を奪いません</a:t>
-            </a:r>
-          </a:p>
-        </p:txBody>
-      </p:sp>
-      <p:sp>
-        <p:nvSpPr>
-          <p:cNvPr id="15" name="Rectangle 14"/>
-          <p:cNvSpPr/>
-          <p:nvPr/>
-        </p:nvSpPr>
-        <p:spPr>
-          <a:xfrm>
-            <a:off x="502920" y="4078224"/>
-            <a:ext cx="11183112" cy="969264"/>
-          </a:xfrm>
-          <a:prstGeom prst="rect">
-            <a:avLst/>
-          </a:prstGeom>
-          <a:solidFill>
-            <a:srgbClr val="FFFFFF"/>
-          </a:solidFill>
-          <a:ln w="9525">
-            <a:solidFill>
-              <a:srgbClr val="D9D9E0"/>
-            </a:solidFill>
-          </a:ln>
-          <a:effectLst/>
-        </p:spPr>
-        <p:style>
-          <a:lnRef idx="1">
-            <a:schemeClr val="accent1"/>
-          </a:lnRef>
-          <a:fillRef idx="3">
-            <a:schemeClr val="accent1"/>
-          </a:fillRef>
-          <a:effectRef idx="2">
-            <a:schemeClr val="accent1"/>
-          </a:effectRef>
-          <a:fontRef idx="minor">
-            <a:schemeClr val="lt1"/>
-          </a:fontRef>
-        </p:style>
-        <p:txBody>
-          <a:bodyPr rtlCol="0" anchor="ctr"/>
-          <a:lstStyle/>
-          <a:p>
-            <a:pPr algn="ctr"/>
-          </a:p>
-        </p:txBody>
-      </p:sp>
-      <p:sp>
-        <p:nvSpPr>
-          <p:cNvPr id="16" name="Rectangle 15"/>
-          <p:cNvSpPr/>
-          <p:nvPr/>
-        </p:nvSpPr>
-        <p:spPr>
-          <a:xfrm>
-            <a:off x="502920" y="4078224"/>
-            <a:ext cx="64008" cy="969264"/>
-          </a:xfrm>
-          <a:prstGeom prst="rect">
-            <a:avLst/>
-          </a:prstGeom>
-          <a:solidFill>
-            <a:srgbClr val="7823DC"/>
-          </a:solidFill>
-          <a:ln>
-            <a:noFill/>
-          </a:ln>
-          <a:effectLst/>
-        </p:spPr>
-        <p:style>
-          <a:lnRef idx="1">
-            <a:schemeClr val="accent1"/>
-          </a:lnRef>
-          <a:fillRef idx="3">
-            <a:schemeClr val="accent1"/>
-          </a:fillRef>
-          <a:effectRef idx="2">
-            <a:schemeClr val="accent1"/>
-          </a:effectRef>
-          <a:fontRef idx="minor">
-            <a:schemeClr val="lt1"/>
-          </a:fontRef>
-        </p:style>
-        <p:txBody>
-          <a:bodyPr rtlCol="0" anchor="ctr"/>
-          <a:lstStyle/>
-          <a:p>
-            <a:pPr algn="ctr"/>
-          </a:p>
-        </p:txBody>
-      </p:sp>
-      <p:sp>
-        <p:nvSpPr>
-          <p:cNvPr id="17" name="Rectangle 16"/>
-          <p:cNvSpPr/>
-          <p:nvPr/>
-        </p:nvSpPr>
-        <p:spPr>
-          <a:xfrm>
-            <a:off x="749808" y="4306824"/>
-            <a:ext cx="1170432" cy="512064"/>
-          </a:xfrm>
-          <a:prstGeom prst="rect">
-            <a:avLst/>
-          </a:prstGeom>
-          <a:solidFill>
-            <a:srgbClr val="3A106E"/>
-          </a:solidFill>
-          <a:ln>
-            <a:noFill/>
-          </a:ln>
-          <a:effectLst/>
-        </p:spPr>
-        <p:style>
-          <a:lnRef idx="1">
-            <a:schemeClr val="accent1"/>
-          </a:lnRef>
-          <a:fillRef idx="3">
-            <a:schemeClr val="accent1"/>
-          </a:fillRef>
-          <a:effectRef idx="2">
-            <a:schemeClr val="accent1"/>
-          </a:effectRef>
-          <a:fontRef idx="minor">
-            <a:schemeClr val="lt1"/>
-          </a:fontRef>
-        </p:style>
-        <p:txBody>
-          <a:bodyPr rtlCol="0" anchor="ctr"/>
-          <a:lstStyle/>
-          <a:p>
-            <a:pPr algn="ctr"/>
-          </a:p>
-        </p:txBody>
-      </p:sp>
-      <p:sp>
-        <p:nvSpPr>
-          <p:cNvPr id="18" name="TextBox 17"/>
-          <p:cNvSpPr txBox="1"/>
-          <p:nvPr/>
-        </p:nvSpPr>
-        <p:spPr>
-          <a:xfrm>
-            <a:off x="749808" y="4306824"/>
-            <a:ext cx="1170432" cy="512064"/>
-          </a:xfrm>
-          <a:prstGeom prst="rect">
-            <a:avLst/>
-          </a:prstGeom>
-          <a:noFill/>
-        </p:spPr>
-        <p:txBody>
-          <a:bodyPr wrap="square" lIns="0" rIns="0" tIns="0" bIns="0" anchor="ctr">
-            <a:spAutoFit/>
-          </a:bodyPr>
-          <a:lstStyle/>
-          <a:p>
-            <a:pPr algn="ctr">
-              <a:spcAft>
-                <a:spcPts val="0"/>
-              </a:spcAft>
-            </a:pPr>
-            <a:r>
-              <a:rPr sz="1300" b="1" i="0">
-                <a:solidFill>
-                  <a:srgbClr val="FFFFFF"/>
-                </a:solidFill>
-                <a:latin typeface="Yu Gothic"/>
-                <a:ea typeface="Yu Gothic"/>
-                <a:cs typeface="Yu Gothic"/>
-              </a:rPr>
-              <a:t>供給</a:t>
-            </a:r>
-          </a:p>
-        </p:txBody>
-      </p:sp>
-      <p:sp>
-        <p:nvSpPr>
-          <p:cNvPr id="19" name="TextBox 18"/>
-          <p:cNvSpPr txBox="1"/>
-          <p:nvPr/>
-        </p:nvSpPr>
-        <p:spPr>
-          <a:xfrm>
-            <a:off x="2139696" y="4197096"/>
-            <a:ext cx="9400032" cy="731520"/>
-          </a:xfrm>
-          <a:prstGeom prst="rect">
-            <a:avLst/>
-          </a:prstGeom>
-          <a:noFill/>
-        </p:spPr>
-        <p:txBody>
-          <a:bodyPr wrap="square" lIns="0" rIns="0" tIns="0" bIns="0" anchor="ctr">
-            <a:spAutoFit/>
-          </a:bodyPr>
-          <a:lstStyle/>
-          <a:p>
-            <a:pPr algn="l">
-              <a:spcAft>
-                <a:spcPts val="300"/>
-              </a:spcAft>
-            </a:pPr>
-            <a:r>
-              <a:rPr sz="1300" b="1" i="0">
-                <a:solidFill>
-                  <a:srgbClr val="3A106E"/>
-                </a:solidFill>
-                <a:latin typeface="Yu Gothic"/>
-                <a:ea typeface="Yu Gothic"/>
-                <a:cs typeface="Yu Gothic"/>
-              </a:rPr>
-              <a:t>月次の定期供給にできないかご相談したい</a:t>
-            </a:r>
-          </a:p>
-          <a:p>
-            <a:pPr algn="l">
-              <a:spcAft>
-                <a:spcPts val="0"/>
-              </a:spcAft>
-            </a:pPr>
-            <a:r>
-              <a:rPr sz="1000" b="0" i="0">
-                <a:solidFill>
-                  <a:srgbClr val="262630"/>
-                </a:solidFill>
-                <a:latin typeface="Yu Gothic"/>
-                <a:ea typeface="Yu Gothic"/>
-                <a:cs typeface="Yu Gothic"/>
-              </a:rPr>
-              <a:t>初回をいただいたのち、都度依頼をなくすかたちにしたい</a:t>
-            </a:r>
-          </a:p>
-        </p:txBody>
-      </p:sp>
-      <p:sp>
-        <p:nvSpPr>
-          <p:cNvPr id="20" name="Rectangle 19"/>
-          <p:cNvSpPr/>
-          <p:nvPr/>
-        </p:nvSpPr>
-        <p:spPr>
-          <a:xfrm>
-            <a:off x="502920" y="5175504"/>
-            <a:ext cx="11183112" cy="969264"/>
-          </a:xfrm>
-          <a:prstGeom prst="rect">
-            <a:avLst/>
-          </a:prstGeom>
-          <a:solidFill>
-            <a:srgbClr val="FFFFFF"/>
-          </a:solidFill>
-          <a:ln w="9525">
-            <a:solidFill>
-              <a:srgbClr val="D9D9E0"/>
-            </a:solidFill>
-          </a:ln>
-          <a:effectLst/>
-        </p:spPr>
-        <p:style>
-          <a:lnRef idx="1">
-            <a:schemeClr val="accent1"/>
-          </a:lnRef>
-          <a:fillRef idx="3">
-            <a:schemeClr val="accent1"/>
-          </a:fillRef>
-          <a:effectRef idx="2">
-            <a:schemeClr val="accent1"/>
-          </a:effectRef>
-          <a:fontRef idx="minor">
-            <a:schemeClr val="lt1"/>
-          </a:fontRef>
-        </p:style>
-        <p:txBody>
-          <a:bodyPr rtlCol="0" anchor="ctr"/>
-          <a:lstStyle/>
-          <a:p>
-            <a:pPr algn="ctr"/>
-          </a:p>
-        </p:txBody>
-      </p:sp>
-      <p:sp>
-        <p:nvSpPr>
-          <p:cNvPr id="21" name="Rectangle 20"/>
-          <p:cNvSpPr/>
-          <p:nvPr/>
-        </p:nvSpPr>
-        <p:spPr>
-          <a:xfrm>
-            <a:off x="502920" y="5175504"/>
-            <a:ext cx="64008" cy="969264"/>
-          </a:xfrm>
-          <a:prstGeom prst="rect">
-            <a:avLst/>
-          </a:prstGeom>
-          <a:solidFill>
-            <a:srgbClr val="7823DC"/>
-          </a:solidFill>
-          <a:ln>
-            <a:noFill/>
-          </a:ln>
-          <a:effectLst/>
-        </p:spPr>
-        <p:style>
-          <a:lnRef idx="1">
-            <a:schemeClr val="accent1"/>
-          </a:lnRef>
-          <a:fillRef idx="3">
-            <a:schemeClr val="accent1"/>
-          </a:fillRef>
-          <a:effectRef idx="2">
-            <a:schemeClr val="accent1"/>
-          </a:effectRef>
-          <a:fontRef idx="minor">
-            <a:schemeClr val="lt1"/>
-          </a:fontRef>
-        </p:style>
-        <p:txBody>
-          <a:bodyPr rtlCol="0" anchor="ctr"/>
-          <a:lstStyle/>
-          <a:p>
-            <a:pPr algn="ctr"/>
-          </a:p>
-        </p:txBody>
-      </p:sp>
-      <p:sp>
-        <p:nvSpPr>
-          <p:cNvPr id="22" name="Rectangle 21"/>
-          <p:cNvSpPr/>
-          <p:nvPr/>
-        </p:nvSpPr>
-        <p:spPr>
-          <a:xfrm>
-            <a:off x="749808" y="5404104"/>
-            <a:ext cx="1170432" cy="512064"/>
-          </a:xfrm>
-          <a:prstGeom prst="rect">
-            <a:avLst/>
-          </a:prstGeom>
-          <a:solidFill>
-            <a:srgbClr val="3A106E"/>
-          </a:solidFill>
-          <a:ln>
-            <a:noFill/>
-          </a:ln>
-          <a:effectLst/>
-        </p:spPr>
-        <p:style>
-          <a:lnRef idx="1">
-            <a:schemeClr val="accent1"/>
-          </a:lnRef>
-          <a:fillRef idx="3">
-            <a:schemeClr val="accent1"/>
-          </a:fillRef>
-          <a:effectRef idx="2">
-            <a:schemeClr val="accent1"/>
-          </a:effectRef>
-          <a:fontRef idx="minor">
-            <a:schemeClr val="lt1"/>
-          </a:fontRef>
-        </p:style>
-        <p:txBody>
-          <a:bodyPr rtlCol="0" anchor="ctr"/>
-          <a:lstStyle/>
-          <a:p>
-            <a:pPr algn="ctr"/>
-          </a:p>
-        </p:txBody>
-      </p:sp>
-      <p:sp>
-        <p:nvSpPr>
-          <p:cNvPr id="23" name="TextBox 22"/>
-          <p:cNvSpPr txBox="1"/>
-          <p:nvPr/>
-        </p:nvSpPr>
-        <p:spPr>
-          <a:xfrm>
-            <a:off x="749808" y="5404104"/>
-            <a:ext cx="1170432" cy="512064"/>
-          </a:xfrm>
-          <a:prstGeom prst="rect">
-            <a:avLst/>
-          </a:prstGeom>
-          <a:noFill/>
-        </p:spPr>
-        <p:txBody>
-          <a:bodyPr wrap="square" lIns="0" rIns="0" tIns="0" bIns="0" anchor="ctr">
-            <a:spAutoFit/>
-          </a:bodyPr>
-          <a:lstStyle/>
-          <a:p>
-            <a:pPr algn="ctr">
-              <a:spcAft>
-                <a:spcPts val="0"/>
-              </a:spcAft>
-            </a:pPr>
-            <a:r>
-              <a:rPr sz="1300" b="1" i="0">
-                <a:solidFill>
-                  <a:srgbClr val="FFFFFF"/>
-                </a:solidFill>
-                <a:latin typeface="Yu Gothic"/>
-                <a:ea typeface="Yu Gothic"/>
-                <a:cs typeface="Yu Gothic"/>
-              </a:rPr>
-              <a:t>測定</a:t>
-            </a:r>
-          </a:p>
-        </p:txBody>
-      </p:sp>
-      <p:sp>
-        <p:nvSpPr>
-          <p:cNvPr id="24" name="TextBox 23"/>
-          <p:cNvSpPr txBox="1"/>
-          <p:nvPr/>
-        </p:nvSpPr>
-        <p:spPr>
-          <a:xfrm>
-            <a:off x="2139696" y="5294376"/>
-            <a:ext cx="9400032" cy="731520"/>
-          </a:xfrm>
-          <a:prstGeom prst="rect">
-            <a:avLst/>
-          </a:prstGeom>
-          <a:noFill/>
-        </p:spPr>
-        <p:txBody>
-          <a:bodyPr wrap="square" lIns="0" rIns="0" tIns="0" bIns="0" anchor="ctr">
-            <a:spAutoFit/>
-          </a:bodyPr>
-          <a:lstStyle/>
-          <a:p>
-            <a:pPr algn="l">
-              <a:spcAft>
-                <a:spcPts val="300"/>
-              </a:spcAft>
-            </a:pPr>
-            <a:r>
-              <a:rPr sz="1300" b="1" i="0">
-                <a:solidFill>
-                  <a:srgbClr val="3A106E"/>
-                </a:solidFill>
-                <a:latin typeface="Yu Gothic"/>
-                <a:ea typeface="Yu Gothic"/>
-                <a:cs typeface="Yu Gothic"/>
-              </a:rPr>
-              <a:t>成果は最終的に営業利益で測ります</a:t>
-            </a:r>
-          </a:p>
-          <a:p>
-            <a:pPr algn="l">
-              <a:spcAft>
-                <a:spcPts val="0"/>
-              </a:spcAft>
-            </a:pPr>
-            <a:r>
-              <a:rPr sz="1000" b="0" i="0">
-                <a:solidFill>
-                  <a:srgbClr val="262630"/>
-                </a:solidFill>
-                <a:latin typeface="Yu Gothic"/>
-                <a:ea typeface="Yu Gothic"/>
-                <a:cs typeface="Yu Gothic"/>
-              </a:rPr>
-              <a:t>その測定の物差し合わせ（何をもって改革の寄与とするか）は、データが整い次第あらためてご相談させてください</a:t>
-            </a:r>
-          </a:p>
-        </p:txBody>
-      </p:sp>
-      <p:sp>
-        <p:nvSpPr>
-          <p:cNvPr id="25" name="Rectangle 24"/>
-          <p:cNvSpPr/>
-          <p:nvPr/>
-        </p:nvSpPr>
-        <p:spPr>
-          <a:xfrm>
-            <a:off x="502920" y="6510528"/>
-            <a:ext cx="11183112" cy="15240"/>
-          </a:xfrm>
-          <a:prstGeom prst="rect">
-            <a:avLst/>
-          </a:prstGeom>
-          <a:solidFill>
-            <a:srgbClr val="D9D9E0"/>
-          </a:solidFill>
-          <a:ln>
-            <a:noFill/>
-          </a:ln>
-          <a:effectLst/>
-        </p:spPr>
-        <p:style>
-          <a:lnRef idx="1">
-            <a:schemeClr val="accent1"/>
-          </a:lnRef>
-          <a:fillRef idx="3">
-            <a:schemeClr val="accent1"/>
-          </a:fillRef>
-          <a:effectRef idx="2">
-            <a:schemeClr val="accent1"/>
-          </a:effectRef>
-          <a:fontRef idx="minor">
-            <a:schemeClr val="lt1"/>
-          </a:fontRef>
-        </p:style>
-        <p:txBody>
-          <a:bodyPr rtlCol="0" anchor="ctr"/>
-          <a:lstStyle/>
-          <a:p>
-            <a:pPr algn="ctr"/>
-          </a:p>
-        </p:txBody>
-      </p:sp>
-      <p:sp>
-        <p:nvSpPr>
-          <p:cNvPr id="26" name="TextBox 25"/>
-          <p:cNvSpPr txBox="1"/>
-          <p:nvPr/>
-        </p:nvSpPr>
-        <p:spPr>
-          <a:xfrm>
-            <a:off x="502920" y="6565392"/>
-            <a:ext cx="8686800" cy="274320"/>
-          </a:xfrm>
-          <a:prstGeom prst="rect">
-            <a:avLst/>
-          </a:prstGeom>
-          <a:noFill/>
-        </p:spPr>
-        <p:txBody>
-          <a:bodyPr wrap="square" lIns="0" rIns="0" tIns="0" bIns="0">
-            <a:spAutoFit/>
-          </a:bodyPr>
-          <a:lstStyle/>
-          <a:p>
-            <a:pPr algn="l">
-              <a:spcAft>
-                <a:spcPts val="400"/>
-              </a:spcAft>
-            </a:pPr>
-            <a:r>
-              <a:rPr sz="750" b="0" i="0">
-                <a:solidFill>
-                  <a:srgbClr val="8A8A99"/>
-                </a:solidFill>
-                <a:latin typeface="Yu Gothic"/>
-                <a:ea typeface="Yu Gothic"/>
-                <a:cs typeface="Yu Gothic"/>
-              </a:rPr>
-              <a:t>円谷プロダクション 営業改革 | 社外秘</a:t>
-            </a:r>
-          </a:p>
-        </p:txBody>
-      </p:sp>
-      <p:sp>
-        <p:nvSpPr>
-          <p:cNvPr id="27" name="TextBox 26"/>
-          <p:cNvSpPr txBox="1"/>
-          <p:nvPr/>
-        </p:nvSpPr>
-        <p:spPr>
-          <a:xfrm>
-            <a:off x="11247120" y="6565392"/>
-            <a:ext cx="457200" cy="274320"/>
-          </a:xfrm>
-          <a:prstGeom prst="rect">
-            <a:avLst/>
-          </a:prstGeom>
-          <a:noFill/>
-        </p:spPr>
-        <p:txBody>
-          <a:bodyPr wrap="square" lIns="0" rIns="0" tIns="0" bIns="0">
-            <a:spAutoFit/>
-          </a:bodyPr>
-          <a:lstStyle/>
-          <a:p>
-            <a:pPr algn="r">
-              <a:spcAft>
-                <a:spcPts val="400"/>
-              </a:spcAft>
-            </a:pPr>
-            <a:r>
-              <a:rPr sz="900" b="0" i="0">
-                <a:solidFill>
-                  <a:srgbClr val="5F5F6E"/>
-                </a:solidFill>
-                <a:latin typeface="Yu Gothic"/>
-                <a:ea typeface="Yu Gothic"/>
-                <a:cs typeface="Yu Gothic"/>
-              </a:rPr>
               <a:t>6</a:t>
             </a:r>
           </a:p>
@@ -9514,7 +8580,7 @@
                 <a:ea typeface="Yu Gothic"/>
                 <a:cs typeface="Yu Gothic"/>
               </a:rPr>
-              <a:t>本日決めたいこと（3つだけ）</a:t>
+              <a:t>お願い② 知恵のご提供（2点）</a:t>
             </a:r>
           </a:p>
         </p:txBody>
@@ -9555,7 +8621,7 @@
                 <a:ea typeface="Yu Gothic"/>
                 <a:cs typeface="Yu Gothic"/>
               </a:rPr>
-              <a:t>この3点だけ、方向を合わせられれば十分です</a:t>
+              <a:t>データだけでなく、読み方と算定ルールの知恵をお借りしたい</a:t>
             </a:r>
           </a:p>
         </p:txBody>
@@ -9612,8 +8678,8 @@
         </p:nvSpPr>
         <p:spPr>
           <a:xfrm>
-            <a:off x="502920" y="1883664"/>
-            <a:ext cx="11183112" cy="1005840"/>
+            <a:off x="502920" y="1920240"/>
+            <a:ext cx="5504688" cy="3017520"/>
           </a:xfrm>
           <a:prstGeom prst="rect">
             <a:avLst/>
@@ -9658,8 +8724,8 @@
         </p:nvSpPr>
         <p:spPr>
           <a:xfrm>
-            <a:off x="502920" y="1883664"/>
-            <a:ext cx="64008" cy="1005840"/>
+            <a:off x="502920" y="1920240"/>
+            <a:ext cx="5504688" cy="82296"/>
           </a:xfrm>
           <a:prstGeom prst="rect">
             <a:avLst/>
@@ -9702,8 +8768,8 @@
         </p:nvSpPr>
         <p:spPr>
           <a:xfrm>
-            <a:off x="722376" y="2157984"/>
-            <a:ext cx="457200" cy="457200"/>
+            <a:off x="777240" y="2231136"/>
+            <a:ext cx="566928" cy="566928"/>
           </a:xfrm>
           <a:prstGeom prst="ellipse">
             <a:avLst/>
@@ -9740,7 +8806,7 @@
               </a:spcAft>
             </a:pPr>
             <a:r>
-              <a:rPr sz="1800" b="1" i="0">
+              <a:rPr sz="2200" b="1" i="0">
                 <a:solidFill>
                   <a:srgbClr val="FFFFFF"/>
                 </a:solidFill>
@@ -9748,7 +8814,7 @@
                 <a:ea typeface="Yu Gothic"/>
                 <a:cs typeface="Yu Gothic"/>
               </a:rPr>
-              <a:t>1</a:t>
+              <a:t>①</a:t>
             </a:r>
           </a:p>
         </p:txBody>
@@ -9761,8 +8827,8 @@
         </p:nvSpPr>
         <p:spPr>
           <a:xfrm>
-            <a:off x="1362456" y="2029968"/>
-            <a:ext cx="10122408" cy="749808"/>
+            <a:off x="1508760" y="2267712"/>
+            <a:ext cx="4261104" cy="566928"/>
           </a:xfrm>
           <a:prstGeom prst="rect">
             <a:avLst/>
@@ -9774,24 +8840,6 @@
             <a:spAutoFit/>
           </a:bodyPr>
           <a:lstStyle/>
-          <a:p>
-            <a:pPr algn="l">
-              <a:spcAft>
-                <a:spcPts val="400"/>
-              </a:spcAft>
-            </a:pPr>
-            <a:r>
-              <a:rPr sz="1350" b="1" i="0">
-                <a:solidFill>
-                  <a:srgbClr val="3A106E"/>
-                </a:solidFill>
-                <a:latin typeface="Yu Gothic"/>
-                <a:ea typeface="Yu Gothic"/>
-                <a:cs typeface="Yu Gothic"/>
-              </a:rPr>
-              <a:t>取引先別売上明細の受け渡し</a:t>
-            </a:r>
-          </a:p>
           <a:p>
             <a:pPr algn="l">
               <a:spcAft>
@@ -9799,29 +8847,106 @@
               </a:spcAft>
             </a:pPr>
             <a:r>
-              <a:rPr sz="1050" b="0" i="0">
-                <a:solidFill>
-                  <a:srgbClr val="262630"/>
+              <a:rPr sz="1350" b="1" i="0">
+                <a:solidFill>
+                  <a:srgbClr val="3A106E"/>
                 </a:solidFill>
                 <a:latin typeface="Yu Gothic"/>
                 <a:ea typeface="Yu Gothic"/>
                 <a:cs typeface="Yu Gothic"/>
               </a:rPr>
-              <a:t>受け渡し日と形式を決めたい（目安：今週中にいただけると来週の確認会に間に合います）</a:t>
-            </a:r>
-          </a:p>
-        </p:txBody>
-      </p:sp>
-      <p:sp>
-        <p:nvSpPr>
-          <p:cNvPr id="9" name="Rectangle 8"/>
+              <a:t>対応表づくりのヒアリング（1時間×1回）</a:t>
+            </a:r>
+          </a:p>
+        </p:txBody>
+      </p:sp>
+      <p:sp>
+        <p:nvSpPr>
+          <p:cNvPr id="9" name="TextBox 8"/>
+          <p:cNvSpPr txBox="1"/>
+          <p:nvPr/>
+        </p:nvSpPr>
+        <p:spPr>
+          <a:xfrm>
+            <a:off x="813816" y="3090672"/>
+            <a:ext cx="4882896" cy="1737360"/>
+          </a:xfrm>
+          <a:prstGeom prst="rect">
+            <a:avLst/>
+          </a:prstGeom>
+          <a:noFill/>
+        </p:spPr>
+        <p:txBody>
+          <a:bodyPr wrap="square" lIns="0" rIns="0" tIns="0" bIns="0">
+            <a:spAutoFit/>
+          </a:bodyPr>
+          <a:lstStyle/>
+          <a:p>
+            <a:pPr algn="l">
+              <a:spcAft>
+                <a:spcPts val="700"/>
+              </a:spcAft>
+            </a:pPr>
+            <a:r>
+              <a:rPr sz="1100" b="0" i="0">
+                <a:solidFill>
+                  <a:srgbClr val="262630"/>
+                </a:solidFill>
+                <a:latin typeface="Yu Gothic"/>
+                <a:ea typeface="Yu Gothic"/>
+                <a:cs typeface="Yu Gothic"/>
+              </a:rPr>
+              <a:t>営業の顧客 ⇔ 財務の取引先 ⇔ 委員会・中間支払先 の対応表を設計したい。</a:t>
+            </a:r>
+          </a:p>
+          <a:p>
+            <a:pPr algn="l">
+              <a:spcAft>
+                <a:spcPts val="700"/>
+              </a:spcAft>
+            </a:pPr>
+            <a:r>
+              <a:rPr sz="1100" b="0" i="0">
+                <a:solidFill>
+                  <a:srgbClr val="262630"/>
+                </a:solidFill>
+                <a:latin typeface="Yu Gothic"/>
+                <a:ea typeface="Yu Gothic"/>
+                <a:cs typeface="Yu Gothic"/>
+              </a:rPr>
+              <a:t>財務側データの「この名義は何か」（実取引先か・決済代行か・委員会か）を教えてください。</a:t>
+            </a:r>
+          </a:p>
+          <a:p>
+            <a:pPr algn="l">
+              <a:spcAft>
+                <a:spcPts val="700"/>
+              </a:spcAft>
+            </a:pPr>
+            <a:r>
+              <a:rPr sz="1100" b="0" i="0">
+                <a:solidFill>
+                  <a:srgbClr val="262630"/>
+                </a:solidFill>
+                <a:latin typeface="Yu Gothic"/>
+                <a:ea typeface="Yu Gothic"/>
+                <a:cs typeface="Yu Gothic"/>
+              </a:rPr>
+              <a:t>坪井が設計案を持参し、新谷も同席します。</a:t>
+            </a:r>
+          </a:p>
+        </p:txBody>
+      </p:sp>
+      <p:sp>
+        <p:nvSpPr>
+          <p:cNvPr id="10" name="Rectangle 9"/>
           <p:cNvSpPr/>
           <p:nvPr/>
         </p:nvSpPr>
         <p:spPr>
           <a:xfrm>
-            <a:off x="502920" y="3044952"/>
-            <a:ext cx="11183112" cy="1005840"/>
+            <a:off x="6181344" y="1920240"/>
+            <a:ext cx="5504688" cy="3017520"/>
           </a:xfrm>
           <a:prstGeom prst="rect">
             <a:avLst/>
@@ -9860,14 +8985,14 @@
       </p:sp>
       <p:sp>
         <p:nvSpPr>
-          <p:cNvPr id="10" name="Rectangle 9"/>
+          <p:cNvPr id="11" name="Rectangle 10"/>
           <p:cNvSpPr/>
           <p:nvPr/>
         </p:nvSpPr>
         <p:spPr>
           <a:xfrm>
-            <a:off x="502920" y="3044952"/>
-            <a:ext cx="64008" cy="1005840"/>
+            <a:off x="6181344" y="1920240"/>
+            <a:ext cx="5504688" cy="82296"/>
           </a:xfrm>
           <a:prstGeom prst="rect">
             <a:avLst/>
@@ -9904,14 +9029,14 @@
       </p:sp>
       <p:sp>
         <p:nvSpPr>
-          <p:cNvPr id="11" name="Oval 10"/>
+          <p:cNvPr id="12" name="Oval 11"/>
           <p:cNvSpPr/>
           <p:nvPr/>
         </p:nvSpPr>
         <p:spPr>
           <a:xfrm>
-            <a:off x="722376" y="3319272"/>
-            <a:ext cx="457200" cy="457200"/>
+            <a:off x="6455664" y="2231136"/>
+            <a:ext cx="566928" cy="566928"/>
           </a:xfrm>
           <a:prstGeom prst="ellipse">
             <a:avLst/>
@@ -9948,7 +9073,7 @@
               </a:spcAft>
             </a:pPr>
             <a:r>
-              <a:rPr sz="1800" b="1" i="0">
+              <a:rPr sz="2200" b="1" i="0">
                 <a:solidFill>
                   <a:srgbClr val="FFFFFF"/>
                 </a:solidFill>
@@ -9956,21 +9081,21 @@
                 <a:ea typeface="Yu Gothic"/>
                 <a:cs typeface="Yu Gothic"/>
               </a:rPr>
-              <a:t>2</a:t>
-            </a:r>
-          </a:p>
-        </p:txBody>
-      </p:sp>
-      <p:sp>
-        <p:nvSpPr>
-          <p:cNvPr id="12" name="TextBox 11"/>
+              <a:t>②</a:t>
+            </a:r>
+          </a:p>
+        </p:txBody>
+      </p:sp>
+      <p:sp>
+        <p:nvSpPr>
+          <p:cNvPr id="13" name="TextBox 12"/>
           <p:cNvSpPr txBox="1"/>
           <p:nvPr/>
         </p:nvSpPr>
         <p:spPr>
           <a:xfrm>
-            <a:off x="1362456" y="3191256"/>
-            <a:ext cx="10122408" cy="749808"/>
+            <a:off x="7187184" y="2267712"/>
+            <a:ext cx="4261104" cy="566928"/>
           </a:xfrm>
           <a:prstGeom prst="rect">
             <a:avLst/>
@@ -9979,6 +9104,308 @@
         </p:spPr>
         <p:txBody>
           <a:bodyPr wrap="square" lIns="0" rIns="0" tIns="0" bIns="0" anchor="ctr">
+            <a:spAutoFit/>
+          </a:bodyPr>
+          <a:lstStyle/>
+          <a:p>
+            <a:pPr algn="l">
+              <a:spcAft>
+                <a:spcPts val="0"/>
+              </a:spcAft>
+            </a:pPr>
+            <a:r>
+              <a:rPr sz="1350" b="1" i="0">
+                <a:solidFill>
+                  <a:srgbClr val="3A106E"/>
+                </a:solidFill>
+                <a:latin typeface="Yu Gothic"/>
+                <a:ea typeface="Yu Gothic"/>
+                <a:cs typeface="Yu Gothic"/>
+              </a:rPr>
+              <a:t>粗利算定ルールの検証</a:t>
+            </a:r>
+          </a:p>
+        </p:txBody>
+      </p:sp>
+      <p:sp>
+        <p:nvSpPr>
+          <p:cNvPr id="14" name="TextBox 13"/>
+          <p:cNvSpPr txBox="1"/>
+          <p:nvPr/>
+        </p:nvSpPr>
+        <p:spPr>
+          <a:xfrm>
+            <a:off x="6492240" y="3090672"/>
+            <a:ext cx="4882896" cy="1737360"/>
+          </a:xfrm>
+          <a:prstGeom prst="rect">
+            <a:avLst/>
+          </a:prstGeom>
+          <a:noFill/>
+        </p:spPr>
+        <p:txBody>
+          <a:bodyPr wrap="square" lIns="0" rIns="0" tIns="0" bIns="0">
+            <a:spAutoFit/>
+          </a:bodyPr>
+          <a:lstStyle/>
+          <a:p>
+            <a:pPr algn="l">
+              <a:spcAft>
+                <a:spcPts val="700"/>
+              </a:spcAft>
+            </a:pPr>
+            <a:r>
+              <a:rPr sz="1100" b="0" i="0">
+                <a:solidFill>
+                  <a:srgbClr val="262630"/>
+                </a:solidFill>
+                <a:latin typeface="Yu Gothic"/>
+                <a:ea typeface="Yu Gothic"/>
+                <a:cs typeface="Yu Gothic"/>
+              </a:rPr>
+              <a:t>「案件別粗利 ≒ グロス収入 × 作品別実効取り分率」という推計方法の妥当性を見てください。</a:t>
+            </a:r>
+          </a:p>
+          <a:p>
+            <a:pPr algn="l">
+              <a:spcAft>
+                <a:spcPts val="700"/>
+              </a:spcAft>
+            </a:pPr>
+            <a:r>
+              <a:rPr sz="1100" b="0" i="0">
+                <a:solidFill>
+                  <a:srgbClr val="262630"/>
+                </a:solidFill>
+                <a:latin typeface="Yu Gothic"/>
+                <a:ea typeface="Yu Gothic"/>
+                <a:cs typeface="Yu Gothic"/>
+              </a:rPr>
+              <a:t>他社分消去のパターンA（純額）／B（総額）の使い分け、</a:t>
+            </a:r>
+          </a:p>
+          <a:p>
+            <a:pPr algn="l">
+              <a:spcAft>
+                <a:spcPts val="700"/>
+              </a:spcAft>
+            </a:pPr>
+            <a:r>
+              <a:rPr sz="1100" b="0" i="0">
+                <a:solidFill>
+                  <a:srgbClr val="262630"/>
+                </a:solidFill>
+                <a:latin typeface="Yu Gothic"/>
+                <a:ea typeface="Yu Gothic"/>
+                <a:cs typeface="Yu Gothic"/>
+              </a:rPr>
+              <a:t>消去とグロスの突合キーの有無なども確認したい。</a:t>
+            </a:r>
+          </a:p>
+        </p:txBody>
+      </p:sp>
+      <p:sp>
+        <p:nvSpPr>
+          <p:cNvPr id="15" name="Rectangle 14"/>
+          <p:cNvSpPr/>
+          <p:nvPr/>
+        </p:nvSpPr>
+        <p:spPr>
+          <a:xfrm>
+            <a:off x="502920" y="5175504"/>
+            <a:ext cx="11183112" cy="859536"/>
+          </a:xfrm>
+          <a:prstGeom prst="rect">
+            <a:avLst/>
+          </a:prstGeom>
+          <a:solidFill>
+            <a:srgbClr val="F3EFFB"/>
+          </a:solidFill>
+          <a:ln>
+            <a:noFill/>
+          </a:ln>
+          <a:effectLst/>
+        </p:spPr>
+        <p:style>
+          <a:lnRef idx="1">
+            <a:schemeClr val="accent1"/>
+          </a:lnRef>
+          <a:fillRef idx="3">
+            <a:schemeClr val="accent1"/>
+          </a:fillRef>
+          <a:effectRef idx="2">
+            <a:schemeClr val="accent1"/>
+          </a:effectRef>
+          <a:fontRef idx="minor">
+            <a:schemeClr val="lt1"/>
+          </a:fontRef>
+        </p:style>
+        <p:txBody>
+          <a:bodyPr rtlCol="0" anchor="ctr"/>
+          <a:lstStyle/>
+          <a:p>
+            <a:pPr algn="ctr"/>
+          </a:p>
+        </p:txBody>
+      </p:sp>
+      <p:sp>
+        <p:nvSpPr>
+          <p:cNvPr id="16" name="Rectangle 15"/>
+          <p:cNvSpPr/>
+          <p:nvPr/>
+        </p:nvSpPr>
+        <p:spPr>
+          <a:xfrm>
+            <a:off x="502920" y="5175504"/>
+            <a:ext cx="38100" cy="859536"/>
+          </a:xfrm>
+          <a:prstGeom prst="rect">
+            <a:avLst/>
+          </a:prstGeom>
+          <a:solidFill>
+            <a:srgbClr val="3A106E"/>
+          </a:solidFill>
+          <a:ln>
+            <a:noFill/>
+          </a:ln>
+          <a:effectLst/>
+        </p:spPr>
+        <p:style>
+          <a:lnRef idx="1">
+            <a:schemeClr val="accent1"/>
+          </a:lnRef>
+          <a:fillRef idx="3">
+            <a:schemeClr val="accent1"/>
+          </a:fillRef>
+          <a:effectRef idx="2">
+            <a:schemeClr val="accent1"/>
+          </a:effectRef>
+          <a:fontRef idx="minor">
+            <a:schemeClr val="lt1"/>
+          </a:fontRef>
+        </p:style>
+        <p:txBody>
+          <a:bodyPr rtlCol="0" anchor="ctr"/>
+          <a:lstStyle/>
+          <a:p>
+            <a:pPr algn="ctr"/>
+          </a:p>
+        </p:txBody>
+      </p:sp>
+      <p:sp>
+        <p:nvSpPr>
+          <p:cNvPr id="17" name="TextBox 16"/>
+          <p:cNvSpPr txBox="1"/>
+          <p:nvPr/>
+        </p:nvSpPr>
+        <p:spPr>
+          <a:xfrm>
+            <a:off x="713232" y="5230368"/>
+            <a:ext cx="10835640" cy="749808"/>
+          </a:xfrm>
+          <a:prstGeom prst="rect">
+            <a:avLst/>
+          </a:prstGeom>
+          <a:noFill/>
+        </p:spPr>
+        <p:txBody>
+          <a:bodyPr wrap="square" lIns="0" rIns="0" tIns="0" bIns="0" anchor="ctr">
+            <a:spAutoFit/>
+          </a:bodyPr>
+          <a:lstStyle/>
+          <a:p>
+            <a:pPr algn="l">
+              <a:spcAft>
+                <a:spcPts val="0"/>
+              </a:spcAft>
+            </a:pPr>
+            <a:r>
+              <a:rPr sz="1050" b="1" i="0">
+                <a:solidFill>
+                  <a:srgbClr val="7823DC"/>
+                </a:solidFill>
+                <a:latin typeface="Yu Gothic"/>
+                <a:ea typeface="Yu Gothic"/>
+                <a:cs typeface="Yu Gothic"/>
+              </a:rPr>
+              <a:t>出発点　</a:t>
+            </a:r>
+            <a:r>
+              <a:rPr sz="1050" b="0" i="0">
+                <a:solidFill>
+                  <a:srgbClr val="262630"/>
+                </a:solidFill>
+                <a:latin typeface="Yu Gothic"/>
+                <a:ea typeface="Yu Gothic"/>
+                <a:cs typeface="Yu Gothic"/>
+              </a:rPr>
+              <a:t>青山さんからいただいた他社分消去のご説明が出発点です。『間違ってたらご指摘を』とのことでしたので、まさにそのご指摘をいただく場を作りたいと思っています。</a:t>
+            </a:r>
+          </a:p>
+        </p:txBody>
+      </p:sp>
+      <p:sp>
+        <p:nvSpPr>
+          <p:cNvPr id="18" name="Rectangle 17"/>
+          <p:cNvSpPr/>
+          <p:nvPr/>
+        </p:nvSpPr>
+        <p:spPr>
+          <a:xfrm>
+            <a:off x="502920" y="6510528"/>
+            <a:ext cx="11183112" cy="15240"/>
+          </a:xfrm>
+          <a:prstGeom prst="rect">
+            <a:avLst/>
+          </a:prstGeom>
+          <a:solidFill>
+            <a:srgbClr val="D9D9E0"/>
+          </a:solidFill>
+          <a:ln>
+            <a:noFill/>
+          </a:ln>
+          <a:effectLst/>
+        </p:spPr>
+        <p:style>
+          <a:lnRef idx="1">
+            <a:schemeClr val="accent1"/>
+          </a:lnRef>
+          <a:fillRef idx="3">
+            <a:schemeClr val="accent1"/>
+          </a:fillRef>
+          <a:effectRef idx="2">
+            <a:schemeClr val="accent1"/>
+          </a:effectRef>
+          <a:fontRef idx="minor">
+            <a:schemeClr val="lt1"/>
+          </a:fontRef>
+        </p:style>
+        <p:txBody>
+          <a:bodyPr rtlCol="0" anchor="ctr"/>
+          <a:lstStyle/>
+          <a:p>
+            <a:pPr algn="ctr"/>
+          </a:p>
+        </p:txBody>
+      </p:sp>
+      <p:sp>
+        <p:nvSpPr>
+          <p:cNvPr id="19" name="TextBox 18"/>
+          <p:cNvSpPr txBox="1"/>
+          <p:nvPr/>
+        </p:nvSpPr>
+        <p:spPr>
+          <a:xfrm>
+            <a:off x="502920" y="6565392"/>
+            <a:ext cx="8686800" cy="274320"/>
+          </a:xfrm>
+          <a:prstGeom prst="rect">
+            <a:avLst/>
+          </a:prstGeom>
+          <a:noFill/>
+        </p:spPr>
+        <p:txBody>
+          <a:bodyPr wrap="square" lIns="0" rIns="0" tIns="0" bIns="0">
             <a:spAutoFit/>
           </a:bodyPr>
           <a:lstStyle/>
@@ -9989,17 +9416,140 @@
               </a:spcAft>
             </a:pPr>
             <a:r>
-              <a:rPr sz="1350" b="1" i="0">
-                <a:solidFill>
-                  <a:srgbClr val="3A106E"/>
+              <a:rPr sz="750" b="0" i="0">
+                <a:solidFill>
+                  <a:srgbClr val="8A8A99"/>
                 </a:solidFill>
                 <a:latin typeface="Yu Gothic"/>
                 <a:ea typeface="Yu Gothic"/>
                 <a:cs typeface="Yu Gothic"/>
               </a:rPr>
-              <a:t>対応表ヒアリング1時間の日程</a:t>
-            </a:r>
-          </a:p>
+              <a:t>円谷プロダクション 営業改革 | 社外秘</a:t>
+            </a:r>
+          </a:p>
+        </p:txBody>
+      </p:sp>
+      <p:sp>
+        <p:nvSpPr>
+          <p:cNvPr id="20" name="TextBox 19"/>
+          <p:cNvSpPr txBox="1"/>
+          <p:nvPr/>
+        </p:nvSpPr>
+        <p:spPr>
+          <a:xfrm>
+            <a:off x="11247120" y="6565392"/>
+            <a:ext cx="457200" cy="274320"/>
+          </a:xfrm>
+          <a:prstGeom prst="rect">
+            <a:avLst/>
+          </a:prstGeom>
+          <a:noFill/>
+        </p:spPr>
+        <p:txBody>
+          <a:bodyPr wrap="square" lIns="0" rIns="0" tIns="0" bIns="0">
+            <a:spAutoFit/>
+          </a:bodyPr>
+          <a:lstStyle/>
+          <a:p>
+            <a:pPr algn="r">
+              <a:spcAft>
+                <a:spcPts val="400"/>
+              </a:spcAft>
+            </a:pPr>
+            <a:r>
+              <a:rPr sz="900" b="0" i="0">
+                <a:solidFill>
+                  <a:srgbClr val="5F5F6E"/>
+                </a:solidFill>
+                <a:latin typeface="Yu Gothic"/>
+                <a:ea typeface="Yu Gothic"/>
+                <a:cs typeface="Yu Gothic"/>
+              </a:rPr>
+              <a:t>7</a:t>
+            </a:r>
+          </a:p>
+        </p:txBody>
+      </p:sp>
+    </p:spTree>
+  </p:cSld>
+  <p:clrMapOvr>
+    <a:masterClrMapping/>
+  </p:clrMapOvr>
+</p:sld>
+</file>
+
+<file path=ppt/slides/slide8.xml><?xml version="1.0" encoding="utf-8"?>
+<p:sld xmlns:a="http://schemas.openxmlformats.org/drawingml/2006/main" xmlns:p="http://schemas.openxmlformats.org/presentationml/2006/main" xmlns:r="http://schemas.openxmlformats.org/officeDocument/2006/relationships">
+  <p:cSld>
+    <p:spTree>
+      <p:nvGrpSpPr>
+        <p:cNvPr id="1" name=""/>
+        <p:cNvGrpSpPr/>
+        <p:nvPr/>
+      </p:nvGrpSpPr>
+      <p:grpSpPr/>
+      <p:sp>
+        <p:nvSpPr>
+          <p:cNvPr id="2" name="TextBox 1"/>
+          <p:cNvSpPr txBox="1"/>
+          <p:nvPr/>
+        </p:nvSpPr>
+        <p:spPr>
+          <a:xfrm>
+            <a:off x="502920" y="256032"/>
+            <a:ext cx="11155680" cy="256032"/>
+          </a:xfrm>
+          <a:prstGeom prst="rect">
+            <a:avLst/>
+          </a:prstGeom>
+          <a:noFill/>
+        </p:spPr>
+        <p:txBody>
+          <a:bodyPr wrap="square" lIns="0" rIns="0" tIns="0" bIns="0">
+            <a:spAutoFit/>
+          </a:bodyPr>
+          <a:lstStyle/>
+          <a:p>
+            <a:pPr algn="l">
+              <a:spcAft>
+                <a:spcPts val="400"/>
+              </a:spcAft>
+            </a:pPr>
+            <a:r>
+              <a:rPr sz="1000" b="1" i="0">
+                <a:solidFill>
+                  <a:srgbClr val="7823DC"/>
+                </a:solidFill>
+                <a:latin typeface="Yu Gothic"/>
+                <a:ea typeface="Yu Gothic"/>
+                <a:cs typeface="Yu Gothic"/>
+              </a:rPr>
+              <a:t>進め方と本日決めたいこと</a:t>
+            </a:r>
+          </a:p>
+        </p:txBody>
+      </p:sp>
+      <p:sp>
+        <p:nvSpPr>
+          <p:cNvPr id="3" name="TextBox 2"/>
+          <p:cNvSpPr txBox="1"/>
+          <p:nvPr/>
+        </p:nvSpPr>
+        <p:spPr>
+          <a:xfrm>
+            <a:off x="502920" y="512064"/>
+            <a:ext cx="11155680" cy="868680"/>
+          </a:xfrm>
+          <a:prstGeom prst="rect">
+            <a:avLst/>
+          </a:prstGeom>
+          <a:noFill/>
+        </p:spPr>
+        <p:txBody>
+          <a:bodyPr wrap="square" lIns="0" rIns="0" tIns="0" bIns="0">
+            <a:spAutoFit/>
+          </a:bodyPr>
+          <a:lstStyle/>
           <a:p>
             <a:pPr algn="l">
               <a:spcAft>
@@ -10007,7 +9557,7 @@
               </a:spcAft>
             </a:pPr>
             <a:r>
-              <a:rPr sz="1050" b="0" i="0">
+              <a:rPr sz="1900" b="1" i="0">
                 <a:solidFill>
                   <a:srgbClr val="262630"/>
                 </a:solidFill>
@@ -10015,21 +9565,65 @@
                 <a:ea typeface="Yu Gothic"/>
                 <a:cs typeface="Yu Gothic"/>
               </a:rPr>
-              <a:t>坪井＋新谷でお伺いします。ご都合のよい枠をいただきたい</a:t>
-            </a:r>
-          </a:p>
-        </p:txBody>
-      </p:sp>
-      <p:sp>
-        <p:nvSpPr>
-          <p:cNvPr id="13" name="Rectangle 12"/>
+              <a:t>柳沼さんの負荷を最小に。この場で方向だけ合わせられれば十分です</a:t>
+            </a:r>
+          </a:p>
+        </p:txBody>
+      </p:sp>
+      <p:sp>
+        <p:nvSpPr>
+          <p:cNvPr id="4" name="Rectangle 3"/>
           <p:cNvSpPr/>
           <p:nvPr/>
         </p:nvSpPr>
         <p:spPr>
           <a:xfrm>
-            <a:off x="502920" y="4206240"/>
-            <a:ext cx="11183112" cy="1005840"/>
+            <a:off x="502920" y="1389888"/>
+            <a:ext cx="1463040" cy="33020"/>
+          </a:xfrm>
+          <a:prstGeom prst="rect">
+            <a:avLst/>
+          </a:prstGeom>
+          <a:solidFill>
+            <a:srgbClr val="7823DC"/>
+          </a:solidFill>
+          <a:ln>
+            <a:noFill/>
+          </a:ln>
+          <a:effectLst/>
+        </p:spPr>
+        <p:style>
+          <a:lnRef idx="1">
+            <a:schemeClr val="accent1"/>
+          </a:lnRef>
+          <a:fillRef idx="3">
+            <a:schemeClr val="accent1"/>
+          </a:fillRef>
+          <a:effectRef idx="2">
+            <a:schemeClr val="accent1"/>
+          </a:effectRef>
+          <a:fontRef idx="minor">
+            <a:schemeClr val="lt1"/>
+          </a:fontRef>
+        </p:style>
+        <p:txBody>
+          <a:bodyPr rtlCol="0" anchor="ctr"/>
+          <a:lstStyle/>
+          <a:p>
+            <a:pPr algn="ctr"/>
+          </a:p>
+        </p:txBody>
+      </p:sp>
+      <p:sp>
+        <p:nvSpPr>
+          <p:cNvPr id="5" name="Rectangle 4"/>
+          <p:cNvSpPr/>
+          <p:nvPr/>
+        </p:nvSpPr>
+        <p:spPr>
+          <a:xfrm>
+            <a:off x="502920" y="1975104"/>
+            <a:ext cx="5486400" cy="3218688"/>
           </a:xfrm>
           <a:prstGeom prst="rect">
             <a:avLst/>
@@ -10068,14 +9662,649 @@
       </p:sp>
       <p:sp>
         <p:nvSpPr>
+          <p:cNvPr id="6" name="Rectangle 5"/>
+          <p:cNvSpPr/>
+          <p:nvPr/>
+        </p:nvSpPr>
+        <p:spPr>
+          <a:xfrm>
+            <a:off x="502920" y="1975104"/>
+            <a:ext cx="5486400" cy="475488"/>
+          </a:xfrm>
+          <a:prstGeom prst="rect">
+            <a:avLst/>
+          </a:prstGeom>
+          <a:solidFill>
+            <a:srgbClr val="3A106E"/>
+          </a:solidFill>
+          <a:ln>
+            <a:noFill/>
+          </a:ln>
+          <a:effectLst/>
+        </p:spPr>
+        <p:style>
+          <a:lnRef idx="1">
+            <a:schemeClr val="accent1"/>
+          </a:lnRef>
+          <a:fillRef idx="3">
+            <a:schemeClr val="accent1"/>
+          </a:fillRef>
+          <a:effectRef idx="2">
+            <a:schemeClr val="accent1"/>
+          </a:effectRef>
+          <a:fontRef idx="minor">
+            <a:schemeClr val="lt1"/>
+          </a:fontRef>
+        </p:style>
+        <p:txBody>
+          <a:bodyPr rtlCol="0" anchor="ctr"/>
+          <a:lstStyle/>
+          <a:p>
+            <a:pPr algn="ctr"/>
+          </a:p>
+        </p:txBody>
+      </p:sp>
+      <p:sp>
+        <p:nvSpPr>
+          <p:cNvPr id="7" name="TextBox 6"/>
+          <p:cNvSpPr txBox="1"/>
+          <p:nvPr/>
+        </p:nvSpPr>
+        <p:spPr>
+          <a:xfrm>
+            <a:off x="502920" y="1975104"/>
+            <a:ext cx="5486400" cy="475488"/>
+          </a:xfrm>
+          <a:prstGeom prst="rect">
+            <a:avLst/>
+          </a:prstGeom>
+          <a:noFill/>
+        </p:spPr>
+        <p:txBody>
+          <a:bodyPr wrap="square" lIns="0" rIns="0" tIns="0" bIns="0" anchor="ctr">
+            <a:spAutoFit/>
+          </a:bodyPr>
+          <a:lstStyle/>
+          <a:p>
+            <a:pPr algn="ctr">
+              <a:spcAft>
+                <a:spcPts val="0"/>
+              </a:spcAft>
+            </a:pPr>
+            <a:r>
+              <a:rPr sz="1250" b="1" i="0">
+                <a:solidFill>
+                  <a:srgbClr val="FFFFFF"/>
+                </a:solidFill>
+                <a:latin typeface="Yu Gothic"/>
+                <a:ea typeface="Yu Gothic"/>
+                <a:cs typeface="Yu Gothic"/>
+              </a:rPr>
+              <a:t>進め方（負荷の設計）</a:t>
+            </a:r>
+          </a:p>
+        </p:txBody>
+      </p:sp>
+      <p:sp>
+        <p:nvSpPr>
+          <p:cNvPr id="8" name="Rectangle 7"/>
+          <p:cNvSpPr/>
+          <p:nvPr/>
+        </p:nvSpPr>
+        <p:spPr>
+          <a:xfrm>
+            <a:off x="658368" y="2633472"/>
+            <a:ext cx="1188720" cy="384048"/>
+          </a:xfrm>
+          <a:prstGeom prst="rect">
+            <a:avLst/>
+          </a:prstGeom>
+          <a:solidFill>
+            <a:srgbClr val="F3EFFB"/>
+          </a:solidFill>
+          <a:ln>
+            <a:noFill/>
+          </a:ln>
+          <a:effectLst/>
+        </p:spPr>
+        <p:style>
+          <a:lnRef idx="1">
+            <a:schemeClr val="accent1"/>
+          </a:lnRef>
+          <a:fillRef idx="3">
+            <a:schemeClr val="accent1"/>
+          </a:fillRef>
+          <a:effectRef idx="2">
+            <a:schemeClr val="accent1"/>
+          </a:effectRef>
+          <a:fontRef idx="minor">
+            <a:schemeClr val="lt1"/>
+          </a:fontRef>
+        </p:style>
+        <p:txBody>
+          <a:bodyPr rtlCol="0" anchor="ctr"/>
+          <a:lstStyle/>
+          <a:p>
+            <a:pPr algn="ctr"/>
+          </a:p>
+        </p:txBody>
+      </p:sp>
+      <p:sp>
+        <p:nvSpPr>
+          <p:cNvPr id="9" name="TextBox 8"/>
+          <p:cNvSpPr txBox="1"/>
+          <p:nvPr/>
+        </p:nvSpPr>
+        <p:spPr>
+          <a:xfrm>
+            <a:off x="658368" y="2633472"/>
+            <a:ext cx="1188720" cy="384048"/>
+          </a:xfrm>
+          <a:prstGeom prst="rect">
+            <a:avLst/>
+          </a:prstGeom>
+          <a:noFill/>
+        </p:spPr>
+        <p:txBody>
+          <a:bodyPr wrap="square" lIns="0" rIns="0" tIns="0" bIns="0" anchor="ctr">
+            <a:spAutoFit/>
+          </a:bodyPr>
+          <a:lstStyle/>
+          <a:p>
+            <a:pPr algn="ctr">
+              <a:spcAft>
+                <a:spcPts val="0"/>
+              </a:spcAft>
+            </a:pPr>
+            <a:r>
+              <a:rPr sz="1050" b="1" i="0">
+                <a:solidFill>
+                  <a:srgbClr val="7823DC"/>
+                </a:solidFill>
+                <a:latin typeface="Yu Gothic"/>
+                <a:ea typeface="Yu Gothic"/>
+                <a:cs typeface="Yu Gothic"/>
+              </a:rPr>
+              <a:t>週2〜3h</a:t>
+            </a:r>
+          </a:p>
+        </p:txBody>
+      </p:sp>
+      <p:sp>
+        <p:nvSpPr>
+          <p:cNvPr id="10" name="TextBox 9"/>
+          <p:cNvSpPr txBox="1"/>
+          <p:nvPr/>
+        </p:nvSpPr>
+        <p:spPr>
+          <a:xfrm>
+            <a:off x="1956816" y="2578608"/>
+            <a:ext cx="3931920" cy="621792"/>
+          </a:xfrm>
+          <a:prstGeom prst="rect">
+            <a:avLst/>
+          </a:prstGeom>
+          <a:noFill/>
+        </p:spPr>
+        <p:txBody>
+          <a:bodyPr wrap="square" lIns="0" rIns="0" tIns="0" bIns="0" anchor="ctr">
+            <a:spAutoFit/>
+          </a:bodyPr>
+          <a:lstStyle/>
+          <a:p>
+            <a:pPr algn="l">
+              <a:spcAft>
+                <a:spcPts val="0"/>
+              </a:spcAft>
+            </a:pPr>
+            <a:r>
+              <a:rPr sz="1000" b="0" i="0">
+                <a:solidFill>
+                  <a:srgbClr val="262630"/>
+                </a:solidFill>
+                <a:latin typeface="Yu Gothic"/>
+                <a:ea typeface="Yu Gothic"/>
+                <a:cs typeface="Yu Gothic"/>
+              </a:rPr>
+              <a:t>受け渡しと検証のときだけお時間をいただきます（定例出席は不要）</a:t>
+            </a:r>
+          </a:p>
+        </p:txBody>
+      </p:sp>
+      <p:sp>
+        <p:nvSpPr>
+          <p:cNvPr id="11" name="Rectangle 10"/>
+          <p:cNvSpPr/>
+          <p:nvPr/>
+        </p:nvSpPr>
+        <p:spPr>
+          <a:xfrm>
+            <a:off x="658368" y="3255264"/>
+            <a:ext cx="1188720" cy="384048"/>
+          </a:xfrm>
+          <a:prstGeom prst="rect">
+            <a:avLst/>
+          </a:prstGeom>
+          <a:solidFill>
+            <a:srgbClr val="F3EFFB"/>
+          </a:solidFill>
+          <a:ln>
+            <a:noFill/>
+          </a:ln>
+          <a:effectLst/>
+        </p:spPr>
+        <p:style>
+          <a:lnRef idx="1">
+            <a:schemeClr val="accent1"/>
+          </a:lnRef>
+          <a:fillRef idx="3">
+            <a:schemeClr val="accent1"/>
+          </a:fillRef>
+          <a:effectRef idx="2">
+            <a:schemeClr val="accent1"/>
+          </a:effectRef>
+          <a:fontRef idx="minor">
+            <a:schemeClr val="lt1"/>
+          </a:fontRef>
+        </p:style>
+        <p:txBody>
+          <a:bodyPr rtlCol="0" anchor="ctr"/>
+          <a:lstStyle/>
+          <a:p>
+            <a:pPr algn="ctr"/>
+          </a:p>
+        </p:txBody>
+      </p:sp>
+      <p:sp>
+        <p:nvSpPr>
+          <p:cNvPr id="12" name="TextBox 11"/>
+          <p:cNvSpPr txBox="1"/>
+          <p:nvPr/>
+        </p:nvSpPr>
+        <p:spPr>
+          <a:xfrm>
+            <a:off x="658368" y="3255264"/>
+            <a:ext cx="1188720" cy="384048"/>
+          </a:xfrm>
+          <a:prstGeom prst="rect">
+            <a:avLst/>
+          </a:prstGeom>
+          <a:noFill/>
+        </p:spPr>
+        <p:txBody>
+          <a:bodyPr wrap="square" lIns="0" rIns="0" tIns="0" bIns="0" anchor="ctr">
+            <a:spAutoFit/>
+          </a:bodyPr>
+          <a:lstStyle/>
+          <a:p>
+            <a:pPr algn="ctr">
+              <a:spcAft>
+                <a:spcPts val="0"/>
+              </a:spcAft>
+            </a:pPr>
+            <a:r>
+              <a:rPr sz="1050" b="1" i="0">
+                <a:solidFill>
+                  <a:srgbClr val="7823DC"/>
+                </a:solidFill>
+                <a:latin typeface="Yu Gothic"/>
+                <a:ea typeface="Yu Gothic"/>
+                <a:cs typeface="Yu Gothic"/>
+              </a:rPr>
+              <a:t>窓口一本化</a:t>
+            </a:r>
+          </a:p>
+        </p:txBody>
+      </p:sp>
+      <p:sp>
+        <p:nvSpPr>
+          <p:cNvPr id="13" name="TextBox 12"/>
+          <p:cNvSpPr txBox="1"/>
+          <p:nvPr/>
+        </p:nvSpPr>
+        <p:spPr>
+          <a:xfrm>
+            <a:off x="1956816" y="3200400"/>
+            <a:ext cx="3931920" cy="621792"/>
+          </a:xfrm>
+          <a:prstGeom prst="rect">
+            <a:avLst/>
+          </a:prstGeom>
+          <a:noFill/>
+        </p:spPr>
+        <p:txBody>
+          <a:bodyPr wrap="square" lIns="0" rIns="0" tIns="0" bIns="0" anchor="ctr">
+            <a:spAutoFit/>
+          </a:bodyPr>
+          <a:lstStyle/>
+          <a:p>
+            <a:pPr algn="l">
+              <a:spcAft>
+                <a:spcPts val="0"/>
+              </a:spcAft>
+            </a:pPr>
+            <a:r>
+              <a:rPr sz="1000" b="0" i="0">
+                <a:solidFill>
+                  <a:srgbClr val="262630"/>
+                </a:solidFill>
+                <a:latin typeface="Yu Gothic"/>
+                <a:ea typeface="Yu Gothic"/>
+                <a:cs typeface="Yu Gothic"/>
+              </a:rPr>
+              <a:t>窓口は坪井さんに一本化。細かなやり取りで時間を奪いません</a:t>
+            </a:r>
+          </a:p>
+        </p:txBody>
+      </p:sp>
+      <p:sp>
+        <p:nvSpPr>
           <p:cNvPr id="14" name="Rectangle 13"/>
           <p:cNvSpPr/>
           <p:nvPr/>
         </p:nvSpPr>
         <p:spPr>
           <a:xfrm>
-            <a:off x="502920" y="4206240"/>
-            <a:ext cx="64008" cy="1005840"/>
+            <a:off x="658368" y="3877056"/>
+            <a:ext cx="1188720" cy="384048"/>
+          </a:xfrm>
+          <a:prstGeom prst="rect">
+            <a:avLst/>
+          </a:prstGeom>
+          <a:solidFill>
+            <a:srgbClr val="F3EFFB"/>
+          </a:solidFill>
+          <a:ln>
+            <a:noFill/>
+          </a:ln>
+          <a:effectLst/>
+        </p:spPr>
+        <p:style>
+          <a:lnRef idx="1">
+            <a:schemeClr val="accent1"/>
+          </a:lnRef>
+          <a:fillRef idx="3">
+            <a:schemeClr val="accent1"/>
+          </a:fillRef>
+          <a:effectRef idx="2">
+            <a:schemeClr val="accent1"/>
+          </a:effectRef>
+          <a:fontRef idx="minor">
+            <a:schemeClr val="lt1"/>
+          </a:fontRef>
+        </p:style>
+        <p:txBody>
+          <a:bodyPr rtlCol="0" anchor="ctr"/>
+          <a:lstStyle/>
+          <a:p>
+            <a:pPr algn="ctr"/>
+          </a:p>
+        </p:txBody>
+      </p:sp>
+      <p:sp>
+        <p:nvSpPr>
+          <p:cNvPr id="15" name="TextBox 14"/>
+          <p:cNvSpPr txBox="1"/>
+          <p:nvPr/>
+        </p:nvSpPr>
+        <p:spPr>
+          <a:xfrm>
+            <a:off x="658368" y="3877056"/>
+            <a:ext cx="1188720" cy="384048"/>
+          </a:xfrm>
+          <a:prstGeom prst="rect">
+            <a:avLst/>
+          </a:prstGeom>
+          <a:noFill/>
+        </p:spPr>
+        <p:txBody>
+          <a:bodyPr wrap="square" lIns="0" rIns="0" tIns="0" bIns="0" anchor="ctr">
+            <a:spAutoFit/>
+          </a:bodyPr>
+          <a:lstStyle/>
+          <a:p>
+            <a:pPr algn="ctr">
+              <a:spcAft>
+                <a:spcPts val="0"/>
+              </a:spcAft>
+            </a:pPr>
+            <a:r>
+              <a:rPr sz="1050" b="1" i="0">
+                <a:solidFill>
+                  <a:srgbClr val="7823DC"/>
+                </a:solidFill>
+                <a:latin typeface="Yu Gothic"/>
+                <a:ea typeface="Yu Gothic"/>
+                <a:cs typeface="Yu Gothic"/>
+              </a:rPr>
+              <a:t>月次供給</a:t>
+            </a:r>
+          </a:p>
+        </p:txBody>
+      </p:sp>
+      <p:sp>
+        <p:nvSpPr>
+          <p:cNvPr id="16" name="TextBox 15"/>
+          <p:cNvSpPr txBox="1"/>
+          <p:nvPr/>
+        </p:nvSpPr>
+        <p:spPr>
+          <a:xfrm>
+            <a:off x="1956816" y="3822192"/>
+            <a:ext cx="3931920" cy="621792"/>
+          </a:xfrm>
+          <a:prstGeom prst="rect">
+            <a:avLst/>
+          </a:prstGeom>
+          <a:noFill/>
+        </p:spPr>
+        <p:txBody>
+          <a:bodyPr wrap="square" lIns="0" rIns="0" tIns="0" bIns="0" anchor="ctr">
+            <a:spAutoFit/>
+          </a:bodyPr>
+          <a:lstStyle/>
+          <a:p>
+            <a:pPr algn="l">
+              <a:spcAft>
+                <a:spcPts val="0"/>
+              </a:spcAft>
+            </a:pPr>
+            <a:r>
+              <a:rPr sz="1000" b="0" i="0">
+                <a:solidFill>
+                  <a:srgbClr val="262630"/>
+                </a:solidFill>
+                <a:latin typeface="Yu Gothic"/>
+                <a:ea typeface="Yu Gothic"/>
+                <a:cs typeface="Yu Gothic"/>
+              </a:rPr>
+              <a:t>月次の定期供給にできないかご相談したい</a:t>
+            </a:r>
+          </a:p>
+        </p:txBody>
+      </p:sp>
+      <p:sp>
+        <p:nvSpPr>
+          <p:cNvPr id="17" name="Rectangle 16"/>
+          <p:cNvSpPr/>
+          <p:nvPr/>
+        </p:nvSpPr>
+        <p:spPr>
+          <a:xfrm>
+            <a:off x="658368" y="4498848"/>
+            <a:ext cx="1188720" cy="384048"/>
+          </a:xfrm>
+          <a:prstGeom prst="rect">
+            <a:avLst/>
+          </a:prstGeom>
+          <a:solidFill>
+            <a:srgbClr val="F3EFFB"/>
+          </a:solidFill>
+          <a:ln>
+            <a:noFill/>
+          </a:ln>
+          <a:effectLst/>
+        </p:spPr>
+        <p:style>
+          <a:lnRef idx="1">
+            <a:schemeClr val="accent1"/>
+          </a:lnRef>
+          <a:fillRef idx="3">
+            <a:schemeClr val="accent1"/>
+          </a:fillRef>
+          <a:effectRef idx="2">
+            <a:schemeClr val="accent1"/>
+          </a:effectRef>
+          <a:fontRef idx="minor">
+            <a:schemeClr val="lt1"/>
+          </a:fontRef>
+        </p:style>
+        <p:txBody>
+          <a:bodyPr rtlCol="0" anchor="ctr"/>
+          <a:lstStyle/>
+          <a:p>
+            <a:pPr algn="ctr"/>
+          </a:p>
+        </p:txBody>
+      </p:sp>
+      <p:sp>
+        <p:nvSpPr>
+          <p:cNvPr id="18" name="TextBox 17"/>
+          <p:cNvSpPr txBox="1"/>
+          <p:nvPr/>
+        </p:nvSpPr>
+        <p:spPr>
+          <a:xfrm>
+            <a:off x="658368" y="4498848"/>
+            <a:ext cx="1188720" cy="384048"/>
+          </a:xfrm>
+          <a:prstGeom prst="rect">
+            <a:avLst/>
+          </a:prstGeom>
+          <a:noFill/>
+        </p:spPr>
+        <p:txBody>
+          <a:bodyPr wrap="square" lIns="0" rIns="0" tIns="0" bIns="0" anchor="ctr">
+            <a:spAutoFit/>
+          </a:bodyPr>
+          <a:lstStyle/>
+          <a:p>
+            <a:pPr algn="ctr">
+              <a:spcAft>
+                <a:spcPts val="0"/>
+              </a:spcAft>
+            </a:pPr>
+            <a:r>
+              <a:rPr sz="1050" b="1" i="0">
+                <a:solidFill>
+                  <a:srgbClr val="7823DC"/>
+                </a:solidFill>
+                <a:latin typeface="Yu Gothic"/>
+                <a:ea typeface="Yu Gothic"/>
+                <a:cs typeface="Yu Gothic"/>
+              </a:rPr>
+              <a:t>効果測定</a:t>
+            </a:r>
+          </a:p>
+        </p:txBody>
+      </p:sp>
+      <p:sp>
+        <p:nvSpPr>
+          <p:cNvPr id="19" name="TextBox 18"/>
+          <p:cNvSpPr txBox="1"/>
+          <p:nvPr/>
+        </p:nvSpPr>
+        <p:spPr>
+          <a:xfrm>
+            <a:off x="1956816" y="4443984"/>
+            <a:ext cx="3931920" cy="621792"/>
+          </a:xfrm>
+          <a:prstGeom prst="rect">
+            <a:avLst/>
+          </a:prstGeom>
+          <a:noFill/>
+        </p:spPr>
+        <p:txBody>
+          <a:bodyPr wrap="square" lIns="0" rIns="0" tIns="0" bIns="0" anchor="ctr">
+            <a:spAutoFit/>
+          </a:bodyPr>
+          <a:lstStyle/>
+          <a:p>
+            <a:pPr algn="l">
+              <a:spcAft>
+                <a:spcPts val="0"/>
+              </a:spcAft>
+            </a:pPr>
+            <a:r>
+              <a:rPr sz="1000" b="0" i="0">
+                <a:solidFill>
+                  <a:srgbClr val="262630"/>
+                </a:solidFill>
+                <a:latin typeface="Yu Gothic"/>
+                <a:ea typeface="Yu Gothic"/>
+                <a:cs typeface="Yu Gothic"/>
+              </a:rPr>
+              <a:t>物差し合わせ（何を改革の寄与とするか）はデータが整い次第あらためて</a:t>
+            </a:r>
+          </a:p>
+        </p:txBody>
+      </p:sp>
+      <p:sp>
+        <p:nvSpPr>
+          <p:cNvPr id="20" name="Rectangle 19"/>
+          <p:cNvSpPr/>
+          <p:nvPr/>
+        </p:nvSpPr>
+        <p:spPr>
+          <a:xfrm>
+            <a:off x="6199632" y="1975104"/>
+            <a:ext cx="5486400" cy="3218688"/>
+          </a:xfrm>
+          <a:prstGeom prst="rect">
+            <a:avLst/>
+          </a:prstGeom>
+          <a:solidFill>
+            <a:srgbClr val="FFFFFF"/>
+          </a:solidFill>
+          <a:ln w="9525">
+            <a:solidFill>
+              <a:srgbClr val="D9D9E0"/>
+            </a:solidFill>
+          </a:ln>
+          <a:effectLst/>
+        </p:spPr>
+        <p:style>
+          <a:lnRef idx="1">
+            <a:schemeClr val="accent1"/>
+          </a:lnRef>
+          <a:fillRef idx="3">
+            <a:schemeClr val="accent1"/>
+          </a:fillRef>
+          <a:effectRef idx="2">
+            <a:schemeClr val="accent1"/>
+          </a:effectRef>
+          <a:fontRef idx="minor">
+            <a:schemeClr val="lt1"/>
+          </a:fontRef>
+        </p:style>
+        <p:txBody>
+          <a:bodyPr rtlCol="0" anchor="ctr"/>
+          <a:lstStyle/>
+          <a:p>
+            <a:pPr algn="ctr"/>
+          </a:p>
+        </p:txBody>
+      </p:sp>
+      <p:sp>
+        <p:nvSpPr>
+          <p:cNvPr id="21" name="Rectangle 20"/>
+          <p:cNvSpPr/>
+          <p:nvPr/>
+        </p:nvSpPr>
+        <p:spPr>
+          <a:xfrm>
+            <a:off x="6199632" y="1975104"/>
+            <a:ext cx="5486400" cy="475488"/>
           </a:xfrm>
           <a:prstGeom prst="rect">
             <a:avLst/>
@@ -10112,14 +10341,55 @@
       </p:sp>
       <p:sp>
         <p:nvSpPr>
-          <p:cNvPr id="15" name="Oval 14"/>
+          <p:cNvPr id="22" name="TextBox 21"/>
+          <p:cNvSpPr txBox="1"/>
+          <p:nvPr/>
+        </p:nvSpPr>
+        <p:spPr>
+          <a:xfrm>
+            <a:off x="6199632" y="1975104"/>
+            <a:ext cx="5486400" cy="475488"/>
+          </a:xfrm>
+          <a:prstGeom prst="rect">
+            <a:avLst/>
+          </a:prstGeom>
+          <a:noFill/>
+        </p:spPr>
+        <p:txBody>
+          <a:bodyPr wrap="square" lIns="0" rIns="0" tIns="0" bIns="0" anchor="ctr">
+            <a:spAutoFit/>
+          </a:bodyPr>
+          <a:lstStyle/>
+          <a:p>
+            <a:pPr algn="ctr">
+              <a:spcAft>
+                <a:spcPts val="0"/>
+              </a:spcAft>
+            </a:pPr>
+            <a:r>
+              <a:rPr sz="1250" b="1" i="0">
+                <a:solidFill>
+                  <a:srgbClr val="FFFFFF"/>
+                </a:solidFill>
+                <a:latin typeface="Yu Gothic"/>
+                <a:ea typeface="Yu Gothic"/>
+                <a:cs typeface="Yu Gothic"/>
+              </a:rPr>
+              <a:t>本日決めたいこと（3つだけ）</a:t>
+            </a:r>
+          </a:p>
+        </p:txBody>
+      </p:sp>
+      <p:sp>
+        <p:nvSpPr>
+          <p:cNvPr id="23" name="Oval 22"/>
           <p:cNvSpPr/>
           <p:nvPr/>
         </p:nvSpPr>
         <p:spPr>
           <a:xfrm>
-            <a:off x="722376" y="4480560"/>
-            <a:ext cx="457200" cy="457200"/>
+            <a:off x="6400800" y="2670048"/>
+            <a:ext cx="402336" cy="402336"/>
           </a:xfrm>
           <a:prstGeom prst="ellipse">
             <a:avLst/>
@@ -10156,7 +10426,243 @@
               </a:spcAft>
             </a:pPr>
             <a:r>
-              <a:rPr sz="1800" b="1" i="0">
+              <a:rPr sz="1500" b="1" i="0">
+                <a:solidFill>
+                  <a:srgbClr val="FFFFFF"/>
+                </a:solidFill>
+                <a:latin typeface="Yu Gothic"/>
+                <a:ea typeface="Yu Gothic"/>
+                <a:cs typeface="Yu Gothic"/>
+              </a:rPr>
+              <a:t>1</a:t>
+            </a:r>
+          </a:p>
+        </p:txBody>
+      </p:sp>
+      <p:sp>
+        <p:nvSpPr>
+          <p:cNvPr id="24" name="TextBox 23"/>
+          <p:cNvSpPr txBox="1"/>
+          <p:nvPr/>
+        </p:nvSpPr>
+        <p:spPr>
+          <a:xfrm>
+            <a:off x="6949440" y="2615184"/>
+            <a:ext cx="4535424" cy="841248"/>
+          </a:xfrm>
+          <a:prstGeom prst="rect">
+            <a:avLst/>
+          </a:prstGeom>
+          <a:noFill/>
+        </p:spPr>
+        <p:txBody>
+          <a:bodyPr wrap="square" lIns="0" rIns="0" tIns="0" bIns="0" anchor="ctr">
+            <a:spAutoFit/>
+          </a:bodyPr>
+          <a:lstStyle/>
+          <a:p>
+            <a:pPr algn="l">
+              <a:spcAft>
+                <a:spcPts val="300"/>
+              </a:spcAft>
+            </a:pPr>
+            <a:r>
+              <a:rPr sz="1200" b="1" i="0">
+                <a:solidFill>
+                  <a:srgbClr val="3A106E"/>
+                </a:solidFill>
+                <a:latin typeface="Yu Gothic"/>
+                <a:ea typeface="Yu Gothic"/>
+                <a:cs typeface="Yu Gothic"/>
+              </a:rPr>
+              <a:t>明細の受け渡し日と形式</a:t>
+            </a:r>
+          </a:p>
+          <a:p>
+            <a:pPr algn="l">
+              <a:spcAft>
+                <a:spcPts val="0"/>
+              </a:spcAft>
+            </a:pPr>
+            <a:r>
+              <a:rPr sz="980" b="0" i="0">
+                <a:solidFill>
+                  <a:srgbClr val="262630"/>
+                </a:solidFill>
+                <a:latin typeface="Yu Gothic"/>
+                <a:ea typeface="Yu Gothic"/>
+                <a:cs typeface="Yu Gothic"/>
+              </a:rPr>
+              <a:t>取引先別売上明細を、いつ・どの形式でいただくか</a:t>
+            </a:r>
+          </a:p>
+        </p:txBody>
+      </p:sp>
+      <p:sp>
+        <p:nvSpPr>
+          <p:cNvPr id="25" name="Oval 24"/>
+          <p:cNvSpPr/>
+          <p:nvPr/>
+        </p:nvSpPr>
+        <p:spPr>
+          <a:xfrm>
+            <a:off x="6400800" y="3511296"/>
+            <a:ext cx="402336" cy="402336"/>
+          </a:xfrm>
+          <a:prstGeom prst="ellipse">
+            <a:avLst/>
+          </a:prstGeom>
+          <a:solidFill>
+            <a:srgbClr val="7823DC"/>
+          </a:solidFill>
+          <a:ln>
+            <a:noFill/>
+          </a:ln>
+          <a:effectLst/>
+        </p:spPr>
+        <p:style>
+          <a:lnRef idx="1">
+            <a:schemeClr val="accent1"/>
+          </a:lnRef>
+          <a:fillRef idx="3">
+            <a:schemeClr val="accent1"/>
+          </a:fillRef>
+          <a:effectRef idx="2">
+            <a:schemeClr val="accent1"/>
+          </a:effectRef>
+          <a:fontRef idx="minor">
+            <a:schemeClr val="lt1"/>
+          </a:fontRef>
+        </p:style>
+        <p:txBody>
+          <a:bodyPr rtlCol="0" anchor="ctr" wrap="none" lIns="0" rIns="0" tIns="0" bIns="0"/>
+          <a:lstStyle/>
+          <a:p>
+            <a:pPr algn="ctr">
+              <a:spcAft>
+                <a:spcPts val="0"/>
+              </a:spcAft>
+            </a:pPr>
+            <a:r>
+              <a:rPr sz="1500" b="1" i="0">
+                <a:solidFill>
+                  <a:srgbClr val="FFFFFF"/>
+                </a:solidFill>
+                <a:latin typeface="Yu Gothic"/>
+                <a:ea typeface="Yu Gothic"/>
+                <a:cs typeface="Yu Gothic"/>
+              </a:rPr>
+              <a:t>2</a:t>
+            </a:r>
+          </a:p>
+        </p:txBody>
+      </p:sp>
+      <p:sp>
+        <p:nvSpPr>
+          <p:cNvPr id="26" name="TextBox 25"/>
+          <p:cNvSpPr txBox="1"/>
+          <p:nvPr/>
+        </p:nvSpPr>
+        <p:spPr>
+          <a:xfrm>
+            <a:off x="6949440" y="3456432"/>
+            <a:ext cx="4535424" cy="841248"/>
+          </a:xfrm>
+          <a:prstGeom prst="rect">
+            <a:avLst/>
+          </a:prstGeom>
+          <a:noFill/>
+        </p:spPr>
+        <p:txBody>
+          <a:bodyPr wrap="square" lIns="0" rIns="0" tIns="0" bIns="0" anchor="ctr">
+            <a:spAutoFit/>
+          </a:bodyPr>
+          <a:lstStyle/>
+          <a:p>
+            <a:pPr algn="l">
+              <a:spcAft>
+                <a:spcPts val="300"/>
+              </a:spcAft>
+            </a:pPr>
+            <a:r>
+              <a:rPr sz="1200" b="1" i="0">
+                <a:solidFill>
+                  <a:srgbClr val="3A106E"/>
+                </a:solidFill>
+                <a:latin typeface="Yu Gothic"/>
+                <a:ea typeface="Yu Gothic"/>
+                <a:cs typeface="Yu Gothic"/>
+              </a:rPr>
+              <a:t>対応表ヒアリング1時間の日程</a:t>
+            </a:r>
+          </a:p>
+          <a:p>
+            <a:pPr algn="l">
+              <a:spcAft>
+                <a:spcPts val="0"/>
+              </a:spcAft>
+            </a:pPr>
+            <a:r>
+              <a:rPr sz="980" b="0" i="0">
+                <a:solidFill>
+                  <a:srgbClr val="262630"/>
+                </a:solidFill>
+                <a:latin typeface="Yu Gothic"/>
+                <a:ea typeface="Yu Gothic"/>
+                <a:cs typeface="Yu Gothic"/>
+              </a:rPr>
+              <a:t>坪井＋新谷でお伺いします。ご都合のよい枠を</a:t>
+            </a:r>
+          </a:p>
+        </p:txBody>
+      </p:sp>
+      <p:sp>
+        <p:nvSpPr>
+          <p:cNvPr id="27" name="Oval 26"/>
+          <p:cNvSpPr/>
+          <p:nvPr/>
+        </p:nvSpPr>
+        <p:spPr>
+          <a:xfrm>
+            <a:off x="6400800" y="4352544"/>
+            <a:ext cx="402336" cy="402336"/>
+          </a:xfrm>
+          <a:prstGeom prst="ellipse">
+            <a:avLst/>
+          </a:prstGeom>
+          <a:solidFill>
+            <a:srgbClr val="7823DC"/>
+          </a:solidFill>
+          <a:ln>
+            <a:noFill/>
+          </a:ln>
+          <a:effectLst/>
+        </p:spPr>
+        <p:style>
+          <a:lnRef idx="1">
+            <a:schemeClr val="accent1"/>
+          </a:lnRef>
+          <a:fillRef idx="3">
+            <a:schemeClr val="accent1"/>
+          </a:fillRef>
+          <a:effectRef idx="2">
+            <a:schemeClr val="accent1"/>
+          </a:effectRef>
+          <a:fontRef idx="minor">
+            <a:schemeClr val="lt1"/>
+          </a:fontRef>
+        </p:style>
+        <p:txBody>
+          <a:bodyPr rtlCol="0" anchor="ctr" wrap="none" lIns="0" rIns="0" tIns="0" bIns="0"/>
+          <a:lstStyle/>
+          <a:p>
+            <a:pPr algn="ctr">
+              <a:spcAft>
+                <a:spcPts val="0"/>
+              </a:spcAft>
+            </a:pPr>
+            <a:r>
+              <a:rPr sz="1500" b="1" i="0">
                 <a:solidFill>
                   <a:srgbClr val="FFFFFF"/>
                 </a:solidFill>
@@ -10171,14 +10677,14 @@
       </p:sp>
       <p:sp>
         <p:nvSpPr>
-          <p:cNvPr id="16" name="TextBox 15"/>
+          <p:cNvPr id="28" name="TextBox 27"/>
           <p:cNvSpPr txBox="1"/>
           <p:nvPr/>
         </p:nvSpPr>
         <p:spPr>
           <a:xfrm>
-            <a:off x="1362456" y="4352544"/>
-            <a:ext cx="10122408" cy="749808"/>
+            <a:off x="6949440" y="4297680"/>
+            <a:ext cx="4535424" cy="841248"/>
           </a:xfrm>
           <a:prstGeom prst="rect">
             <a:avLst/>
@@ -10193,11 +10699,11 @@
           <a:p>
             <a:pPr algn="l">
               <a:spcAft>
-                <a:spcPts val="400"/>
+                <a:spcPts val="300"/>
               </a:spcAft>
             </a:pPr>
             <a:r>
-              <a:rPr sz="1350" b="1" i="0">
+              <a:rPr sz="1200" b="1" i="0">
                 <a:solidFill>
                   <a:srgbClr val="3A106E"/>
                 </a:solidFill>
@@ -10205,7 +10711,7 @@
                 <a:ea typeface="Yu Gothic"/>
                 <a:cs typeface="Yu Gothic"/>
               </a:rPr>
-              <a:t>月次定期供給の可否</a:t>
+              <a:t>月次サイクルの目安</a:t>
             </a:r>
           </a:p>
           <a:p>
@@ -10215,7 +10721,7 @@
               </a:spcAft>
             </a:pPr>
             <a:r>
-              <a:rPr sz="1050" b="0" i="0">
+              <a:rPr sz="980" b="0" i="0">
                 <a:solidFill>
                   <a:srgbClr val="262630"/>
                 </a:solidFill>
@@ -10223,21 +10729,21 @@
                 <a:ea typeface="Yu Gothic"/>
                 <a:cs typeface="Yu Gothic"/>
               </a:rPr>
-              <a:t>月次の定期供給の可否と、負担にならないサイクルの目安をご相談したい</a:t>
-            </a:r>
-          </a:p>
-        </p:txBody>
-      </p:sp>
-      <p:sp>
-        <p:nvSpPr>
-          <p:cNvPr id="17" name="Rectangle 16"/>
+              <a:t>無理のない定期供給の頻度をご相談したい</a:t>
+            </a:r>
+          </a:p>
+        </p:txBody>
+      </p:sp>
+      <p:sp>
+        <p:nvSpPr>
+          <p:cNvPr id="29" name="Rectangle 28"/>
           <p:cNvSpPr/>
           <p:nvPr/>
         </p:nvSpPr>
         <p:spPr>
           <a:xfrm>
-            <a:off x="502920" y="5449824"/>
-            <a:ext cx="11183112" cy="950976"/>
+            <a:off x="502920" y="5413248"/>
+            <a:ext cx="11183112" cy="987552"/>
           </a:xfrm>
           <a:prstGeom prst="rect">
             <a:avLst/>
@@ -10274,14 +10780,14 @@
       </p:sp>
       <p:sp>
         <p:nvSpPr>
-          <p:cNvPr id="18" name="Rectangle 17"/>
+          <p:cNvPr id="30" name="Rectangle 29"/>
           <p:cNvSpPr/>
           <p:nvPr/>
         </p:nvSpPr>
         <p:spPr>
           <a:xfrm>
-            <a:off x="502920" y="5449824"/>
-            <a:ext cx="38100" cy="950976"/>
+            <a:off x="502920" y="5413248"/>
+            <a:ext cx="38100" cy="987552"/>
           </a:xfrm>
           <a:prstGeom prst="rect">
             <a:avLst/>
@@ -10318,14 +10824,14 @@
       </p:sp>
       <p:sp>
         <p:nvSpPr>
-          <p:cNvPr id="19" name="TextBox 18"/>
+          <p:cNvPr id="31" name="TextBox 30"/>
           <p:cNvSpPr txBox="1"/>
           <p:nvPr/>
         </p:nvSpPr>
         <p:spPr>
           <a:xfrm>
-            <a:off x="777240" y="5577840"/>
-            <a:ext cx="10698480" cy="713232"/>
+            <a:off x="777240" y="5541264"/>
+            <a:ext cx="10698480" cy="749808"/>
           </a:xfrm>
           <a:prstGeom prst="rect">
             <a:avLst/>
@@ -10377,7 +10883,7 @@
       </p:sp>
       <p:sp>
         <p:nvSpPr>
-          <p:cNvPr id="20" name="Rectangle 19"/>
+          <p:cNvPr id="32" name="Rectangle 31"/>
           <p:cNvSpPr/>
           <p:nvPr/>
         </p:nvSpPr>
@@ -10421,7 +10927,7 @@
       </p:sp>
       <p:sp>
         <p:nvSpPr>
-          <p:cNvPr id="21" name="TextBox 20"/>
+          <p:cNvPr id="33" name="TextBox 32"/>
           <p:cNvSpPr txBox="1"/>
           <p:nvPr/>
         </p:nvSpPr>
@@ -10462,7 +10968,7 @@
       </p:sp>
       <p:sp>
         <p:nvSpPr>
-          <p:cNvPr id="22" name="TextBox 21"/>
+          <p:cNvPr id="34" name="TextBox 33"/>
           <p:cNvSpPr txBox="1"/>
           <p:nvPr/>
         </p:nvSpPr>
@@ -10496,7 +11002,7 @@
                 <a:ea typeface="Yu Gothic"/>
                 <a:cs typeface="Yu Gothic"/>
               </a:rPr>
-              <a:t>7</a:t>
+              <a:t>8</a:t>
             </a:r>
           </a:p>
         </p:txBody>

--- a/docs/営業改革_柳沼さん共有資料.pptx
+++ b/docs/営業改革_柳沼さん共有資料.pptx
@@ -3104,13 +3104,13 @@
         <p:spPr>
           <a:xfrm>
             <a:off x="0" y="0"/>
-            <a:ext cx="256032" cy="6858000"/>
+            <a:ext cx="12191695" cy="6858000"/>
           </a:xfrm>
           <a:prstGeom prst="rect">
             <a:avLst/>
           </a:prstGeom>
           <a:solidFill>
-            <a:srgbClr val="7823DC"/>
+            <a:srgbClr val="2563EB"/>
           </a:solidFill>
           <a:ln>
             <a:noFill/>
@@ -3141,20 +3141,22 @@
       </p:sp>
       <p:sp>
         <p:nvSpPr>
-          <p:cNvPr id="3" name="Rectangle 2"/>
+          <p:cNvPr id="3" name="Oval 2"/>
           <p:cNvSpPr/>
           <p:nvPr/>
         </p:nvSpPr>
         <p:spPr>
           <a:xfrm>
-            <a:off x="822960" y="1874519"/>
-            <a:ext cx="2011680" cy="38100"/>
-          </a:xfrm>
-          <a:prstGeom prst="rect">
+            <a:off x="8869680" y="-1280160"/>
+            <a:ext cx="4754880" cy="4754880"/>
+          </a:xfrm>
+          <a:prstGeom prst="ellipse">
             <a:avLst/>
           </a:prstGeom>
           <a:solidFill>
-            <a:srgbClr val="7823DC"/>
+            <a:srgbClr val="4F7DEE">
+              <a:alpha val="45000"/>
+            </a:srgbClr>
           </a:solidFill>
           <a:ln>
             <a:noFill/>
@@ -3185,14 +3187,196 @@
       </p:sp>
       <p:sp>
         <p:nvSpPr>
-          <p:cNvPr id="4" name="TextBox 3"/>
+          <p:cNvPr id="4" name="Oval 3"/>
+          <p:cNvSpPr/>
+          <p:nvPr/>
+        </p:nvSpPr>
+        <p:spPr>
+          <a:xfrm>
+            <a:off x="9966960" y="4206240"/>
+            <a:ext cx="3291840" cy="3291840"/>
+          </a:xfrm>
+          <a:prstGeom prst="ellipse">
+            <a:avLst/>
+          </a:prstGeom>
+          <a:noFill/>
+          <a:ln w="17780">
+            <a:solidFill>
+              <a:srgbClr val="FFFFFF">
+                <a:alpha val="22000"/>
+              </a:srgbClr>
+            </a:solidFill>
+          </a:ln>
+          <a:effectLst/>
+        </p:spPr>
+        <p:style>
+          <a:lnRef idx="1">
+            <a:schemeClr val="accent1"/>
+          </a:lnRef>
+          <a:fillRef idx="3">
+            <a:schemeClr val="accent1"/>
+          </a:fillRef>
+          <a:effectRef idx="2">
+            <a:schemeClr val="accent1"/>
+          </a:effectRef>
+          <a:fontRef idx="minor">
+            <a:schemeClr val="lt1"/>
+          </a:fontRef>
+        </p:style>
+        <p:txBody>
+          <a:bodyPr rtlCol="0" anchor="ctr"/>
+          <a:lstStyle/>
+          <a:p>
+            <a:pPr algn="ctr"/>
+          </a:p>
+        </p:txBody>
+      </p:sp>
+      <p:sp>
+        <p:nvSpPr>
+          <p:cNvPr id="5" name="Oval 4"/>
+          <p:cNvSpPr/>
+          <p:nvPr/>
+        </p:nvSpPr>
+        <p:spPr>
+          <a:xfrm>
+            <a:off x="-822960" y="4663440"/>
+            <a:ext cx="2560320" cy="2560320"/>
+          </a:xfrm>
+          <a:prstGeom prst="ellipse">
+            <a:avLst/>
+          </a:prstGeom>
+          <a:noFill/>
+          <a:ln w="15240">
+            <a:solidFill>
+              <a:srgbClr val="FFFFFF">
+                <a:alpha val="16000"/>
+              </a:srgbClr>
+            </a:solidFill>
+          </a:ln>
+          <a:effectLst/>
+        </p:spPr>
+        <p:style>
+          <a:lnRef idx="1">
+            <a:schemeClr val="accent1"/>
+          </a:lnRef>
+          <a:fillRef idx="3">
+            <a:schemeClr val="accent1"/>
+          </a:fillRef>
+          <a:effectRef idx="2">
+            <a:schemeClr val="accent1"/>
+          </a:effectRef>
+          <a:fontRef idx="minor">
+            <a:schemeClr val="lt1"/>
+          </a:fontRef>
+        </p:style>
+        <p:txBody>
+          <a:bodyPr rtlCol="0" anchor="ctr"/>
+          <a:lstStyle/>
+          <a:p>
+            <a:pPr algn="ctr"/>
+          </a:p>
+        </p:txBody>
+      </p:sp>
+      <p:sp>
+        <p:nvSpPr>
+          <p:cNvPr id="6" name="Isosceles Triangle 5"/>
+          <p:cNvSpPr/>
+          <p:nvPr/>
+        </p:nvSpPr>
+        <p:spPr>
+          <a:xfrm rot="1200000">
+            <a:off x="10881360" y="1737360"/>
+            <a:ext cx="1371600" cy="1371600"/>
+          </a:xfrm>
+          <a:prstGeom prst="triangle">
+            <a:avLst/>
+          </a:prstGeom>
+          <a:noFill/>
+          <a:ln w="15240">
+            <a:solidFill>
+              <a:srgbClr val="FFFFFF">
+                <a:alpha val="18000"/>
+              </a:srgbClr>
+            </a:solidFill>
+          </a:ln>
+          <a:effectLst/>
+        </p:spPr>
+        <p:style>
+          <a:lnRef idx="1">
+            <a:schemeClr val="accent1"/>
+          </a:lnRef>
+          <a:fillRef idx="3">
+            <a:schemeClr val="accent1"/>
+          </a:fillRef>
+          <a:effectRef idx="2">
+            <a:schemeClr val="accent1"/>
+          </a:effectRef>
+          <a:fontRef idx="minor">
+            <a:schemeClr val="lt1"/>
+          </a:fontRef>
+        </p:style>
+        <p:txBody>
+          <a:bodyPr rtlCol="0" anchor="ctr"/>
+          <a:lstStyle/>
+          <a:p>
+            <a:pPr algn="ctr"/>
+          </a:p>
+        </p:txBody>
+      </p:sp>
+      <p:sp>
+        <p:nvSpPr>
+          <p:cNvPr id="7" name="Rectangle 6"/>
+          <p:cNvSpPr/>
+          <p:nvPr/>
+        </p:nvSpPr>
+        <p:spPr>
+          <a:xfrm>
+            <a:off x="868680" y="2084831"/>
+            <a:ext cx="603504" cy="38100"/>
+          </a:xfrm>
+          <a:prstGeom prst="rect">
+            <a:avLst/>
+          </a:prstGeom>
+          <a:solidFill>
+            <a:srgbClr val="FFFFFF"/>
+          </a:solidFill>
+          <a:ln>
+            <a:noFill/>
+          </a:ln>
+          <a:effectLst/>
+        </p:spPr>
+        <p:style>
+          <a:lnRef idx="1">
+            <a:schemeClr val="accent1"/>
+          </a:lnRef>
+          <a:fillRef idx="3">
+            <a:schemeClr val="accent1"/>
+          </a:fillRef>
+          <a:effectRef idx="2">
+            <a:schemeClr val="accent1"/>
+          </a:effectRef>
+          <a:fontRef idx="minor">
+            <a:schemeClr val="lt1"/>
+          </a:fontRef>
+        </p:style>
+        <p:txBody>
+          <a:bodyPr rtlCol="0" anchor="ctr"/>
+          <a:lstStyle/>
+          <a:p>
+            <a:pPr algn="ctr"/>
+          </a:p>
+        </p:txBody>
+      </p:sp>
+      <p:sp>
+        <p:nvSpPr>
+          <p:cNvPr id="8" name="TextBox 7"/>
           <p:cNvSpPr txBox="1"/>
           <p:nvPr/>
         </p:nvSpPr>
         <p:spPr>
           <a:xfrm>
-            <a:off x="822960" y="2148840"/>
-            <a:ext cx="10607040" cy="365760"/>
+            <a:off x="868680" y="2249424"/>
+            <a:ext cx="9875520" cy="365760"/>
           </a:xfrm>
           <a:prstGeom prst="rect">
             <a:avLst/>
@@ -3211,9 +3395,9 @@
               </a:spcAft>
             </a:pPr>
             <a:r>
-              <a:rPr sz="1500" b="1" i="0">
+              <a:rPr sz="1400" b="1" i="0">
                 <a:solidFill>
-                  <a:srgbClr val="5F5F6E"/>
+                  <a:srgbClr val="BFD4FE"/>
                 </a:solidFill>
                 <a:latin typeface="Yu Gothic"/>
                 <a:ea typeface="Yu Gothic"/>
@@ -3226,14 +3410,14 @@
       </p:sp>
       <p:sp>
         <p:nvSpPr>
-          <p:cNvPr id="5" name="TextBox 4"/>
+          <p:cNvPr id="9" name="TextBox 8"/>
           <p:cNvSpPr txBox="1"/>
           <p:nvPr/>
         </p:nvSpPr>
         <p:spPr>
           <a:xfrm>
-            <a:off x="822960" y="2697480"/>
-            <a:ext cx="10881360" cy="1737360"/>
+            <a:off x="822960" y="2788920"/>
+            <a:ext cx="10607040" cy="1920240"/>
           </a:xfrm>
           <a:prstGeom prst="rect">
             <a:avLst/>
@@ -3252,9 +3436,9 @@
               </a:spcAft>
             </a:pPr>
             <a:r>
-              <a:rPr sz="3400" b="1" i="0">
+              <a:rPr sz="3800" b="1" i="0">
                 <a:solidFill>
-                  <a:srgbClr val="262630"/>
+                  <a:srgbClr val="FFFFFF"/>
                 </a:solidFill>
                 <a:latin typeface="Yu Gothic"/>
                 <a:ea typeface="Yu Gothic"/>
@@ -3266,13 +3450,13 @@
           <a:p>
             <a:pPr algn="l">
               <a:spcAft>
-                <a:spcPts val="0"/>
+                <a:spcPts val="600"/>
               </a:spcAft>
             </a:pPr>
             <a:r>
-              <a:rPr sz="3400" b="1" i="0">
+              <a:rPr sz="3800" b="1" i="0">
                 <a:solidFill>
-                  <a:srgbClr val="7823DC"/>
+                  <a:srgbClr val="FFFFFF"/>
                 </a:solidFill>
                 <a:latin typeface="Yu Gothic"/>
                 <a:ea typeface="Yu Gothic"/>
@@ -3285,14 +3469,14 @@
       </p:sp>
       <p:sp>
         <p:nvSpPr>
-          <p:cNvPr id="6" name="TextBox 5"/>
+          <p:cNvPr id="10" name="TextBox 9"/>
           <p:cNvSpPr txBox="1"/>
           <p:nvPr/>
         </p:nvSpPr>
         <p:spPr>
           <a:xfrm>
-            <a:off x="822960" y="4892040"/>
-            <a:ext cx="10515600" cy="914400"/>
+            <a:off x="868680" y="5806440"/>
+            <a:ext cx="10424160" cy="822960"/>
           </a:xfrm>
           <a:prstGeom prst="rect">
             <a:avLst/>
@@ -3307,13 +3491,13 @@
           <a:p>
             <a:pPr algn="l">
               <a:spcAft>
-                <a:spcPts val="400"/>
+                <a:spcPts val="300"/>
               </a:spcAft>
             </a:pPr>
             <a:r>
-              <a:rPr sz="1300" b="1" i="0">
+              <a:rPr sz="1200" b="1" i="0">
                 <a:solidFill>
-                  <a:srgbClr val="262630"/>
+                  <a:srgbClr val="FFFFFF"/>
                 </a:solidFill>
                 <a:latin typeface="Yu Gothic"/>
                 <a:ea typeface="Yu Gothic"/>
@@ -3329,9 +3513,9 @@
               </a:spcAft>
             </a:pPr>
             <a:r>
-              <a:rPr sz="1200" b="0" i="0">
+              <a:rPr sz="1000" b="0" i="0">
                 <a:solidFill>
-                  <a:srgbClr val="5F5F6E"/>
+                  <a:srgbClr val="BFD4FE"/>
                 </a:solidFill>
                 <a:latin typeface="Yu Gothic"/>
                 <a:ea typeface="Yu Gothic"/>
@@ -3362,35 +3546,55 @@
       <p:grpSpPr/>
       <p:sp>
         <p:nvSpPr>
-          <p:cNvPr id="2" name="TextBox 1"/>
-          <p:cNvSpPr txBox="1"/>
-          <p:nvPr/>
-        </p:nvSpPr>
-        <p:spPr>
-          <a:xfrm>
-            <a:off x="502920" y="256032"/>
-            <a:ext cx="11155680" cy="256032"/>
-          </a:xfrm>
-          <a:prstGeom prst="rect">
-            <a:avLst/>
-          </a:prstGeom>
-          <a:noFill/>
-        </p:spPr>
-        <p:txBody>
-          <a:bodyPr wrap="square" lIns="0" rIns="0" tIns="0" bIns="0">
-            <a:spAutoFit/>
-          </a:bodyPr>
+          <p:cNvPr id="2" name="Rounded Rectangle 1"/>
+          <p:cNvSpPr/>
+          <p:nvPr/>
+        </p:nvSpPr>
+        <p:spPr>
+          <a:xfrm>
+            <a:off x="502920" y="274320"/>
+            <a:ext cx="1030986" cy="274320"/>
+          </a:xfrm>
+          <a:prstGeom prst="roundRect">
+            <a:avLst>
+              <a:gd name="adj" fmla="val 50000"/>
+            </a:avLst>
+          </a:prstGeom>
+          <a:solidFill>
+            <a:srgbClr val="EAF1FE"/>
+          </a:solidFill>
+          <a:ln>
+            <a:noFill/>
+          </a:ln>
+          <a:effectLst/>
+        </p:spPr>
+        <p:style>
+          <a:lnRef idx="1">
+            <a:schemeClr val="accent1"/>
+          </a:lnRef>
+          <a:fillRef idx="3">
+            <a:schemeClr val="accent1"/>
+          </a:fillRef>
+          <a:effectRef idx="2">
+            <a:schemeClr val="accent1"/>
+          </a:effectRef>
+          <a:fontRef idx="minor">
+            <a:schemeClr val="lt1"/>
+          </a:fontRef>
+        </p:style>
+        <p:txBody>
+          <a:bodyPr rtlCol="0" anchor="ctr" wrap="none" lIns="109728" rIns="109728" tIns="0" bIns="0"/>
           <a:lstStyle/>
           <a:p>
             <a:pPr algn="l">
               <a:spcAft>
-                <a:spcPts val="400"/>
+                <a:spcPts val="0"/>
               </a:spcAft>
             </a:pPr>
             <a:r>
-              <a:rPr sz="1000" b="1" i="0">
+              <a:rPr sz="900" b="1" i="0">
                 <a:solidFill>
-                  <a:srgbClr val="7823DC"/>
+                  <a:srgbClr val="2563EB"/>
                 </a:solidFill>
                 <a:latin typeface="Yu Gothic"/>
                 <a:ea typeface="Yu Gothic"/>
@@ -3409,8 +3613,8 @@
         </p:nvSpPr>
         <p:spPr>
           <a:xfrm>
-            <a:off x="502920" y="512064"/>
-            <a:ext cx="11155680" cy="868680"/>
+            <a:off x="502920" y="566928"/>
+            <a:ext cx="11155680" cy="804672"/>
           </a:xfrm>
           <a:prstGeom prst="rect">
             <a:avLst/>
@@ -3429,9 +3633,9 @@
               </a:spcAft>
             </a:pPr>
             <a:r>
-              <a:rPr sz="1900" b="1" i="0">
+              <a:rPr sz="1800" b="1" i="0">
                 <a:solidFill>
-                  <a:srgbClr val="262630"/>
+                  <a:srgbClr val="1B1B26"/>
                 </a:solidFill>
                 <a:latin typeface="Yu Gothic"/>
                 <a:ea typeface="Yu Gothic"/>
@@ -3450,14 +3654,14 @@
         </p:nvSpPr>
         <p:spPr>
           <a:xfrm>
-            <a:off x="502920" y="1389888"/>
-            <a:ext cx="1463040" cy="33020"/>
+            <a:off x="502920" y="1335024"/>
+            <a:ext cx="11183112" cy="11430"/>
           </a:xfrm>
           <a:prstGeom prst="rect">
             <a:avLst/>
           </a:prstGeom>
           <a:solidFill>
-            <a:srgbClr val="7823DC"/>
+            <a:srgbClr val="E5E7EB"/>
           </a:solidFill>
           <a:ln>
             <a:noFill/>
@@ -3505,7 +3709,7 @@
           </a:solidFill>
           <a:ln w="9525">
             <a:solidFill>
-              <a:srgbClr val="D9D9E0"/>
+              <a:srgbClr val="E5E7EB"/>
             </a:solidFill>
           </a:ln>
           <a:effectLst/>
@@ -3547,7 +3751,7 @@
             <a:avLst/>
           </a:prstGeom>
           <a:solidFill>
-            <a:srgbClr val="7823DC"/>
+            <a:srgbClr val="2563EB"/>
           </a:solidFill>
           <a:ln>
             <a:noFill/>
@@ -3591,7 +3795,7 @@
             <a:avLst/>
           </a:prstGeom>
           <a:solidFill>
-            <a:srgbClr val="7823DC"/>
+            <a:srgbClr val="2563EB"/>
           </a:solidFill>
           <a:ln>
             <a:noFill/>
@@ -3665,7 +3869,7 @@
             <a:r>
               <a:rPr sz="1450" b="1" i="0">
                 <a:solidFill>
-                  <a:srgbClr val="3A106E"/>
+                  <a:srgbClr val="1E40AF"/>
                 </a:solidFill>
                 <a:latin typeface="Yu Gothic"/>
                 <a:ea typeface="Yu Gothic"/>
@@ -3695,7 +3899,7 @@
           </a:solidFill>
           <a:ln w="9525">
             <a:solidFill>
-              <a:srgbClr val="D9D9E0"/>
+              <a:srgbClr val="E5E7EB"/>
             </a:solidFill>
           </a:ln>
           <a:effectLst/>
@@ -3737,7 +3941,7 @@
             <a:avLst/>
           </a:prstGeom>
           <a:solidFill>
-            <a:srgbClr val="7823DC"/>
+            <a:srgbClr val="2563EB"/>
           </a:solidFill>
           <a:ln>
             <a:noFill/>
@@ -3781,7 +3985,7 @@
             <a:avLst/>
           </a:prstGeom>
           <a:solidFill>
-            <a:srgbClr val="7823DC"/>
+            <a:srgbClr val="2563EB"/>
           </a:solidFill>
           <a:ln>
             <a:noFill/>
@@ -3855,7 +4059,7 @@
             <a:r>
               <a:rPr sz="1450" b="1" i="0">
                 <a:solidFill>
-                  <a:srgbClr val="3A106E"/>
+                  <a:srgbClr val="1E40AF"/>
                 </a:solidFill>
                 <a:latin typeface="Yu Gothic"/>
                 <a:ea typeface="Yu Gothic"/>
@@ -3873,7 +4077,7 @@
             <a:r>
               <a:rPr sz="1150" b="0" i="0">
                 <a:solidFill>
-                  <a:srgbClr val="262630"/>
+                  <a:srgbClr val="1B1B26"/>
                 </a:solidFill>
                 <a:latin typeface="Yu Gothic"/>
                 <a:ea typeface="Yu Gothic"/>
@@ -3903,7 +4107,7 @@
           </a:solidFill>
           <a:ln w="9525">
             <a:solidFill>
-              <a:srgbClr val="D9D9E0"/>
+              <a:srgbClr val="E5E7EB"/>
             </a:solidFill>
           </a:ln>
           <a:effectLst/>
@@ -3945,7 +4149,7 @@
             <a:avLst/>
           </a:prstGeom>
           <a:solidFill>
-            <a:srgbClr val="7823DC"/>
+            <a:srgbClr val="2563EB"/>
           </a:solidFill>
           <a:ln>
             <a:noFill/>
@@ -3989,7 +4193,7 @@
             <a:avLst/>
           </a:prstGeom>
           <a:solidFill>
-            <a:srgbClr val="7823DC"/>
+            <a:srgbClr val="2563EB"/>
           </a:solidFill>
           <a:ln>
             <a:noFill/>
@@ -4063,7 +4267,7 @@
             <a:r>
               <a:rPr sz="1450" b="1" i="0">
                 <a:solidFill>
-                  <a:srgbClr val="3A106E"/>
+                  <a:srgbClr val="1E40AF"/>
                 </a:solidFill>
                 <a:latin typeface="Yu Gothic"/>
                 <a:ea typeface="Yu Gothic"/>
@@ -4089,7 +4293,7 @@
             <a:avLst/>
           </a:prstGeom>
           <a:solidFill>
-            <a:srgbClr val="D9D9E0"/>
+            <a:srgbClr val="E5E7EB"/>
           </a:solidFill>
           <a:ln>
             <a:noFill/>
@@ -4148,7 +4352,7 @@
             <a:r>
               <a:rPr sz="750" b="0" i="0">
                 <a:solidFill>
-                  <a:srgbClr val="8A8A99"/>
+                  <a:srgbClr val="8A8F9C"/>
                 </a:solidFill>
                 <a:latin typeface="Yu Gothic"/>
                 <a:ea typeface="Yu Gothic"/>
@@ -4189,7 +4393,7 @@
             <a:r>
               <a:rPr sz="900" b="0" i="0">
                 <a:solidFill>
-                  <a:srgbClr val="5F5F6E"/>
+                  <a:srgbClr val="6B7280"/>
                 </a:solidFill>
                 <a:latin typeface="Yu Gothic"/>
                 <a:ea typeface="Yu Gothic"/>
@@ -4220,35 +4424,55 @@
       <p:grpSpPr/>
       <p:sp>
         <p:nvSpPr>
-          <p:cNvPr id="2" name="TextBox 1"/>
-          <p:cNvSpPr txBox="1"/>
-          <p:nvPr/>
-        </p:nvSpPr>
-        <p:spPr>
-          <a:xfrm>
-            <a:off x="502920" y="256032"/>
-            <a:ext cx="11155680" cy="256032"/>
-          </a:xfrm>
-          <a:prstGeom prst="rect">
-            <a:avLst/>
-          </a:prstGeom>
-          <a:noFill/>
-        </p:spPr>
-        <p:txBody>
-          <a:bodyPr wrap="square" lIns="0" rIns="0" tIns="0" bIns="0">
-            <a:spAutoFit/>
-          </a:bodyPr>
+          <p:cNvPr id="2" name="Rounded Rectangle 1"/>
+          <p:cNvSpPr/>
+          <p:nvPr/>
+        </p:nvSpPr>
+        <p:spPr>
+          <a:xfrm>
+            <a:off x="502920" y="274320"/>
+            <a:ext cx="2395727" cy="274320"/>
+          </a:xfrm>
+          <a:prstGeom prst="roundRect">
+            <a:avLst>
+              <a:gd name="adj" fmla="val 50000"/>
+            </a:avLst>
+          </a:prstGeom>
+          <a:solidFill>
+            <a:srgbClr val="EAF1FE"/>
+          </a:solidFill>
+          <a:ln>
+            <a:noFill/>
+          </a:ln>
+          <a:effectLst/>
+        </p:spPr>
+        <p:style>
+          <a:lnRef idx="1">
+            <a:schemeClr val="accent1"/>
+          </a:lnRef>
+          <a:fillRef idx="3">
+            <a:schemeClr val="accent1"/>
+          </a:fillRef>
+          <a:effectRef idx="2">
+            <a:schemeClr val="accent1"/>
+          </a:effectRef>
+          <a:fontRef idx="minor">
+            <a:schemeClr val="lt1"/>
+          </a:fontRef>
+        </p:style>
+        <p:txBody>
+          <a:bodyPr rtlCol="0" anchor="ctr" wrap="none" lIns="109728" rIns="109728" tIns="0" bIns="0"/>
           <a:lstStyle/>
           <a:p>
             <a:pPr algn="l">
               <a:spcAft>
-                <a:spcPts val="400"/>
+                <a:spcPts val="0"/>
               </a:spcAft>
             </a:pPr>
             <a:r>
-              <a:rPr sz="1000" b="1" i="0">
+              <a:rPr sz="900" b="1" i="0">
                 <a:solidFill>
-                  <a:srgbClr val="7823DC"/>
+                  <a:srgbClr val="2563EB"/>
                 </a:solidFill>
                 <a:latin typeface="Yu Gothic"/>
                 <a:ea typeface="Yu Gothic"/>
@@ -4267,8 +4491,8 @@
         </p:nvSpPr>
         <p:spPr>
           <a:xfrm>
-            <a:off x="502920" y="512064"/>
-            <a:ext cx="11155680" cy="868680"/>
+            <a:off x="502920" y="566928"/>
+            <a:ext cx="11155680" cy="804672"/>
           </a:xfrm>
           <a:prstGeom prst="rect">
             <a:avLst/>
@@ -4287,9 +4511,9 @@
               </a:spcAft>
             </a:pPr>
             <a:r>
-              <a:rPr sz="1900" b="1" i="0">
+              <a:rPr sz="1800" b="1" i="0">
                 <a:solidFill>
-                  <a:srgbClr val="262630"/>
+                  <a:srgbClr val="1B1B26"/>
                 </a:solidFill>
                 <a:latin typeface="Yu Gothic"/>
                 <a:ea typeface="Yu Gothic"/>
@@ -4308,14 +4532,14 @@
         </p:nvSpPr>
         <p:spPr>
           <a:xfrm>
-            <a:off x="502920" y="1389888"/>
-            <a:ext cx="1463040" cy="33020"/>
+            <a:off x="502920" y="1335024"/>
+            <a:ext cx="11183112" cy="11430"/>
           </a:xfrm>
           <a:prstGeom prst="rect">
             <a:avLst/>
           </a:prstGeom>
           <a:solidFill>
-            <a:srgbClr val="7823DC"/>
+            <a:srgbClr val="E5E7EB"/>
           </a:solidFill>
           <a:ln>
             <a:noFill/>
@@ -4363,7 +4587,7 @@
           </a:solidFill>
           <a:ln w="9525">
             <a:solidFill>
-              <a:srgbClr val="D9D9E0"/>
+              <a:srgbClr val="E5E7EB"/>
             </a:solidFill>
           </a:ln>
           <a:effectLst/>
@@ -4405,7 +4629,7 @@
             <a:avLst/>
           </a:prstGeom>
           <a:solidFill>
-            <a:srgbClr val="7823DC"/>
+            <a:srgbClr val="2563EB"/>
           </a:solidFill>
           <a:ln>
             <a:noFill/>
@@ -4449,7 +4673,7 @@
             <a:avLst/>
           </a:prstGeom>
           <a:solidFill>
-            <a:srgbClr val="7823DC"/>
+            <a:srgbClr val="2563EB"/>
           </a:solidFill>
           <a:ln>
             <a:noFill/>
@@ -4523,7 +4747,7 @@
             <a:r>
               <a:rPr sz="1400" b="1" i="0">
                 <a:solidFill>
-                  <a:srgbClr val="3A106E"/>
+                  <a:srgbClr val="1E40AF"/>
                 </a:solidFill>
                 <a:latin typeface="Yu Gothic"/>
                 <a:ea typeface="Yu Gothic"/>
@@ -4564,7 +4788,7 @@
             <a:r>
               <a:rPr sz="1050" b="0" i="0">
                 <a:solidFill>
-                  <a:srgbClr val="262630"/>
+                  <a:srgbClr val="1B1B26"/>
                 </a:solidFill>
                 <a:latin typeface="Yu Gothic"/>
                 <a:ea typeface="Yu Gothic"/>
@@ -4590,7 +4814,7 @@
             <a:avLst/>
           </a:prstGeom>
           <a:solidFill>
-            <a:srgbClr val="7823DC"/>
+            <a:srgbClr val="2563EB"/>
           </a:solidFill>
           <a:ln>
             <a:noFill/>
@@ -4667,7 +4891,7 @@
             <a:r>
               <a:rPr sz="2200" b="1" i="0">
                 <a:solidFill>
-                  <a:srgbClr val="7823DC"/>
+                  <a:srgbClr val="2563EB"/>
                 </a:solidFill>
                 <a:latin typeface="Yu Gothic"/>
                 <a:ea typeface="Yu Gothic"/>
@@ -4790,7 +5014,7 @@
             <a:r>
               <a:rPr sz="1050" b="1" i="0">
                 <a:solidFill>
-                  <a:srgbClr val="E0D2F6"/>
+                  <a:srgbClr val="BFD4FE"/>
                 </a:solidFill>
                 <a:latin typeface="Yu Gothic"/>
                 <a:ea typeface="Yu Gothic"/>
@@ -4820,7 +5044,7 @@
           </a:solidFill>
           <a:ln w="9525">
             <a:solidFill>
-              <a:srgbClr val="D9D9E0"/>
+              <a:srgbClr val="E5E7EB"/>
             </a:solidFill>
           </a:ln>
           <a:effectLst/>
@@ -4862,7 +5086,7 @@
             <a:avLst/>
           </a:prstGeom>
           <a:solidFill>
-            <a:srgbClr val="7823DC"/>
+            <a:srgbClr val="2563EB"/>
           </a:solidFill>
           <a:ln>
             <a:noFill/>
@@ -4906,7 +5130,7 @@
             <a:avLst/>
           </a:prstGeom>
           <a:solidFill>
-            <a:srgbClr val="7823DC"/>
+            <a:srgbClr val="2563EB"/>
           </a:solidFill>
           <a:ln>
             <a:noFill/>
@@ -4980,7 +5204,7 @@
             <a:r>
               <a:rPr sz="1400" b="1" i="0">
                 <a:solidFill>
-                  <a:srgbClr val="3A106E"/>
+                  <a:srgbClr val="1E40AF"/>
                 </a:solidFill>
                 <a:latin typeface="Yu Gothic"/>
                 <a:ea typeface="Yu Gothic"/>
@@ -5021,7 +5245,7 @@
             <a:r>
               <a:rPr sz="1050" b="0" i="0">
                 <a:solidFill>
-                  <a:srgbClr val="262630"/>
+                  <a:srgbClr val="1B1B26"/>
                 </a:solidFill>
                 <a:latin typeface="Yu Gothic"/>
                 <a:ea typeface="Yu Gothic"/>
@@ -5047,7 +5271,7 @@
             <a:avLst/>
           </a:prstGeom>
           <a:solidFill>
-            <a:srgbClr val="7823DC"/>
+            <a:srgbClr val="2563EB"/>
           </a:solidFill>
           <a:ln>
             <a:noFill/>
@@ -5091,7 +5315,7 @@
             <a:avLst/>
           </a:prstGeom>
           <a:solidFill>
-            <a:srgbClr val="7823DC"/>
+            <a:srgbClr val="2563EB"/>
           </a:solidFill>
           <a:ln>
             <a:noFill/>
@@ -5135,7 +5359,7 @@
             <a:avLst/>
           </a:prstGeom>
           <a:solidFill>
-            <a:srgbClr val="3A106E"/>
+            <a:srgbClr val="1E40AF"/>
           </a:solidFill>
           <a:ln>
             <a:noFill/>
@@ -5179,7 +5403,7 @@
             <a:avLst/>
           </a:prstGeom>
           <a:solidFill>
-            <a:srgbClr val="7823DC"/>
+            <a:srgbClr val="2563EB"/>
           </a:solidFill>
           <a:ln>
             <a:noFill/>
@@ -5238,7 +5462,7 @@
             <a:r>
               <a:rPr sz="1200" b="1" i="0">
                 <a:solidFill>
-                  <a:srgbClr val="E0D2F6"/>
+                  <a:srgbClr val="BFD4FE"/>
                 </a:solidFill>
                 <a:latin typeface="Yu Gothic"/>
                 <a:ea typeface="Yu Gothic"/>
@@ -5275,7 +5499,7 @@
             <a:avLst/>
           </a:prstGeom>
           <a:solidFill>
-            <a:srgbClr val="D9D9E0"/>
+            <a:srgbClr val="E5E7EB"/>
           </a:solidFill>
           <a:ln>
             <a:noFill/>
@@ -5334,7 +5558,7 @@
             <a:r>
               <a:rPr sz="750" b="0" i="0">
                 <a:solidFill>
-                  <a:srgbClr val="8A8A99"/>
+                  <a:srgbClr val="8A8F9C"/>
                 </a:solidFill>
                 <a:latin typeface="Yu Gothic"/>
                 <a:ea typeface="Yu Gothic"/>
@@ -5375,7 +5599,7 @@
             <a:r>
               <a:rPr sz="900" b="0" i="0">
                 <a:solidFill>
-                  <a:srgbClr val="5F5F6E"/>
+                  <a:srgbClr val="6B7280"/>
                 </a:solidFill>
                 <a:latin typeface="Yu Gothic"/>
                 <a:ea typeface="Yu Gothic"/>
@@ -5406,35 +5630,55 @@
       <p:grpSpPr/>
       <p:sp>
         <p:nvSpPr>
-          <p:cNvPr id="2" name="TextBox 1"/>
-          <p:cNvSpPr txBox="1"/>
-          <p:nvPr/>
-        </p:nvSpPr>
-        <p:spPr>
-          <a:xfrm>
-            <a:off x="502920" y="256032"/>
-            <a:ext cx="11155680" cy="256032"/>
-          </a:xfrm>
-          <a:prstGeom prst="rect">
-            <a:avLst/>
-          </a:prstGeom>
-          <a:noFill/>
-        </p:spPr>
-        <p:txBody>
-          <a:bodyPr wrap="square" lIns="0" rIns="0" tIns="0" bIns="0">
-            <a:spAutoFit/>
-          </a:bodyPr>
+          <p:cNvPr id="2" name="Rounded Rectangle 1"/>
+          <p:cNvSpPr/>
+          <p:nvPr/>
+        </p:nvSpPr>
+        <p:spPr>
+          <a:xfrm>
+            <a:off x="502920" y="274320"/>
+            <a:ext cx="2532887" cy="274320"/>
+          </a:xfrm>
+          <a:prstGeom prst="roundRect">
+            <a:avLst>
+              <a:gd name="adj" fmla="val 50000"/>
+            </a:avLst>
+          </a:prstGeom>
+          <a:solidFill>
+            <a:srgbClr val="EAF1FE"/>
+          </a:solidFill>
+          <a:ln>
+            <a:noFill/>
+          </a:ln>
+          <a:effectLst/>
+        </p:spPr>
+        <p:style>
+          <a:lnRef idx="1">
+            <a:schemeClr val="accent1"/>
+          </a:lnRef>
+          <a:fillRef idx="3">
+            <a:schemeClr val="accent1"/>
+          </a:fillRef>
+          <a:effectRef idx="2">
+            <a:schemeClr val="accent1"/>
+          </a:effectRef>
+          <a:fontRef idx="minor">
+            <a:schemeClr val="lt1"/>
+          </a:fontRef>
+        </p:style>
+        <p:txBody>
+          <a:bodyPr rtlCol="0" anchor="ctr" wrap="none" lIns="109728" rIns="109728" tIns="0" bIns="0"/>
           <a:lstStyle/>
           <a:p>
             <a:pPr algn="l">
               <a:spcAft>
-                <a:spcPts val="400"/>
+                <a:spcPts val="0"/>
               </a:spcAft>
             </a:pPr>
             <a:r>
-              <a:rPr sz="1000" b="1" i="0">
+              <a:rPr sz="900" b="1" i="0">
                 <a:solidFill>
-                  <a:srgbClr val="7823DC"/>
+                  <a:srgbClr val="2563EB"/>
                 </a:solidFill>
                 <a:latin typeface="Yu Gothic"/>
                 <a:ea typeface="Yu Gothic"/>
@@ -5453,8 +5697,8 @@
         </p:nvSpPr>
         <p:spPr>
           <a:xfrm>
-            <a:off x="502920" y="512064"/>
-            <a:ext cx="11155680" cy="868680"/>
+            <a:off x="502920" y="566928"/>
+            <a:ext cx="11155680" cy="804672"/>
           </a:xfrm>
           <a:prstGeom prst="rect">
             <a:avLst/>
@@ -5473,9 +5717,9 @@
               </a:spcAft>
             </a:pPr>
             <a:r>
-              <a:rPr sz="1900" b="1" i="0">
+              <a:rPr sz="1800" b="1" i="0">
                 <a:solidFill>
-                  <a:srgbClr val="262630"/>
+                  <a:srgbClr val="1B1B26"/>
                 </a:solidFill>
                 <a:latin typeface="Yu Gothic"/>
                 <a:ea typeface="Yu Gothic"/>
@@ -5494,14 +5738,14 @@
         </p:nvSpPr>
         <p:spPr>
           <a:xfrm>
-            <a:off x="502920" y="1389888"/>
-            <a:ext cx="1463040" cy="33020"/>
+            <a:off x="502920" y="1335024"/>
+            <a:ext cx="11183112" cy="11430"/>
           </a:xfrm>
           <a:prstGeom prst="rect">
             <a:avLst/>
           </a:prstGeom>
           <a:solidFill>
-            <a:srgbClr val="7823DC"/>
+            <a:srgbClr val="E5E7EB"/>
           </a:solidFill>
           <a:ln>
             <a:noFill/>
@@ -5545,9 +5789,7 @@
         <a:graphic>
           <a:graphicData uri="http://schemas.openxmlformats.org/drawingml/2006/table">
             <a:tbl>
-              <a:tblPr firstRow="1" bandRow="1">
-                <a:tableStyleId>{5C22544A-7EE6-4342-B048-85BDC9FD1C3A}</a:tableStyleId>
-              </a:tblPr>
+              <a:tblPr firstRow="0" bandRow="0"/>
               <a:tblGrid>
                 <a:gridCol w="2454829"/>
                 <a:gridCol w="1454713"/>
@@ -5568,7 +5810,7 @@
                       <a:r>
                         <a:rPr sz="1050" b="1" i="0">
                           <a:solidFill>
-                            <a:srgbClr val="FFFFFF"/>
+                            <a:srgbClr val="1B1B26"/>
                           </a:solidFill>
                           <a:latin typeface="Yu Gothic"/>
                           <a:ea typeface="Yu Gothic"/>
@@ -5578,10 +5820,20 @@
                       </a:r>
                     </a:p>
                   </a:txBody>
-                  <a:tcPr marL="54864" marR="54864" marT="18288" marB="18288" anchor="ctr">
+                  <a:tcPr marL="73152" marR="54864" marT="18288" marB="18288" anchor="ctr">
                     <a:solidFill>
-                      <a:srgbClr val="3A106E"/>
+                      <a:srgbClr val="EAF1FE"/>
                     </a:solidFill>
+                    <a:lnB w="15240" cap="flat">
+                      <a:solidFill>
+                        <a:srgbClr val="2563EB"/>
+                      </a:solidFill>
+                    </a:lnB>
+                    <a:lnT w="15240" cap="flat">
+                      <a:solidFill>
+                        <a:srgbClr val="2563EB"/>
+                      </a:solidFill>
+                    </a:lnT>
                   </a:tcPr>
                 </a:tc>
                 <a:tc>
@@ -5597,7 +5849,7 @@
                       <a:r>
                         <a:rPr sz="1050" b="1" i="0">
                           <a:solidFill>
-                            <a:srgbClr val="FFFFFF"/>
+                            <a:srgbClr val="1B1B26"/>
                           </a:solidFill>
                           <a:latin typeface="Yu Gothic"/>
                           <a:ea typeface="Yu Gothic"/>
@@ -5607,10 +5859,20 @@
                       </a:r>
                     </a:p>
                   </a:txBody>
-                  <a:tcPr marL="54864" marR="54864" marT="18288" marB="18288" anchor="ctr">
+                  <a:tcPr marL="73152" marR="54864" marT="18288" marB="18288" anchor="ctr">
                     <a:solidFill>
-                      <a:srgbClr val="3A106E"/>
+                      <a:srgbClr val="EAF1FE"/>
                     </a:solidFill>
+                    <a:lnB w="15240" cap="flat">
+                      <a:solidFill>
+                        <a:srgbClr val="2563EB"/>
+                      </a:solidFill>
+                    </a:lnB>
+                    <a:lnT w="15240" cap="flat">
+                      <a:solidFill>
+                        <a:srgbClr val="2563EB"/>
+                      </a:solidFill>
+                    </a:lnT>
                   </a:tcPr>
                 </a:tc>
                 <a:tc>
@@ -5626,7 +5888,7 @@
                       <a:r>
                         <a:rPr sz="1050" b="1" i="0">
                           <a:solidFill>
-                            <a:srgbClr val="FFFFFF"/>
+                            <a:srgbClr val="1B1B26"/>
                           </a:solidFill>
                           <a:latin typeface="Yu Gothic"/>
                           <a:ea typeface="Yu Gothic"/>
@@ -5636,10 +5898,20 @@
                       </a:r>
                     </a:p>
                   </a:txBody>
-                  <a:tcPr marL="54864" marR="54864" marT="18288" marB="18288" anchor="ctr">
+                  <a:tcPr marL="73152" marR="54864" marT="18288" marB="18288" anchor="ctr">
                     <a:solidFill>
-                      <a:srgbClr val="3A106E"/>
+                      <a:srgbClr val="EAF1FE"/>
                     </a:solidFill>
+                    <a:lnB w="15240" cap="flat">
+                      <a:solidFill>
+                        <a:srgbClr val="2563EB"/>
+                      </a:solidFill>
+                    </a:lnB>
+                    <a:lnT w="15240" cap="flat">
+                      <a:solidFill>
+                        <a:srgbClr val="2563EB"/>
+                      </a:solidFill>
+                    </a:lnT>
                   </a:tcPr>
                 </a:tc>
                 <a:tc>
@@ -5655,7 +5927,7 @@
                       <a:r>
                         <a:rPr sz="1050" b="1" i="0">
                           <a:solidFill>
-                            <a:srgbClr val="FFFFFF"/>
+                            <a:srgbClr val="1B1B26"/>
                           </a:solidFill>
                           <a:latin typeface="Yu Gothic"/>
                           <a:ea typeface="Yu Gothic"/>
@@ -5665,10 +5937,20 @@
                       </a:r>
                     </a:p>
                   </a:txBody>
-                  <a:tcPr marL="54864" marR="54864" marT="18288" marB="18288" anchor="ctr">
+                  <a:tcPr marL="73152" marR="54864" marT="18288" marB="18288" anchor="ctr">
                     <a:solidFill>
-                      <a:srgbClr val="3A106E"/>
+                      <a:srgbClr val="EAF1FE"/>
                     </a:solidFill>
+                    <a:lnB w="15240" cap="flat">
+                      <a:solidFill>
+                        <a:srgbClr val="2563EB"/>
+                      </a:solidFill>
+                    </a:lnB>
+                    <a:lnT w="15240" cap="flat">
+                      <a:solidFill>
+                        <a:srgbClr val="2563EB"/>
+                      </a:solidFill>
+                    </a:lnT>
                   </a:tcPr>
                 </a:tc>
               </a:tr>
@@ -5686,7 +5968,7 @@
                       <a:r>
                         <a:rPr sz="1000" b="1" i="0">
                           <a:solidFill>
-                            <a:srgbClr val="3A106E"/>
+                            <a:srgbClr val="2563EB"/>
                           </a:solidFill>
                           <a:latin typeface="Yu Gothic"/>
                           <a:ea typeface="Yu Gothic"/>
@@ -5696,10 +5978,15 @@
                       </a:r>
                     </a:p>
                   </a:txBody>
-                  <a:tcPr marL="54864" marR="54864" marT="18288" marB="18288" anchor="ctr">
+                  <a:tcPr marL="73152" marR="54864" marT="18288" marB="18288" anchor="ctr">
                     <a:solidFill>
                       <a:srgbClr val="FFFFFF"/>
                     </a:solidFill>
+                    <a:lnB w="9525" cap="flat">
+                      <a:solidFill>
+                        <a:srgbClr val="E5E7EB"/>
+                      </a:solidFill>
+                    </a:lnB>
                   </a:tcPr>
                 </a:tc>
                 <a:tc>
@@ -5715,7 +6002,7 @@
                       <a:r>
                         <a:rPr sz="1000" b="0" i="0">
                           <a:solidFill>
-                            <a:srgbClr val="262630"/>
+                            <a:srgbClr val="1B1B26"/>
                           </a:solidFill>
                           <a:latin typeface="Yu Gothic"/>
                           <a:ea typeface="Yu Gothic"/>
@@ -5725,10 +6012,15 @@
                       </a:r>
                     </a:p>
                   </a:txBody>
-                  <a:tcPr marL="54864" marR="54864" marT="18288" marB="18288" anchor="ctr">
+                  <a:tcPr marL="73152" marR="54864" marT="18288" marB="18288" anchor="ctr">
                     <a:solidFill>
                       <a:srgbClr val="FFFFFF"/>
                     </a:solidFill>
+                    <a:lnB w="9525" cap="flat">
+                      <a:solidFill>
+                        <a:srgbClr val="E5E7EB"/>
+                      </a:solidFill>
+                    </a:lnB>
                   </a:tcPr>
                 </a:tc>
                 <a:tc>
@@ -5744,7 +6036,7 @@
                       <a:r>
                         <a:rPr sz="1000" b="0" i="0">
                           <a:solidFill>
-                            <a:srgbClr val="262630"/>
+                            <a:srgbClr val="1B1B26"/>
                           </a:solidFill>
                           <a:latin typeface="Yu Gothic"/>
                           <a:ea typeface="Yu Gothic"/>
@@ -5754,10 +6046,15 @@
                       </a:r>
                     </a:p>
                   </a:txBody>
-                  <a:tcPr marL="54864" marR="54864" marT="18288" marB="18288" anchor="ctr">
+                  <a:tcPr marL="73152" marR="54864" marT="18288" marB="18288" anchor="ctr">
                     <a:solidFill>
                       <a:srgbClr val="FFFFFF"/>
                     </a:solidFill>
+                    <a:lnB w="9525" cap="flat">
+                      <a:solidFill>
+                        <a:srgbClr val="E5E7EB"/>
+                      </a:solidFill>
+                    </a:lnB>
                   </a:tcPr>
                 </a:tc>
                 <a:tc>
@@ -5773,7 +6070,7 @@
                       <a:r>
                         <a:rPr sz="1000" b="0" i="0">
                           <a:solidFill>
-                            <a:srgbClr val="262630"/>
+                            <a:srgbClr val="1B1B26"/>
                           </a:solidFill>
                           <a:latin typeface="Yu Gothic"/>
                           <a:ea typeface="Yu Gothic"/>
@@ -5783,10 +6080,15 @@
                       </a:r>
                     </a:p>
                   </a:txBody>
-                  <a:tcPr marL="54864" marR="54864" marT="18288" marB="18288" anchor="ctr">
+                  <a:tcPr marL="73152" marR="54864" marT="18288" marB="18288" anchor="ctr">
                     <a:solidFill>
                       <a:srgbClr val="FFFFFF"/>
                     </a:solidFill>
+                    <a:lnB w="9525" cap="flat">
+                      <a:solidFill>
+                        <a:srgbClr val="E5E7EB"/>
+                      </a:solidFill>
+                    </a:lnB>
                   </a:tcPr>
                 </a:tc>
               </a:tr>
@@ -5804,7 +6106,7 @@
                       <a:r>
                         <a:rPr sz="1000" b="1" i="0">
                           <a:solidFill>
-                            <a:srgbClr val="3A106E"/>
+                            <a:srgbClr val="2563EB"/>
                           </a:solidFill>
                           <a:latin typeface="Yu Gothic"/>
                           <a:ea typeface="Yu Gothic"/>
@@ -5814,10 +6116,15 @@
                       </a:r>
                     </a:p>
                   </a:txBody>
-                  <a:tcPr marL="54864" marR="54864" marT="18288" marB="18288" anchor="ctr">
+                  <a:tcPr marL="73152" marR="54864" marT="18288" marB="18288" anchor="ctr">
                     <a:solidFill>
-                      <a:srgbClr val="F7F7F9"/>
+                      <a:srgbClr val="FFFFFF"/>
                     </a:solidFill>
+                    <a:lnB w="9525" cap="flat">
+                      <a:solidFill>
+                        <a:srgbClr val="E5E7EB"/>
+                      </a:solidFill>
+                    </a:lnB>
                   </a:tcPr>
                 </a:tc>
                 <a:tc>
@@ -5833,7 +6140,7 @@
                       <a:r>
                         <a:rPr sz="1000" b="0" i="0">
                           <a:solidFill>
-                            <a:srgbClr val="262630"/>
+                            <a:srgbClr val="1B1B26"/>
                           </a:solidFill>
                           <a:latin typeface="Yu Gothic"/>
                           <a:ea typeface="Yu Gothic"/>
@@ -5843,10 +6150,15 @@
                       </a:r>
                     </a:p>
                   </a:txBody>
-                  <a:tcPr marL="54864" marR="54864" marT="18288" marB="18288" anchor="ctr">
+                  <a:tcPr marL="73152" marR="54864" marT="18288" marB="18288" anchor="ctr">
                     <a:solidFill>
-                      <a:srgbClr val="F7F7F9"/>
+                      <a:srgbClr val="FFFFFF"/>
                     </a:solidFill>
+                    <a:lnB w="9525" cap="flat">
+                      <a:solidFill>
+                        <a:srgbClr val="E5E7EB"/>
+                      </a:solidFill>
+                    </a:lnB>
                   </a:tcPr>
                 </a:tc>
                 <a:tc>
@@ -5862,7 +6174,7 @@
                       <a:r>
                         <a:rPr sz="1000" b="0" i="0">
                           <a:solidFill>
-                            <a:srgbClr val="262630"/>
+                            <a:srgbClr val="1B1B26"/>
                           </a:solidFill>
                           <a:latin typeface="Yu Gothic"/>
                           <a:ea typeface="Yu Gothic"/>
@@ -5872,10 +6184,15 @@
                       </a:r>
                     </a:p>
                   </a:txBody>
-                  <a:tcPr marL="54864" marR="54864" marT="18288" marB="18288" anchor="ctr">
+                  <a:tcPr marL="73152" marR="54864" marT="18288" marB="18288" anchor="ctr">
                     <a:solidFill>
-                      <a:srgbClr val="F7F7F9"/>
+                      <a:srgbClr val="FFFFFF"/>
                     </a:solidFill>
+                    <a:lnB w="9525" cap="flat">
+                      <a:solidFill>
+                        <a:srgbClr val="E5E7EB"/>
+                      </a:solidFill>
+                    </a:lnB>
                   </a:tcPr>
                 </a:tc>
                 <a:tc>
@@ -5891,7 +6208,7 @@
                       <a:r>
                         <a:rPr sz="1000" b="0" i="0">
                           <a:solidFill>
-                            <a:srgbClr val="262630"/>
+                            <a:srgbClr val="1B1B26"/>
                           </a:solidFill>
                           <a:latin typeface="Yu Gothic"/>
                           <a:ea typeface="Yu Gothic"/>
@@ -5901,10 +6218,15 @@
                       </a:r>
                     </a:p>
                   </a:txBody>
-                  <a:tcPr marL="54864" marR="54864" marT="18288" marB="18288" anchor="ctr">
+                  <a:tcPr marL="73152" marR="54864" marT="18288" marB="18288" anchor="ctr">
                     <a:solidFill>
-                      <a:srgbClr val="F7F7F9"/>
+                      <a:srgbClr val="FFFFFF"/>
                     </a:solidFill>
+                    <a:lnB w="9525" cap="flat">
+                      <a:solidFill>
+                        <a:srgbClr val="E5E7EB"/>
+                      </a:solidFill>
+                    </a:lnB>
                   </a:tcPr>
                 </a:tc>
               </a:tr>
@@ -5922,7 +6244,7 @@
                       <a:r>
                         <a:rPr sz="1000" b="1" i="0">
                           <a:solidFill>
-                            <a:srgbClr val="3A106E"/>
+                            <a:srgbClr val="2563EB"/>
                           </a:solidFill>
                           <a:latin typeface="Yu Gothic"/>
                           <a:ea typeface="Yu Gothic"/>
@@ -5932,10 +6254,15 @@
                       </a:r>
                     </a:p>
                   </a:txBody>
-                  <a:tcPr marL="54864" marR="54864" marT="18288" marB="18288" anchor="ctr">
+                  <a:tcPr marL="73152" marR="54864" marT="18288" marB="18288" anchor="ctr">
                     <a:solidFill>
                       <a:srgbClr val="FFFFFF"/>
                     </a:solidFill>
+                    <a:lnB w="9525" cap="flat">
+                      <a:solidFill>
+                        <a:srgbClr val="E5E7EB"/>
+                      </a:solidFill>
+                    </a:lnB>
                   </a:tcPr>
                 </a:tc>
                 <a:tc>
@@ -5951,7 +6278,7 @@
                       <a:r>
                         <a:rPr sz="1000" b="0" i="0">
                           <a:solidFill>
-                            <a:srgbClr val="262630"/>
+                            <a:srgbClr val="1B1B26"/>
                           </a:solidFill>
                           <a:latin typeface="Yu Gothic"/>
                           <a:ea typeface="Yu Gothic"/>
@@ -5961,10 +6288,15 @@
                       </a:r>
                     </a:p>
                   </a:txBody>
-                  <a:tcPr marL="54864" marR="54864" marT="18288" marB="18288" anchor="ctr">
+                  <a:tcPr marL="73152" marR="54864" marT="18288" marB="18288" anchor="ctr">
                     <a:solidFill>
                       <a:srgbClr val="FFFFFF"/>
                     </a:solidFill>
+                    <a:lnB w="9525" cap="flat">
+                      <a:solidFill>
+                        <a:srgbClr val="E5E7EB"/>
+                      </a:solidFill>
+                    </a:lnB>
                   </a:tcPr>
                 </a:tc>
                 <a:tc>
@@ -5980,7 +6312,7 @@
                       <a:r>
                         <a:rPr sz="1000" b="0" i="0">
                           <a:solidFill>
-                            <a:srgbClr val="262630"/>
+                            <a:srgbClr val="1B1B26"/>
                           </a:solidFill>
                           <a:latin typeface="Yu Gothic"/>
                           <a:ea typeface="Yu Gothic"/>
@@ -5990,10 +6322,15 @@
                       </a:r>
                     </a:p>
                   </a:txBody>
-                  <a:tcPr marL="54864" marR="54864" marT="18288" marB="18288" anchor="ctr">
+                  <a:tcPr marL="73152" marR="54864" marT="18288" marB="18288" anchor="ctr">
                     <a:solidFill>
                       <a:srgbClr val="FFFFFF"/>
                     </a:solidFill>
+                    <a:lnB w="9525" cap="flat">
+                      <a:solidFill>
+                        <a:srgbClr val="E5E7EB"/>
+                      </a:solidFill>
+                    </a:lnB>
                   </a:tcPr>
                 </a:tc>
                 <a:tc>
@@ -6009,7 +6346,7 @@
                       <a:r>
                         <a:rPr sz="1000" b="0" i="0">
                           <a:solidFill>
-                            <a:srgbClr val="262630"/>
+                            <a:srgbClr val="1B1B26"/>
                           </a:solidFill>
                           <a:latin typeface="Yu Gothic"/>
                           <a:ea typeface="Yu Gothic"/>
@@ -6019,10 +6356,15 @@
                       </a:r>
                     </a:p>
                   </a:txBody>
-                  <a:tcPr marL="54864" marR="54864" marT="18288" marB="18288" anchor="ctr">
+                  <a:tcPr marL="73152" marR="54864" marT="18288" marB="18288" anchor="ctr">
                     <a:solidFill>
                       <a:srgbClr val="FFFFFF"/>
                     </a:solidFill>
+                    <a:lnB w="9525" cap="flat">
+                      <a:solidFill>
+                        <a:srgbClr val="E5E7EB"/>
+                      </a:solidFill>
+                    </a:lnB>
                   </a:tcPr>
                 </a:tc>
               </a:tr>
@@ -6040,7 +6382,7 @@
                       <a:r>
                         <a:rPr sz="1000" b="1" i="0">
                           <a:solidFill>
-                            <a:srgbClr val="3A106E"/>
+                            <a:srgbClr val="2563EB"/>
                           </a:solidFill>
                           <a:latin typeface="Yu Gothic"/>
                           <a:ea typeface="Yu Gothic"/>
@@ -6050,10 +6392,15 @@
                       </a:r>
                     </a:p>
                   </a:txBody>
-                  <a:tcPr marL="54864" marR="54864" marT="18288" marB="18288" anchor="ctr">
+                  <a:tcPr marL="73152" marR="54864" marT="18288" marB="18288" anchor="ctr">
                     <a:solidFill>
-                      <a:srgbClr val="F7F7F9"/>
+                      <a:srgbClr val="FFFFFF"/>
                     </a:solidFill>
+                    <a:lnB w="9525" cap="flat">
+                      <a:solidFill>
+                        <a:srgbClr val="E5E7EB"/>
+                      </a:solidFill>
+                    </a:lnB>
                   </a:tcPr>
                 </a:tc>
                 <a:tc>
@@ -6069,7 +6416,7 @@
                       <a:r>
                         <a:rPr sz="1000" b="0" i="0">
                           <a:solidFill>
-                            <a:srgbClr val="262630"/>
+                            <a:srgbClr val="1B1B26"/>
                           </a:solidFill>
                           <a:latin typeface="Yu Gothic"/>
                           <a:ea typeface="Yu Gothic"/>
@@ -6079,10 +6426,15 @@
                       </a:r>
                     </a:p>
                   </a:txBody>
-                  <a:tcPr marL="54864" marR="54864" marT="18288" marB="18288" anchor="ctr">
+                  <a:tcPr marL="73152" marR="54864" marT="18288" marB="18288" anchor="ctr">
                     <a:solidFill>
-                      <a:srgbClr val="F7F7F9"/>
+                      <a:srgbClr val="FFFFFF"/>
                     </a:solidFill>
+                    <a:lnB w="9525" cap="flat">
+                      <a:solidFill>
+                        <a:srgbClr val="E5E7EB"/>
+                      </a:solidFill>
+                    </a:lnB>
                   </a:tcPr>
                 </a:tc>
                 <a:tc>
@@ -6098,7 +6450,7 @@
                       <a:r>
                         <a:rPr sz="1000" b="0" i="0">
                           <a:solidFill>
-                            <a:srgbClr val="262630"/>
+                            <a:srgbClr val="1B1B26"/>
                           </a:solidFill>
                           <a:latin typeface="Yu Gothic"/>
                           <a:ea typeface="Yu Gothic"/>
@@ -6108,10 +6460,15 @@
                       </a:r>
                     </a:p>
                   </a:txBody>
-                  <a:tcPr marL="54864" marR="54864" marT="18288" marB="18288" anchor="ctr">
+                  <a:tcPr marL="73152" marR="54864" marT="18288" marB="18288" anchor="ctr">
                     <a:solidFill>
-                      <a:srgbClr val="F7F7F9"/>
+                      <a:srgbClr val="FFFFFF"/>
                     </a:solidFill>
+                    <a:lnB w="9525" cap="flat">
+                      <a:solidFill>
+                        <a:srgbClr val="E5E7EB"/>
+                      </a:solidFill>
+                    </a:lnB>
                   </a:tcPr>
                 </a:tc>
                 <a:tc>
@@ -6127,7 +6484,7 @@
                       <a:r>
                         <a:rPr sz="1000" b="0" i="0">
                           <a:solidFill>
-                            <a:srgbClr val="262630"/>
+                            <a:srgbClr val="1B1B26"/>
                           </a:solidFill>
                           <a:latin typeface="Yu Gothic"/>
                           <a:ea typeface="Yu Gothic"/>
@@ -6137,10 +6494,15 @@
                       </a:r>
                     </a:p>
                   </a:txBody>
-                  <a:tcPr marL="54864" marR="54864" marT="18288" marB="18288" anchor="ctr">
+                  <a:tcPr marL="73152" marR="54864" marT="18288" marB="18288" anchor="ctr">
                     <a:solidFill>
-                      <a:srgbClr val="F7F7F9"/>
+                      <a:srgbClr val="FFFFFF"/>
                     </a:solidFill>
+                    <a:lnB w="9525" cap="flat">
+                      <a:solidFill>
+                        <a:srgbClr val="E5E7EB"/>
+                      </a:solidFill>
+                    </a:lnB>
                   </a:tcPr>
                 </a:tc>
               </a:tr>
@@ -6158,7 +6520,7 @@
                       <a:r>
                         <a:rPr sz="1000" b="1" i="0">
                           <a:solidFill>
-                            <a:srgbClr val="3A106E"/>
+                            <a:srgbClr val="1E40AF"/>
                           </a:solidFill>
                           <a:latin typeface="Yu Gothic"/>
                           <a:ea typeface="Yu Gothic"/>
@@ -6168,10 +6530,15 @@
                       </a:r>
                     </a:p>
                   </a:txBody>
-                  <a:tcPr marL="54864" marR="54864" marT="18288" marB="18288" anchor="ctr">
+                  <a:tcPr marL="73152" marR="54864" marT="18288" marB="18288" anchor="ctr">
                     <a:solidFill>
-                      <a:srgbClr val="F3EFFB"/>
+                      <a:srgbClr val="EAF1FE"/>
                     </a:solidFill>
+                    <a:lnB w="9525" cap="flat">
+                      <a:solidFill>
+                        <a:srgbClr val="E5E7EB"/>
+                      </a:solidFill>
+                    </a:lnB>
                   </a:tcPr>
                 </a:tc>
                 <a:tc>
@@ -6187,7 +6554,7 @@
                       <a:r>
                         <a:rPr sz="1000" b="1" i="0">
                           <a:solidFill>
-                            <a:srgbClr val="3A106E"/>
+                            <a:srgbClr val="1E40AF"/>
                           </a:solidFill>
                           <a:latin typeface="Yu Gothic"/>
                           <a:ea typeface="Yu Gothic"/>
@@ -6197,10 +6564,15 @@
                       </a:r>
                     </a:p>
                   </a:txBody>
-                  <a:tcPr marL="54864" marR="54864" marT="18288" marB="18288" anchor="ctr">
+                  <a:tcPr marL="73152" marR="54864" marT="18288" marB="18288" anchor="ctr">
                     <a:solidFill>
-                      <a:srgbClr val="F3EFFB"/>
+                      <a:srgbClr val="EAF1FE"/>
                     </a:solidFill>
+                    <a:lnB w="9525" cap="flat">
+                      <a:solidFill>
+                        <a:srgbClr val="E5E7EB"/>
+                      </a:solidFill>
+                    </a:lnB>
                   </a:tcPr>
                 </a:tc>
                 <a:tc>
@@ -6216,7 +6588,7 @@
                       <a:r>
                         <a:rPr sz="1000" b="1" i="0">
                           <a:solidFill>
-                            <a:srgbClr val="3A106E"/>
+                            <a:srgbClr val="1E40AF"/>
                           </a:solidFill>
                           <a:latin typeface="Yu Gothic"/>
                           <a:ea typeface="Yu Gothic"/>
@@ -6226,10 +6598,15 @@
                       </a:r>
                     </a:p>
                   </a:txBody>
-                  <a:tcPr marL="54864" marR="54864" marT="18288" marB="18288" anchor="ctr">
+                  <a:tcPr marL="73152" marR="54864" marT="18288" marB="18288" anchor="ctr">
                     <a:solidFill>
-                      <a:srgbClr val="F3EFFB"/>
+                      <a:srgbClr val="EAF1FE"/>
                     </a:solidFill>
+                    <a:lnB w="9525" cap="flat">
+                      <a:solidFill>
+                        <a:srgbClr val="E5E7EB"/>
+                      </a:solidFill>
+                    </a:lnB>
                   </a:tcPr>
                 </a:tc>
                 <a:tc>
@@ -6245,7 +6622,7 @@
                       <a:r>
                         <a:rPr sz="1000" b="1" i="0">
                           <a:solidFill>
-                            <a:srgbClr val="3A106E"/>
+                            <a:srgbClr val="1E40AF"/>
                           </a:solidFill>
                           <a:latin typeface="Yu Gothic"/>
                           <a:ea typeface="Yu Gothic"/>
@@ -6255,10 +6632,15 @@
                       </a:r>
                     </a:p>
                   </a:txBody>
-                  <a:tcPr marL="54864" marR="54864" marT="18288" marB="18288" anchor="ctr">
+                  <a:tcPr marL="73152" marR="54864" marT="18288" marB="18288" anchor="ctr">
                     <a:solidFill>
-                      <a:srgbClr val="F3EFFB"/>
+                      <a:srgbClr val="EAF1FE"/>
                     </a:solidFill>
+                    <a:lnB w="9525" cap="flat">
+                      <a:solidFill>
+                        <a:srgbClr val="E5E7EB"/>
+                      </a:solidFill>
+                    </a:lnB>
                   </a:tcPr>
                 </a:tc>
               </a:tr>
@@ -6281,7 +6663,7 @@
             <a:avLst/>
           </a:prstGeom>
           <a:solidFill>
-            <a:srgbClr val="F3EFFB"/>
+            <a:srgbClr val="EAF1FE"/>
           </a:solidFill>
           <a:ln>
             <a:noFill/>
@@ -6325,7 +6707,7 @@
             <a:avLst/>
           </a:prstGeom>
           <a:solidFill>
-            <a:srgbClr val="7823DC"/>
+            <a:srgbClr val="2563EB"/>
           </a:solidFill>
           <a:ln>
             <a:noFill/>
@@ -6384,7 +6766,7 @@
             <a:r>
               <a:rPr sz="1050" b="1" i="0">
                 <a:solidFill>
-                  <a:srgbClr val="3A106E"/>
+                  <a:srgbClr val="1E40AF"/>
                 </a:solidFill>
                 <a:latin typeface="Yu Gothic"/>
                 <a:ea typeface="Yu Gothic"/>
@@ -6410,7 +6792,7 @@
             <a:avLst/>
           </a:prstGeom>
           <a:solidFill>
-            <a:srgbClr val="D9D9E0"/>
+            <a:srgbClr val="E5E7EB"/>
           </a:solidFill>
           <a:ln>
             <a:noFill/>
@@ -6469,7 +6851,7 @@
             <a:r>
               <a:rPr sz="750" b="0" i="0">
                 <a:solidFill>
-                  <a:srgbClr val="8A8A99"/>
+                  <a:srgbClr val="8A8F9C"/>
                 </a:solidFill>
                 <a:latin typeface="Yu Gothic"/>
                 <a:ea typeface="Yu Gothic"/>
@@ -6510,7 +6892,7 @@
             <a:r>
               <a:rPr sz="900" b="0" i="0">
                 <a:solidFill>
-                  <a:srgbClr val="5F5F6E"/>
+                  <a:srgbClr val="6B7280"/>
                 </a:solidFill>
                 <a:latin typeface="Yu Gothic"/>
                 <a:ea typeface="Yu Gothic"/>
@@ -6541,35 +6923,55 @@
       <p:grpSpPr/>
       <p:sp>
         <p:nvSpPr>
-          <p:cNvPr id="2" name="TextBox 1"/>
-          <p:cNvSpPr txBox="1"/>
-          <p:nvPr/>
-        </p:nvSpPr>
-        <p:spPr>
-          <a:xfrm>
-            <a:off x="502920" y="256032"/>
-            <a:ext cx="11155680" cy="256032"/>
-          </a:xfrm>
-          <a:prstGeom prst="rect">
-            <a:avLst/>
-          </a:prstGeom>
-          <a:noFill/>
-        </p:spPr>
-        <p:txBody>
-          <a:bodyPr wrap="square" lIns="0" rIns="0" tIns="0" bIns="0">
-            <a:spAutoFit/>
-          </a:bodyPr>
+          <p:cNvPr id="2" name="Rounded Rectangle 1"/>
+          <p:cNvSpPr/>
+          <p:nvPr/>
+        </p:nvSpPr>
+        <p:spPr>
+          <a:xfrm>
+            <a:off x="502920" y="274320"/>
+            <a:ext cx="2135123" cy="274320"/>
+          </a:xfrm>
+          <a:prstGeom prst="roundRect">
+            <a:avLst>
+              <a:gd name="adj" fmla="val 50000"/>
+            </a:avLst>
+          </a:prstGeom>
+          <a:solidFill>
+            <a:srgbClr val="EAF1FE"/>
+          </a:solidFill>
+          <a:ln>
+            <a:noFill/>
+          </a:ln>
+          <a:effectLst/>
+        </p:spPr>
+        <p:style>
+          <a:lnRef idx="1">
+            <a:schemeClr val="accent1"/>
+          </a:lnRef>
+          <a:fillRef idx="3">
+            <a:schemeClr val="accent1"/>
+          </a:fillRef>
+          <a:effectRef idx="2">
+            <a:schemeClr val="accent1"/>
+          </a:effectRef>
+          <a:fontRef idx="minor">
+            <a:schemeClr val="lt1"/>
+          </a:fontRef>
+        </p:style>
+        <p:txBody>
+          <a:bodyPr rtlCol="0" anchor="ctr" wrap="none" lIns="109728" rIns="109728" tIns="0" bIns="0"/>
           <a:lstStyle/>
           <a:p>
             <a:pPr algn="l">
               <a:spcAft>
-                <a:spcPts val="400"/>
+                <a:spcPts val="0"/>
               </a:spcAft>
             </a:pPr>
             <a:r>
-              <a:rPr sz="1000" b="1" i="0">
+              <a:rPr sz="900" b="1" i="0">
                 <a:solidFill>
-                  <a:srgbClr val="7823DC"/>
+                  <a:srgbClr val="2563EB"/>
                 </a:solidFill>
                 <a:latin typeface="Yu Gothic"/>
                 <a:ea typeface="Yu Gothic"/>
@@ -6588,8 +6990,8 @@
         </p:nvSpPr>
         <p:spPr>
           <a:xfrm>
-            <a:off x="502920" y="512064"/>
-            <a:ext cx="11155680" cy="868680"/>
+            <a:off x="502920" y="566928"/>
+            <a:ext cx="11155680" cy="804672"/>
           </a:xfrm>
           <a:prstGeom prst="rect">
             <a:avLst/>
@@ -6608,9 +7010,9 @@
               </a:spcAft>
             </a:pPr>
             <a:r>
-              <a:rPr sz="1900" b="1" i="0">
+              <a:rPr sz="1800" b="1" i="0">
                 <a:solidFill>
-                  <a:srgbClr val="262630"/>
+                  <a:srgbClr val="1B1B26"/>
                 </a:solidFill>
                 <a:latin typeface="Yu Gothic"/>
                 <a:ea typeface="Yu Gothic"/>
@@ -6629,14 +7031,14 @@
         </p:nvSpPr>
         <p:spPr>
           <a:xfrm>
-            <a:off x="502920" y="1389888"/>
-            <a:ext cx="1463040" cy="33020"/>
+            <a:off x="502920" y="1335024"/>
+            <a:ext cx="11183112" cy="11430"/>
           </a:xfrm>
           <a:prstGeom prst="rect">
             <a:avLst/>
           </a:prstGeom>
           <a:solidFill>
-            <a:srgbClr val="7823DC"/>
+            <a:srgbClr val="E5E7EB"/>
           </a:solidFill>
           <a:ln>
             <a:noFill/>
@@ -6684,7 +7086,7 @@
           </a:solidFill>
           <a:ln w="9525">
             <a:solidFill>
-              <a:srgbClr val="D9D9E0"/>
+              <a:srgbClr val="E5E7EB"/>
             </a:solidFill>
           </a:ln>
           <a:effectLst/>
@@ -6726,7 +7128,7 @@
             <a:avLst/>
           </a:prstGeom>
           <a:solidFill>
-            <a:srgbClr val="7823DC"/>
+            <a:srgbClr val="2563EB"/>
           </a:solidFill>
           <a:ln>
             <a:noFill/>
@@ -6770,7 +7172,7 @@
             <a:avLst/>
           </a:prstGeom>
           <a:solidFill>
-            <a:srgbClr val="7823DC"/>
+            <a:srgbClr val="2563EB"/>
           </a:solidFill>
           <a:ln>
             <a:noFill/>
@@ -6844,7 +7246,7 @@
             <a:r>
               <a:rPr sz="1250" b="1" i="0">
                 <a:solidFill>
-                  <a:srgbClr val="3A106E"/>
+                  <a:srgbClr val="1E40AF"/>
                 </a:solidFill>
                 <a:latin typeface="Yu Gothic"/>
                 <a:ea typeface="Yu Gothic"/>
@@ -6862,7 +7264,7 @@
             <a:r>
               <a:rPr sz="980" b="0" i="0">
                 <a:solidFill>
-                  <a:srgbClr val="262630"/>
+                  <a:srgbClr val="1B1B26"/>
                 </a:solidFill>
                 <a:latin typeface="Yu Gothic"/>
                 <a:ea typeface="Yu Gothic"/>
@@ -6892,7 +7294,7 @@
           </a:solidFill>
           <a:ln w="9525">
             <a:solidFill>
-              <a:srgbClr val="D9D9E0"/>
+              <a:srgbClr val="E5E7EB"/>
             </a:solidFill>
           </a:ln>
           <a:effectLst/>
@@ -6934,7 +7336,7 @@
             <a:avLst/>
           </a:prstGeom>
           <a:solidFill>
-            <a:srgbClr val="7823DC"/>
+            <a:srgbClr val="2563EB"/>
           </a:solidFill>
           <a:ln>
             <a:noFill/>
@@ -6978,7 +7380,7 @@
             <a:avLst/>
           </a:prstGeom>
           <a:solidFill>
-            <a:srgbClr val="7823DC"/>
+            <a:srgbClr val="2563EB"/>
           </a:solidFill>
           <a:ln>
             <a:noFill/>
@@ -7052,7 +7454,7 @@
             <a:r>
               <a:rPr sz="1250" b="1" i="0">
                 <a:solidFill>
-                  <a:srgbClr val="3A106E"/>
+                  <a:srgbClr val="1E40AF"/>
                 </a:solidFill>
                 <a:latin typeface="Yu Gothic"/>
                 <a:ea typeface="Yu Gothic"/>
@@ -7070,7 +7472,7 @@
             <a:r>
               <a:rPr sz="980" b="0" i="0">
                 <a:solidFill>
-                  <a:srgbClr val="262630"/>
+                  <a:srgbClr val="1B1B26"/>
                 </a:solidFill>
                 <a:latin typeface="Yu Gothic"/>
                 <a:ea typeface="Yu Gothic"/>
@@ -7100,7 +7502,7 @@
           </a:solidFill>
           <a:ln w="9525">
             <a:solidFill>
-              <a:srgbClr val="D9D9E0"/>
+              <a:srgbClr val="E5E7EB"/>
             </a:solidFill>
           </a:ln>
           <a:effectLst/>
@@ -7142,7 +7544,7 @@
             <a:avLst/>
           </a:prstGeom>
           <a:solidFill>
-            <a:srgbClr val="7823DC"/>
+            <a:srgbClr val="2563EB"/>
           </a:solidFill>
           <a:ln>
             <a:noFill/>
@@ -7186,7 +7588,7 @@
             <a:avLst/>
           </a:prstGeom>
           <a:solidFill>
-            <a:srgbClr val="7823DC"/>
+            <a:srgbClr val="2563EB"/>
           </a:solidFill>
           <a:ln>
             <a:noFill/>
@@ -7260,7 +7662,7 @@
             <a:r>
               <a:rPr sz="1250" b="1" i="0">
                 <a:solidFill>
-                  <a:srgbClr val="3A106E"/>
+                  <a:srgbClr val="1E40AF"/>
                 </a:solidFill>
                 <a:latin typeface="Yu Gothic"/>
                 <a:ea typeface="Yu Gothic"/>
@@ -7278,7 +7680,7 @@
             <a:r>
               <a:rPr sz="980" b="0" i="0">
                 <a:solidFill>
-                  <a:srgbClr val="262630"/>
+                  <a:srgbClr val="1B1B26"/>
                 </a:solidFill>
                 <a:latin typeface="Yu Gothic"/>
                 <a:ea typeface="Yu Gothic"/>
@@ -7304,7 +7706,7 @@
             <a:avLst/>
           </a:prstGeom>
           <a:solidFill>
-            <a:srgbClr val="F3EFFB"/>
+            <a:srgbClr val="EAF1FE"/>
           </a:solidFill>
           <a:ln>
             <a:noFill/>
@@ -7348,7 +7750,7 @@
             <a:avLst/>
           </a:prstGeom>
           <a:solidFill>
-            <a:srgbClr val="3A106E"/>
+            <a:srgbClr val="1E40AF"/>
           </a:solidFill>
           <a:ln>
             <a:noFill/>
@@ -7407,7 +7809,7 @@
             <a:r>
               <a:rPr sz="1050" b="1" i="0">
                 <a:solidFill>
-                  <a:srgbClr val="7823DC"/>
+                  <a:srgbClr val="2563EB"/>
                 </a:solidFill>
                 <a:latin typeface="Yu Gothic"/>
                 <a:ea typeface="Yu Gothic"/>
@@ -7418,7 +7820,7 @@
             <a:r>
               <a:rPr sz="1050" b="0" i="0">
                 <a:solidFill>
-                  <a:srgbClr val="262630"/>
+                  <a:srgbClr val="1B1B26"/>
                 </a:solidFill>
                 <a:latin typeface="Yu Gothic"/>
                 <a:ea typeface="Yu Gothic"/>
@@ -7444,7 +7846,7 @@
             <a:avLst/>
           </a:prstGeom>
           <a:solidFill>
-            <a:srgbClr val="D9D9E0"/>
+            <a:srgbClr val="E5E7EB"/>
           </a:solidFill>
           <a:ln>
             <a:noFill/>
@@ -7503,7 +7905,7 @@
             <a:r>
               <a:rPr sz="750" b="0" i="0">
                 <a:solidFill>
-                  <a:srgbClr val="8A8A99"/>
+                  <a:srgbClr val="8A8F9C"/>
                 </a:solidFill>
                 <a:latin typeface="Yu Gothic"/>
                 <a:ea typeface="Yu Gothic"/>
@@ -7544,7 +7946,7 @@
             <a:r>
               <a:rPr sz="900" b="0" i="0">
                 <a:solidFill>
-                  <a:srgbClr val="5F5F6E"/>
+                  <a:srgbClr val="6B7280"/>
                 </a:solidFill>
                 <a:latin typeface="Yu Gothic"/>
                 <a:ea typeface="Yu Gothic"/>
@@ -7575,35 +7977,55 @@
       <p:grpSpPr/>
       <p:sp>
         <p:nvSpPr>
-          <p:cNvPr id="2" name="TextBox 1"/>
-          <p:cNvSpPr txBox="1"/>
-          <p:nvPr/>
-        </p:nvSpPr>
-        <p:spPr>
-          <a:xfrm>
-            <a:off x="502920" y="256032"/>
-            <a:ext cx="11155680" cy="256032"/>
-          </a:xfrm>
-          <a:prstGeom prst="rect">
-            <a:avLst/>
-          </a:prstGeom>
-          <a:noFill/>
-        </p:spPr>
-        <p:txBody>
-          <a:bodyPr wrap="square" lIns="0" rIns="0" tIns="0" bIns="0">
-            <a:spAutoFit/>
-          </a:bodyPr>
+          <p:cNvPr id="2" name="Rounded Rectangle 1"/>
+          <p:cNvSpPr/>
+          <p:nvPr/>
+        </p:nvSpPr>
+        <p:spPr>
+          <a:xfrm>
+            <a:off x="502920" y="274320"/>
+            <a:ext cx="2793491" cy="274320"/>
+          </a:xfrm>
+          <a:prstGeom prst="roundRect">
+            <a:avLst>
+              <a:gd name="adj" fmla="val 50000"/>
+            </a:avLst>
+          </a:prstGeom>
+          <a:solidFill>
+            <a:srgbClr val="EAF1FE"/>
+          </a:solidFill>
+          <a:ln>
+            <a:noFill/>
+          </a:ln>
+          <a:effectLst/>
+        </p:spPr>
+        <p:style>
+          <a:lnRef idx="1">
+            <a:schemeClr val="accent1"/>
+          </a:lnRef>
+          <a:fillRef idx="3">
+            <a:schemeClr val="accent1"/>
+          </a:fillRef>
+          <a:effectRef idx="2">
+            <a:schemeClr val="accent1"/>
+          </a:effectRef>
+          <a:fontRef idx="minor">
+            <a:schemeClr val="lt1"/>
+          </a:fontRef>
+        </p:style>
+        <p:txBody>
+          <a:bodyPr rtlCol="0" anchor="ctr" wrap="none" lIns="109728" rIns="109728" tIns="0" bIns="0"/>
           <a:lstStyle/>
           <a:p>
             <a:pPr algn="l">
               <a:spcAft>
-                <a:spcPts val="400"/>
+                <a:spcPts val="0"/>
               </a:spcAft>
             </a:pPr>
             <a:r>
-              <a:rPr sz="1000" b="1" i="0">
+              <a:rPr sz="900" b="1" i="0">
                 <a:solidFill>
-                  <a:srgbClr val="7823DC"/>
+                  <a:srgbClr val="2563EB"/>
                 </a:solidFill>
                 <a:latin typeface="Yu Gothic"/>
                 <a:ea typeface="Yu Gothic"/>
@@ -7622,8 +8044,8 @@
         </p:nvSpPr>
         <p:spPr>
           <a:xfrm>
-            <a:off x="502920" y="512064"/>
-            <a:ext cx="11155680" cy="868680"/>
+            <a:off x="502920" y="566928"/>
+            <a:ext cx="11155680" cy="804672"/>
           </a:xfrm>
           <a:prstGeom prst="rect">
             <a:avLst/>
@@ -7642,9 +8064,9 @@
               </a:spcAft>
             </a:pPr>
             <a:r>
-              <a:rPr sz="1900" b="1" i="0">
+              <a:rPr sz="1800" b="1" i="0">
                 <a:solidFill>
-                  <a:srgbClr val="262630"/>
+                  <a:srgbClr val="1B1B26"/>
                 </a:solidFill>
                 <a:latin typeface="Yu Gothic"/>
                 <a:ea typeface="Yu Gothic"/>
@@ -7663,14 +8085,14 @@
         </p:nvSpPr>
         <p:spPr>
           <a:xfrm>
-            <a:off x="502920" y="1389888"/>
-            <a:ext cx="1463040" cy="33020"/>
+            <a:off x="502920" y="1335024"/>
+            <a:ext cx="11183112" cy="11430"/>
           </a:xfrm>
           <a:prstGeom prst="rect">
             <a:avLst/>
           </a:prstGeom>
           <a:solidFill>
-            <a:srgbClr val="7823DC"/>
+            <a:srgbClr val="E5E7EB"/>
           </a:solidFill>
           <a:ln>
             <a:noFill/>
@@ -7714,9 +8136,7 @@
         <a:graphic>
           <a:graphicData uri="http://schemas.openxmlformats.org/drawingml/2006/table">
             <a:tbl>
-              <a:tblPr firstRow="1" bandRow="1">
-                <a:tableStyleId>{5C22544A-7EE6-4342-B048-85BDC9FD1C3A}</a:tableStyleId>
-              </a:tblPr>
+              <a:tblPr firstRow="0" bandRow="0"/>
               <a:tblGrid>
                 <a:gridCol w="1374972"/>
                 <a:gridCol w="2749945"/>
@@ -7737,7 +8157,7 @@
                       <a:r>
                         <a:rPr sz="1000" b="1" i="0">
                           <a:solidFill>
-                            <a:srgbClr val="FFFFFF"/>
+                            <a:srgbClr val="1B1B26"/>
                           </a:solidFill>
                           <a:latin typeface="Yu Gothic"/>
                           <a:ea typeface="Yu Gothic"/>
@@ -7747,10 +8167,20 @@
                       </a:r>
                     </a:p>
                   </a:txBody>
-                  <a:tcPr marL="54864" marR="54864" marT="18288" marB="18288" anchor="ctr">
+                  <a:tcPr marL="73152" marR="54864" marT="18288" marB="18288" anchor="ctr">
                     <a:solidFill>
-                      <a:srgbClr val="3A106E"/>
+                      <a:srgbClr val="EAF1FE"/>
                     </a:solidFill>
+                    <a:lnB w="15240" cap="flat">
+                      <a:solidFill>
+                        <a:srgbClr val="2563EB"/>
+                      </a:solidFill>
+                    </a:lnB>
+                    <a:lnT w="15240" cap="flat">
+                      <a:solidFill>
+                        <a:srgbClr val="2563EB"/>
+                      </a:solidFill>
+                    </a:lnT>
                   </a:tcPr>
                 </a:tc>
                 <a:tc>
@@ -7766,7 +8196,7 @@
                       <a:r>
                         <a:rPr sz="1000" b="1" i="0">
                           <a:solidFill>
-                            <a:srgbClr val="FFFFFF"/>
+                            <a:srgbClr val="1B1B26"/>
                           </a:solidFill>
                           <a:latin typeface="Yu Gothic"/>
                           <a:ea typeface="Yu Gothic"/>
@@ -7776,10 +8206,20 @@
                       </a:r>
                     </a:p>
                   </a:txBody>
-                  <a:tcPr marL="54864" marR="54864" marT="18288" marB="18288" anchor="ctr">
+                  <a:tcPr marL="73152" marR="54864" marT="18288" marB="18288" anchor="ctr">
                     <a:solidFill>
-                      <a:srgbClr val="3A106E"/>
+                      <a:srgbClr val="EAF1FE"/>
                     </a:solidFill>
+                    <a:lnB w="15240" cap="flat">
+                      <a:solidFill>
+                        <a:srgbClr val="2563EB"/>
+                      </a:solidFill>
+                    </a:lnB>
+                    <a:lnT w="15240" cap="flat">
+                      <a:solidFill>
+                        <a:srgbClr val="2563EB"/>
+                      </a:solidFill>
+                    </a:lnT>
                   </a:tcPr>
                 </a:tc>
                 <a:tc>
@@ -7795,7 +8235,7 @@
                       <a:r>
                         <a:rPr sz="1000" b="1" i="0">
                           <a:solidFill>
-                            <a:srgbClr val="FFFFFF"/>
+                            <a:srgbClr val="1B1B26"/>
                           </a:solidFill>
                           <a:latin typeface="Yu Gothic"/>
                           <a:ea typeface="Yu Gothic"/>
@@ -7805,10 +8245,20 @@
                       </a:r>
                     </a:p>
                   </a:txBody>
-                  <a:tcPr marL="54864" marR="54864" marT="18288" marB="18288" anchor="ctr">
+                  <a:tcPr marL="73152" marR="54864" marT="18288" marB="18288" anchor="ctr">
                     <a:solidFill>
-                      <a:srgbClr val="3A106E"/>
+                      <a:srgbClr val="EAF1FE"/>
                     </a:solidFill>
+                    <a:lnB w="15240" cap="flat">
+                      <a:solidFill>
+                        <a:srgbClr val="2563EB"/>
+                      </a:solidFill>
+                    </a:lnB>
+                    <a:lnT w="15240" cap="flat">
+                      <a:solidFill>
+                        <a:srgbClr val="2563EB"/>
+                      </a:solidFill>
+                    </a:lnT>
                   </a:tcPr>
                 </a:tc>
                 <a:tc>
@@ -7824,7 +8274,7 @@
                       <a:r>
                         <a:rPr sz="1000" b="1" i="0">
                           <a:solidFill>
-                            <a:srgbClr val="FFFFFF"/>
+                            <a:srgbClr val="1B1B26"/>
                           </a:solidFill>
                           <a:latin typeface="Yu Gothic"/>
                           <a:ea typeface="Yu Gothic"/>
@@ -7834,10 +8284,20 @@
                       </a:r>
                     </a:p>
                   </a:txBody>
-                  <a:tcPr marL="54864" marR="54864" marT="18288" marB="18288" anchor="ctr">
+                  <a:tcPr marL="73152" marR="54864" marT="18288" marB="18288" anchor="ctr">
                     <a:solidFill>
-                      <a:srgbClr val="3A106E"/>
+                      <a:srgbClr val="EAF1FE"/>
                     </a:solidFill>
+                    <a:lnB w="15240" cap="flat">
+                      <a:solidFill>
+                        <a:srgbClr val="2563EB"/>
+                      </a:solidFill>
+                    </a:lnB>
+                    <a:lnT w="15240" cap="flat">
+                      <a:solidFill>
+                        <a:srgbClr val="2563EB"/>
+                      </a:solidFill>
+                    </a:lnT>
                   </a:tcPr>
                 </a:tc>
               </a:tr>
@@ -7919,10 +8379,15 @@
                       </a:r>
                     </a:p>
                   </a:txBody>
-                  <a:tcPr marL="54864" marR="54864" marT="18288" marB="18288" anchor="ctr">
+                  <a:tcPr marL="73152" marR="54864" marT="18288" marB="18288" anchor="ctr">
                     <a:solidFill>
-                      <a:srgbClr val="7823DC"/>
+                      <a:srgbClr val="2563EB"/>
                     </a:solidFill>
+                    <a:lnB w="9525" cap="flat">
+                      <a:solidFill>
+                        <a:srgbClr val="E5E7EB"/>
+                      </a:solidFill>
+                    </a:lnB>
                   </a:tcPr>
                 </a:tc>
                 <a:tc>
@@ -7938,7 +8403,7 @@
                       <a:r>
                         <a:rPr sz="950" b="0" i="0">
                           <a:solidFill>
-                            <a:srgbClr val="262630"/>
+                            <a:srgbClr val="1B1B26"/>
                           </a:solidFill>
                           <a:latin typeface="Yu Gothic"/>
                           <a:ea typeface="Yu Gothic"/>
@@ -7956,7 +8421,7 @@
                       <a:r>
                         <a:rPr sz="950" b="0" i="0">
                           <a:solidFill>
-                            <a:srgbClr val="262630"/>
+                            <a:srgbClr val="1B1B26"/>
                           </a:solidFill>
                           <a:latin typeface="Yu Gothic"/>
                           <a:ea typeface="Yu Gothic"/>
@@ -7966,10 +8431,15 @@
                       </a:r>
                     </a:p>
                   </a:txBody>
-                  <a:tcPr marL="54864" marR="54864" marT="18288" marB="18288" anchor="ctr">
+                  <a:tcPr marL="73152" marR="54864" marT="18288" marB="18288" anchor="ctr">
                     <a:solidFill>
                       <a:srgbClr val="FFFFFF"/>
                     </a:solidFill>
+                    <a:lnB w="9525" cap="flat">
+                      <a:solidFill>
+                        <a:srgbClr val="E5E7EB"/>
+                      </a:solidFill>
+                    </a:lnB>
                   </a:tcPr>
                 </a:tc>
                 <a:tc>
@@ -7985,7 +8455,7 @@
                       <a:r>
                         <a:rPr sz="950" b="0" i="0">
                           <a:solidFill>
-                            <a:srgbClr val="262630"/>
+                            <a:srgbClr val="1B1B26"/>
                           </a:solidFill>
                           <a:latin typeface="Yu Gothic"/>
                           <a:ea typeface="Yu Gothic"/>
@@ -7995,10 +8465,15 @@
                       </a:r>
                     </a:p>
                   </a:txBody>
-                  <a:tcPr marL="54864" marR="54864" marT="18288" marB="18288" anchor="ctr">
+                  <a:tcPr marL="73152" marR="54864" marT="18288" marB="18288" anchor="ctr">
                     <a:solidFill>
                       <a:srgbClr val="FFFFFF"/>
                     </a:solidFill>
+                    <a:lnB w="9525" cap="flat">
+                      <a:solidFill>
+                        <a:srgbClr val="E5E7EB"/>
+                      </a:solidFill>
+                    </a:lnB>
                   </a:tcPr>
                 </a:tc>
                 <a:tc>
@@ -8014,7 +8489,7 @@
                       <a:r>
                         <a:rPr sz="950" b="0" i="0">
                           <a:solidFill>
-                            <a:srgbClr val="262630"/>
+                            <a:srgbClr val="1B1B26"/>
                           </a:solidFill>
                           <a:latin typeface="Yu Gothic"/>
                           <a:ea typeface="Yu Gothic"/>
@@ -8024,10 +8499,15 @@
                       </a:r>
                     </a:p>
                   </a:txBody>
-                  <a:tcPr marL="54864" marR="54864" marT="18288" marB="18288" anchor="ctr">
+                  <a:tcPr marL="73152" marR="54864" marT="18288" marB="18288" anchor="ctr">
                     <a:solidFill>
                       <a:srgbClr val="FFFFFF"/>
                     </a:solidFill>
+                    <a:lnB w="9525" cap="flat">
+                      <a:solidFill>
+                        <a:srgbClr val="E5E7EB"/>
+                      </a:solidFill>
+                    </a:lnB>
                   </a:tcPr>
                 </a:tc>
               </a:tr>
@@ -8045,7 +8525,7 @@
                       <a:r>
                         <a:rPr sz="950" b="1" i="0">
                           <a:solidFill>
-                            <a:srgbClr val="3A106E"/>
+                            <a:srgbClr val="2563EB"/>
                           </a:solidFill>
                           <a:latin typeface="Yu Gothic"/>
                           <a:ea typeface="Yu Gothic"/>
@@ -8055,10 +8535,15 @@
                       </a:r>
                     </a:p>
                   </a:txBody>
-                  <a:tcPr marL="54864" marR="54864" marT="18288" marB="18288" anchor="ctr">
+                  <a:tcPr marL="73152" marR="54864" marT="18288" marB="18288" anchor="ctr">
                     <a:solidFill>
-                      <a:srgbClr val="F7F7F9"/>
+                      <a:srgbClr val="FFFFFF"/>
                     </a:solidFill>
+                    <a:lnB w="9525" cap="flat">
+                      <a:solidFill>
+                        <a:srgbClr val="E5E7EB"/>
+                      </a:solidFill>
+                    </a:lnB>
                   </a:tcPr>
                 </a:tc>
                 <a:tc>
@@ -8074,7 +8559,7 @@
                       <a:r>
                         <a:rPr sz="950" b="0" i="0">
                           <a:solidFill>
-                            <a:srgbClr val="262630"/>
+                            <a:srgbClr val="1B1B26"/>
                           </a:solidFill>
                           <a:latin typeface="Yu Gothic"/>
                           <a:ea typeface="Yu Gothic"/>
@@ -8084,10 +8569,15 @@
                       </a:r>
                     </a:p>
                   </a:txBody>
-                  <a:tcPr marL="54864" marR="54864" marT="18288" marB="18288" anchor="ctr">
+                  <a:tcPr marL="73152" marR="54864" marT="18288" marB="18288" anchor="ctr">
                     <a:solidFill>
-                      <a:srgbClr val="F7F7F9"/>
+                      <a:srgbClr val="FFFFFF"/>
                     </a:solidFill>
+                    <a:lnB w="9525" cap="flat">
+                      <a:solidFill>
+                        <a:srgbClr val="E5E7EB"/>
+                      </a:solidFill>
+                    </a:lnB>
                   </a:tcPr>
                 </a:tc>
                 <a:tc>
@@ -8103,7 +8593,7 @@
                       <a:r>
                         <a:rPr sz="950" b="0" i="0">
                           <a:solidFill>
-                            <a:srgbClr val="262630"/>
+                            <a:srgbClr val="1B1B26"/>
                           </a:solidFill>
                           <a:latin typeface="Yu Gothic"/>
                           <a:ea typeface="Yu Gothic"/>
@@ -8113,10 +8603,15 @@
                       </a:r>
                     </a:p>
                   </a:txBody>
-                  <a:tcPr marL="54864" marR="54864" marT="18288" marB="18288" anchor="ctr">
+                  <a:tcPr marL="73152" marR="54864" marT="18288" marB="18288" anchor="ctr">
                     <a:solidFill>
-                      <a:srgbClr val="F7F7F9"/>
+                      <a:srgbClr val="FFFFFF"/>
                     </a:solidFill>
+                    <a:lnB w="9525" cap="flat">
+                      <a:solidFill>
+                        <a:srgbClr val="E5E7EB"/>
+                      </a:solidFill>
+                    </a:lnB>
                   </a:tcPr>
                 </a:tc>
                 <a:tc>
@@ -8132,7 +8627,7 @@
                       <a:r>
                         <a:rPr sz="950" b="0" i="0">
                           <a:solidFill>
-                            <a:srgbClr val="262630"/>
+                            <a:srgbClr val="1B1B26"/>
                           </a:solidFill>
                           <a:latin typeface="Yu Gothic"/>
                           <a:ea typeface="Yu Gothic"/>
@@ -8142,10 +8637,15 @@
                       </a:r>
                     </a:p>
                   </a:txBody>
-                  <a:tcPr marL="54864" marR="54864" marT="18288" marB="18288" anchor="ctr">
+                  <a:tcPr marL="73152" marR="54864" marT="18288" marB="18288" anchor="ctr">
                     <a:solidFill>
-                      <a:srgbClr val="F7F7F9"/>
+                      <a:srgbClr val="FFFFFF"/>
                     </a:solidFill>
+                    <a:lnB w="9525" cap="flat">
+                      <a:solidFill>
+                        <a:srgbClr val="E5E7EB"/>
+                      </a:solidFill>
+                    </a:lnB>
                   </a:tcPr>
                 </a:tc>
               </a:tr>
@@ -8163,7 +8663,7 @@
                       <a:r>
                         <a:rPr sz="950" b="1" i="0">
                           <a:solidFill>
-                            <a:srgbClr val="3A106E"/>
+                            <a:srgbClr val="2563EB"/>
                           </a:solidFill>
                           <a:latin typeface="Yu Gothic"/>
                           <a:ea typeface="Yu Gothic"/>
@@ -8173,10 +8673,15 @@
                       </a:r>
                     </a:p>
                   </a:txBody>
-                  <a:tcPr marL="54864" marR="54864" marT="18288" marB="18288" anchor="ctr">
+                  <a:tcPr marL="73152" marR="54864" marT="18288" marB="18288" anchor="ctr">
                     <a:solidFill>
                       <a:srgbClr val="FFFFFF"/>
                     </a:solidFill>
+                    <a:lnB w="9525" cap="flat">
+                      <a:solidFill>
+                        <a:srgbClr val="E5E7EB"/>
+                      </a:solidFill>
+                    </a:lnB>
                   </a:tcPr>
                 </a:tc>
                 <a:tc>
@@ -8192,7 +8697,7 @@
                       <a:r>
                         <a:rPr sz="950" b="0" i="0">
                           <a:solidFill>
-                            <a:srgbClr val="262630"/>
+                            <a:srgbClr val="1B1B26"/>
                           </a:solidFill>
                           <a:latin typeface="Yu Gothic"/>
                           <a:ea typeface="Yu Gothic"/>
@@ -8202,10 +8707,15 @@
                       </a:r>
                     </a:p>
                   </a:txBody>
-                  <a:tcPr marL="54864" marR="54864" marT="18288" marB="18288" anchor="ctr">
+                  <a:tcPr marL="73152" marR="54864" marT="18288" marB="18288" anchor="ctr">
                     <a:solidFill>
                       <a:srgbClr val="FFFFFF"/>
                     </a:solidFill>
+                    <a:lnB w="9525" cap="flat">
+                      <a:solidFill>
+                        <a:srgbClr val="E5E7EB"/>
+                      </a:solidFill>
+                    </a:lnB>
                   </a:tcPr>
                 </a:tc>
                 <a:tc>
@@ -8221,7 +8731,7 @@
                       <a:r>
                         <a:rPr sz="950" b="0" i="0">
                           <a:solidFill>
-                            <a:srgbClr val="262630"/>
+                            <a:srgbClr val="1B1B26"/>
                           </a:solidFill>
                           <a:latin typeface="Yu Gothic"/>
                           <a:ea typeface="Yu Gothic"/>
@@ -8231,10 +8741,15 @@
                       </a:r>
                     </a:p>
                   </a:txBody>
-                  <a:tcPr marL="54864" marR="54864" marT="18288" marB="18288" anchor="ctr">
+                  <a:tcPr marL="73152" marR="54864" marT="18288" marB="18288" anchor="ctr">
                     <a:solidFill>
                       <a:srgbClr val="FFFFFF"/>
                     </a:solidFill>
+                    <a:lnB w="9525" cap="flat">
+                      <a:solidFill>
+                        <a:srgbClr val="E5E7EB"/>
+                      </a:solidFill>
+                    </a:lnB>
                   </a:tcPr>
                 </a:tc>
                 <a:tc>
@@ -8250,7 +8765,7 @@
                       <a:r>
                         <a:rPr sz="950" b="0" i="0">
                           <a:solidFill>
-                            <a:srgbClr val="262630"/>
+                            <a:srgbClr val="1B1B26"/>
                           </a:solidFill>
                           <a:latin typeface="Yu Gothic"/>
                           <a:ea typeface="Yu Gothic"/>
@@ -8260,10 +8775,15 @@
                       </a:r>
                     </a:p>
                   </a:txBody>
-                  <a:tcPr marL="54864" marR="54864" marT="18288" marB="18288" anchor="ctr">
+                  <a:tcPr marL="73152" marR="54864" marT="18288" marB="18288" anchor="ctr">
                     <a:solidFill>
                       <a:srgbClr val="FFFFFF"/>
                     </a:solidFill>
+                    <a:lnB w="9525" cap="flat">
+                      <a:solidFill>
+                        <a:srgbClr val="E5E7EB"/>
+                      </a:solidFill>
+                    </a:lnB>
                   </a:tcPr>
                 </a:tc>
               </a:tr>
@@ -8286,7 +8806,7 @@
             <a:avLst/>
           </a:prstGeom>
           <a:solidFill>
-            <a:srgbClr val="F3EFFB"/>
+            <a:srgbClr val="EAF1FE"/>
           </a:solidFill>
           <a:ln>
             <a:noFill/>
@@ -8330,7 +8850,7 @@
             <a:avLst/>
           </a:prstGeom>
           <a:solidFill>
-            <a:srgbClr val="7823DC"/>
+            <a:srgbClr val="2563EB"/>
           </a:solidFill>
           <a:ln>
             <a:noFill/>
@@ -8389,7 +8909,7 @@
             <a:r>
               <a:rPr sz="1050" b="1" i="0">
                 <a:solidFill>
-                  <a:srgbClr val="3A106E"/>
+                  <a:srgbClr val="1E40AF"/>
                 </a:solidFill>
                 <a:latin typeface="Yu Gothic"/>
                 <a:ea typeface="Yu Gothic"/>
@@ -8415,7 +8935,7 @@
             <a:avLst/>
           </a:prstGeom>
           <a:solidFill>
-            <a:srgbClr val="D9D9E0"/>
+            <a:srgbClr val="E5E7EB"/>
           </a:solidFill>
           <a:ln>
             <a:noFill/>
@@ -8474,7 +8994,7 @@
             <a:r>
               <a:rPr sz="750" b="0" i="0">
                 <a:solidFill>
-                  <a:srgbClr val="8A8A99"/>
+                  <a:srgbClr val="8A8F9C"/>
                 </a:solidFill>
                 <a:latin typeface="Yu Gothic"/>
                 <a:ea typeface="Yu Gothic"/>
@@ -8515,7 +9035,7 @@
             <a:r>
               <a:rPr sz="900" b="0" i="0">
                 <a:solidFill>
-                  <a:srgbClr val="5F5F6E"/>
+                  <a:srgbClr val="6B7280"/>
                 </a:solidFill>
                 <a:latin typeface="Yu Gothic"/>
                 <a:ea typeface="Yu Gothic"/>
@@ -8546,35 +9066,55 @@
       <p:grpSpPr/>
       <p:sp>
         <p:nvSpPr>
-          <p:cNvPr id="2" name="TextBox 1"/>
-          <p:cNvSpPr txBox="1"/>
-          <p:nvPr/>
-        </p:nvSpPr>
-        <p:spPr>
-          <a:xfrm>
-            <a:off x="502920" y="256032"/>
-            <a:ext cx="11155680" cy="256032"/>
-          </a:xfrm>
-          <a:prstGeom prst="rect">
-            <a:avLst/>
-          </a:prstGeom>
-          <a:noFill/>
-        </p:spPr>
-        <p:txBody>
-          <a:bodyPr wrap="square" lIns="0" rIns="0" tIns="0" bIns="0">
-            <a:spAutoFit/>
-          </a:bodyPr>
+          <p:cNvPr id="2" name="Rounded Rectangle 1"/>
+          <p:cNvSpPr/>
+          <p:nvPr/>
+        </p:nvSpPr>
+        <p:spPr>
+          <a:xfrm>
+            <a:off x="502920" y="274320"/>
+            <a:ext cx="2141981" cy="274320"/>
+          </a:xfrm>
+          <a:prstGeom prst="roundRect">
+            <a:avLst>
+              <a:gd name="adj" fmla="val 50000"/>
+            </a:avLst>
+          </a:prstGeom>
+          <a:solidFill>
+            <a:srgbClr val="EAF1FE"/>
+          </a:solidFill>
+          <a:ln>
+            <a:noFill/>
+          </a:ln>
+          <a:effectLst/>
+        </p:spPr>
+        <p:style>
+          <a:lnRef idx="1">
+            <a:schemeClr val="accent1"/>
+          </a:lnRef>
+          <a:fillRef idx="3">
+            <a:schemeClr val="accent1"/>
+          </a:fillRef>
+          <a:effectRef idx="2">
+            <a:schemeClr val="accent1"/>
+          </a:effectRef>
+          <a:fontRef idx="minor">
+            <a:schemeClr val="lt1"/>
+          </a:fontRef>
+        </p:style>
+        <p:txBody>
+          <a:bodyPr rtlCol="0" anchor="ctr" wrap="none" lIns="109728" rIns="109728" tIns="0" bIns="0"/>
           <a:lstStyle/>
           <a:p>
             <a:pPr algn="l">
               <a:spcAft>
-                <a:spcPts val="400"/>
+                <a:spcPts val="0"/>
               </a:spcAft>
             </a:pPr>
             <a:r>
-              <a:rPr sz="1000" b="1" i="0">
+              <a:rPr sz="900" b="1" i="0">
                 <a:solidFill>
-                  <a:srgbClr val="7823DC"/>
+                  <a:srgbClr val="2563EB"/>
                 </a:solidFill>
                 <a:latin typeface="Yu Gothic"/>
                 <a:ea typeface="Yu Gothic"/>
@@ -8593,8 +9133,8 @@
         </p:nvSpPr>
         <p:spPr>
           <a:xfrm>
-            <a:off x="502920" y="512064"/>
-            <a:ext cx="11155680" cy="868680"/>
+            <a:off x="502920" y="566928"/>
+            <a:ext cx="11155680" cy="804672"/>
           </a:xfrm>
           <a:prstGeom prst="rect">
             <a:avLst/>
@@ -8613,9 +9153,9 @@
               </a:spcAft>
             </a:pPr>
             <a:r>
-              <a:rPr sz="1900" b="1" i="0">
+              <a:rPr sz="1800" b="1" i="0">
                 <a:solidFill>
-                  <a:srgbClr val="262630"/>
+                  <a:srgbClr val="1B1B26"/>
                 </a:solidFill>
                 <a:latin typeface="Yu Gothic"/>
                 <a:ea typeface="Yu Gothic"/>
@@ -8634,14 +9174,14 @@
         </p:nvSpPr>
         <p:spPr>
           <a:xfrm>
-            <a:off x="502920" y="1389888"/>
-            <a:ext cx="1463040" cy="33020"/>
+            <a:off x="502920" y="1335024"/>
+            <a:ext cx="11183112" cy="11430"/>
           </a:xfrm>
           <a:prstGeom prst="rect">
             <a:avLst/>
           </a:prstGeom>
           <a:solidFill>
-            <a:srgbClr val="7823DC"/>
+            <a:srgbClr val="E5E7EB"/>
           </a:solidFill>
           <a:ln>
             <a:noFill/>
@@ -8689,7 +9229,7 @@
           </a:solidFill>
           <a:ln w="9525">
             <a:solidFill>
-              <a:srgbClr val="D9D9E0"/>
+              <a:srgbClr val="E5E7EB"/>
             </a:solidFill>
           </a:ln>
           <a:effectLst/>
@@ -8731,7 +9271,7 @@
             <a:avLst/>
           </a:prstGeom>
           <a:solidFill>
-            <a:srgbClr val="7823DC"/>
+            <a:srgbClr val="2563EB"/>
           </a:solidFill>
           <a:ln>
             <a:noFill/>
@@ -8775,7 +9315,7 @@
             <a:avLst/>
           </a:prstGeom>
           <a:solidFill>
-            <a:srgbClr val="7823DC"/>
+            <a:srgbClr val="2563EB"/>
           </a:solidFill>
           <a:ln>
             <a:noFill/>
@@ -8849,7 +9389,7 @@
             <a:r>
               <a:rPr sz="1350" b="1" i="0">
                 <a:solidFill>
-                  <a:srgbClr val="3A106E"/>
+                  <a:srgbClr val="1E40AF"/>
                 </a:solidFill>
                 <a:latin typeface="Yu Gothic"/>
                 <a:ea typeface="Yu Gothic"/>
@@ -8890,7 +9430,7 @@
             <a:r>
               <a:rPr sz="1100" b="0" i="0">
                 <a:solidFill>
-                  <a:srgbClr val="262630"/>
+                  <a:srgbClr val="1B1B26"/>
                 </a:solidFill>
                 <a:latin typeface="Yu Gothic"/>
                 <a:ea typeface="Yu Gothic"/>
@@ -8908,7 +9448,7 @@
             <a:r>
               <a:rPr sz="1100" b="0" i="0">
                 <a:solidFill>
-                  <a:srgbClr val="262630"/>
+                  <a:srgbClr val="1B1B26"/>
                 </a:solidFill>
                 <a:latin typeface="Yu Gothic"/>
                 <a:ea typeface="Yu Gothic"/>
@@ -8926,7 +9466,7 @@
             <a:r>
               <a:rPr sz="1100" b="0" i="0">
                 <a:solidFill>
-                  <a:srgbClr val="262630"/>
+                  <a:srgbClr val="1B1B26"/>
                 </a:solidFill>
                 <a:latin typeface="Yu Gothic"/>
                 <a:ea typeface="Yu Gothic"/>
@@ -8956,7 +9496,7 @@
           </a:solidFill>
           <a:ln w="9525">
             <a:solidFill>
-              <a:srgbClr val="D9D9E0"/>
+              <a:srgbClr val="E5E7EB"/>
             </a:solidFill>
           </a:ln>
           <a:effectLst/>
@@ -8998,7 +9538,7 @@
             <a:avLst/>
           </a:prstGeom>
           <a:solidFill>
-            <a:srgbClr val="7823DC"/>
+            <a:srgbClr val="2563EB"/>
           </a:solidFill>
           <a:ln>
             <a:noFill/>
@@ -9042,7 +9582,7 @@
             <a:avLst/>
           </a:prstGeom>
           <a:solidFill>
-            <a:srgbClr val="7823DC"/>
+            <a:srgbClr val="2563EB"/>
           </a:solidFill>
           <a:ln>
             <a:noFill/>
@@ -9116,7 +9656,7 @@
             <a:r>
               <a:rPr sz="1350" b="1" i="0">
                 <a:solidFill>
-                  <a:srgbClr val="3A106E"/>
+                  <a:srgbClr val="1E40AF"/>
                 </a:solidFill>
                 <a:latin typeface="Yu Gothic"/>
                 <a:ea typeface="Yu Gothic"/>
@@ -9157,7 +9697,7 @@
             <a:r>
               <a:rPr sz="1100" b="0" i="0">
                 <a:solidFill>
-                  <a:srgbClr val="262630"/>
+                  <a:srgbClr val="1B1B26"/>
                 </a:solidFill>
                 <a:latin typeface="Yu Gothic"/>
                 <a:ea typeface="Yu Gothic"/>
@@ -9175,7 +9715,7 @@
             <a:r>
               <a:rPr sz="1100" b="0" i="0">
                 <a:solidFill>
-                  <a:srgbClr val="262630"/>
+                  <a:srgbClr val="1B1B26"/>
                 </a:solidFill>
                 <a:latin typeface="Yu Gothic"/>
                 <a:ea typeface="Yu Gothic"/>
@@ -9193,7 +9733,7 @@
             <a:r>
               <a:rPr sz="1100" b="0" i="0">
                 <a:solidFill>
-                  <a:srgbClr val="262630"/>
+                  <a:srgbClr val="1B1B26"/>
                 </a:solidFill>
                 <a:latin typeface="Yu Gothic"/>
                 <a:ea typeface="Yu Gothic"/>
@@ -9219,7 +9759,7 @@
             <a:avLst/>
           </a:prstGeom>
           <a:solidFill>
-            <a:srgbClr val="F3EFFB"/>
+            <a:srgbClr val="EAF1FE"/>
           </a:solidFill>
           <a:ln>
             <a:noFill/>
@@ -9263,7 +9803,7 @@
             <a:avLst/>
           </a:prstGeom>
           <a:solidFill>
-            <a:srgbClr val="3A106E"/>
+            <a:srgbClr val="1E40AF"/>
           </a:solidFill>
           <a:ln>
             <a:noFill/>
@@ -9322,7 +9862,7 @@
             <a:r>
               <a:rPr sz="1050" b="1" i="0">
                 <a:solidFill>
-                  <a:srgbClr val="7823DC"/>
+                  <a:srgbClr val="2563EB"/>
                 </a:solidFill>
                 <a:latin typeface="Yu Gothic"/>
                 <a:ea typeface="Yu Gothic"/>
@@ -9333,7 +9873,7 @@
             <a:r>
               <a:rPr sz="1050" b="0" i="0">
                 <a:solidFill>
-                  <a:srgbClr val="262630"/>
+                  <a:srgbClr val="1B1B26"/>
                 </a:solidFill>
                 <a:latin typeface="Yu Gothic"/>
                 <a:ea typeface="Yu Gothic"/>
@@ -9359,7 +9899,7 @@
             <a:avLst/>
           </a:prstGeom>
           <a:solidFill>
-            <a:srgbClr val="D9D9E0"/>
+            <a:srgbClr val="E5E7EB"/>
           </a:solidFill>
           <a:ln>
             <a:noFill/>
@@ -9418,7 +9958,7 @@
             <a:r>
               <a:rPr sz="750" b="0" i="0">
                 <a:solidFill>
-                  <a:srgbClr val="8A8A99"/>
+                  <a:srgbClr val="8A8F9C"/>
                 </a:solidFill>
                 <a:latin typeface="Yu Gothic"/>
                 <a:ea typeface="Yu Gothic"/>
@@ -9459,7 +9999,7 @@
             <a:r>
               <a:rPr sz="900" b="0" i="0">
                 <a:solidFill>
-                  <a:srgbClr val="5F5F6E"/>
+                  <a:srgbClr val="6B7280"/>
                 </a:solidFill>
                 <a:latin typeface="Yu Gothic"/>
                 <a:ea typeface="Yu Gothic"/>
@@ -9490,35 +10030,55 @@
       <p:grpSpPr/>
       <p:sp>
         <p:nvSpPr>
-          <p:cNvPr id="2" name="TextBox 1"/>
-          <p:cNvSpPr txBox="1"/>
-          <p:nvPr/>
-        </p:nvSpPr>
-        <p:spPr>
-          <a:xfrm>
-            <a:off x="502920" y="256032"/>
-            <a:ext cx="11155680" cy="256032"/>
-          </a:xfrm>
-          <a:prstGeom prst="rect">
-            <a:avLst/>
-          </a:prstGeom>
-          <a:noFill/>
-        </p:spPr>
-        <p:txBody>
-          <a:bodyPr wrap="square" lIns="0" rIns="0" tIns="0" bIns="0">
-            <a:spAutoFit/>
-          </a:bodyPr>
+          <p:cNvPr id="2" name="Rounded Rectangle 1"/>
+          <p:cNvSpPr/>
+          <p:nvPr/>
+        </p:nvSpPr>
+        <p:spPr>
+          <a:xfrm>
+            <a:off x="502920" y="274320"/>
+            <a:ext cx="1874519" cy="274320"/>
+          </a:xfrm>
+          <a:prstGeom prst="roundRect">
+            <a:avLst>
+              <a:gd name="adj" fmla="val 50000"/>
+            </a:avLst>
+          </a:prstGeom>
+          <a:solidFill>
+            <a:srgbClr val="EAF1FE"/>
+          </a:solidFill>
+          <a:ln>
+            <a:noFill/>
+          </a:ln>
+          <a:effectLst/>
+        </p:spPr>
+        <p:style>
+          <a:lnRef idx="1">
+            <a:schemeClr val="accent1"/>
+          </a:lnRef>
+          <a:fillRef idx="3">
+            <a:schemeClr val="accent1"/>
+          </a:fillRef>
+          <a:effectRef idx="2">
+            <a:schemeClr val="accent1"/>
+          </a:effectRef>
+          <a:fontRef idx="minor">
+            <a:schemeClr val="lt1"/>
+          </a:fontRef>
+        </p:style>
+        <p:txBody>
+          <a:bodyPr rtlCol="0" anchor="ctr" wrap="none" lIns="109728" rIns="109728" tIns="0" bIns="0"/>
           <a:lstStyle/>
           <a:p>
             <a:pPr algn="l">
               <a:spcAft>
-                <a:spcPts val="400"/>
+                <a:spcPts val="0"/>
               </a:spcAft>
             </a:pPr>
             <a:r>
-              <a:rPr sz="1000" b="1" i="0">
+              <a:rPr sz="900" b="1" i="0">
                 <a:solidFill>
-                  <a:srgbClr val="7823DC"/>
+                  <a:srgbClr val="2563EB"/>
                 </a:solidFill>
                 <a:latin typeface="Yu Gothic"/>
                 <a:ea typeface="Yu Gothic"/>
@@ -9537,8 +10097,8 @@
         </p:nvSpPr>
         <p:spPr>
           <a:xfrm>
-            <a:off x="502920" y="512064"/>
-            <a:ext cx="11155680" cy="868680"/>
+            <a:off x="502920" y="566928"/>
+            <a:ext cx="11155680" cy="804672"/>
           </a:xfrm>
           <a:prstGeom prst="rect">
             <a:avLst/>
@@ -9557,9 +10117,9 @@
               </a:spcAft>
             </a:pPr>
             <a:r>
-              <a:rPr sz="1900" b="1" i="0">
+              <a:rPr sz="1800" b="1" i="0">
                 <a:solidFill>
-                  <a:srgbClr val="262630"/>
+                  <a:srgbClr val="1B1B26"/>
                 </a:solidFill>
                 <a:latin typeface="Yu Gothic"/>
                 <a:ea typeface="Yu Gothic"/>
@@ -9578,14 +10138,14 @@
         </p:nvSpPr>
         <p:spPr>
           <a:xfrm>
-            <a:off x="502920" y="1389888"/>
-            <a:ext cx="1463040" cy="33020"/>
+            <a:off x="502920" y="1335024"/>
+            <a:ext cx="11183112" cy="11430"/>
           </a:xfrm>
           <a:prstGeom prst="rect">
             <a:avLst/>
           </a:prstGeom>
           <a:solidFill>
-            <a:srgbClr val="7823DC"/>
+            <a:srgbClr val="E5E7EB"/>
           </a:solidFill>
           <a:ln>
             <a:noFill/>
@@ -9633,7 +10193,7 @@
           </a:solidFill>
           <a:ln w="9525">
             <a:solidFill>
-              <a:srgbClr val="D9D9E0"/>
+              <a:srgbClr val="E5E7EB"/>
             </a:solidFill>
           </a:ln>
           <a:effectLst/>
@@ -9675,7 +10235,7 @@
             <a:avLst/>
           </a:prstGeom>
           <a:solidFill>
-            <a:srgbClr val="3A106E"/>
+            <a:srgbClr val="1E40AF"/>
           </a:solidFill>
           <a:ln>
             <a:noFill/>
@@ -9760,7 +10320,7 @@
             <a:avLst/>
           </a:prstGeom>
           <a:solidFill>
-            <a:srgbClr val="F3EFFB"/>
+            <a:srgbClr val="EAF1FE"/>
           </a:solidFill>
           <a:ln>
             <a:noFill/>
@@ -9819,7 +10379,7 @@
             <a:r>
               <a:rPr sz="1050" b="1" i="0">
                 <a:solidFill>
-                  <a:srgbClr val="7823DC"/>
+                  <a:srgbClr val="2563EB"/>
                 </a:solidFill>
                 <a:latin typeface="Yu Gothic"/>
                 <a:ea typeface="Yu Gothic"/>
@@ -9860,7 +10420,7 @@
             <a:r>
               <a:rPr sz="1000" b="0" i="0">
                 <a:solidFill>
-                  <a:srgbClr val="262630"/>
+                  <a:srgbClr val="1B1B26"/>
                 </a:solidFill>
                 <a:latin typeface="Yu Gothic"/>
                 <a:ea typeface="Yu Gothic"/>
@@ -9886,7 +10446,7 @@
             <a:avLst/>
           </a:prstGeom>
           <a:solidFill>
-            <a:srgbClr val="F3EFFB"/>
+            <a:srgbClr val="EAF1FE"/>
           </a:solidFill>
           <a:ln>
             <a:noFill/>
@@ -9945,7 +10505,7 @@
             <a:r>
               <a:rPr sz="1050" b="1" i="0">
                 <a:solidFill>
-                  <a:srgbClr val="7823DC"/>
+                  <a:srgbClr val="2563EB"/>
                 </a:solidFill>
                 <a:latin typeface="Yu Gothic"/>
                 <a:ea typeface="Yu Gothic"/>
@@ -9986,7 +10546,7 @@
             <a:r>
               <a:rPr sz="1000" b="0" i="0">
                 <a:solidFill>
-                  <a:srgbClr val="262630"/>
+                  <a:srgbClr val="1B1B26"/>
                 </a:solidFill>
                 <a:latin typeface="Yu Gothic"/>
                 <a:ea typeface="Yu Gothic"/>
@@ -10012,7 +10572,7 @@
             <a:avLst/>
           </a:prstGeom>
           <a:solidFill>
-            <a:srgbClr val="F3EFFB"/>
+            <a:srgbClr val="EAF1FE"/>
           </a:solidFill>
           <a:ln>
             <a:noFill/>
@@ -10071,7 +10631,7 @@
             <a:r>
               <a:rPr sz="1050" b="1" i="0">
                 <a:solidFill>
-                  <a:srgbClr val="7823DC"/>
+                  <a:srgbClr val="2563EB"/>
                 </a:solidFill>
                 <a:latin typeface="Yu Gothic"/>
                 <a:ea typeface="Yu Gothic"/>
@@ -10112,7 +10672,7 @@
             <a:r>
               <a:rPr sz="1000" b="0" i="0">
                 <a:solidFill>
-                  <a:srgbClr val="262630"/>
+                  <a:srgbClr val="1B1B26"/>
                 </a:solidFill>
                 <a:latin typeface="Yu Gothic"/>
                 <a:ea typeface="Yu Gothic"/>
@@ -10138,7 +10698,7 @@
             <a:avLst/>
           </a:prstGeom>
           <a:solidFill>
-            <a:srgbClr val="F3EFFB"/>
+            <a:srgbClr val="EAF1FE"/>
           </a:solidFill>
           <a:ln>
             <a:noFill/>
@@ -10197,7 +10757,7 @@
             <a:r>
               <a:rPr sz="1050" b="1" i="0">
                 <a:solidFill>
-                  <a:srgbClr val="7823DC"/>
+                  <a:srgbClr val="2563EB"/>
                 </a:solidFill>
                 <a:latin typeface="Yu Gothic"/>
                 <a:ea typeface="Yu Gothic"/>
@@ -10238,7 +10798,7 @@
             <a:r>
               <a:rPr sz="1000" b="0" i="0">
                 <a:solidFill>
-                  <a:srgbClr val="262630"/>
+                  <a:srgbClr val="1B1B26"/>
                 </a:solidFill>
                 <a:latin typeface="Yu Gothic"/>
                 <a:ea typeface="Yu Gothic"/>
@@ -10268,7 +10828,7 @@
           </a:solidFill>
           <a:ln w="9525">
             <a:solidFill>
-              <a:srgbClr val="D9D9E0"/>
+              <a:srgbClr val="E5E7EB"/>
             </a:solidFill>
           </a:ln>
           <a:effectLst/>
@@ -10310,7 +10870,7 @@
             <a:avLst/>
           </a:prstGeom>
           <a:solidFill>
-            <a:srgbClr val="7823DC"/>
+            <a:srgbClr val="2563EB"/>
           </a:solidFill>
           <a:ln>
             <a:noFill/>
@@ -10395,7 +10955,7 @@
             <a:avLst/>
           </a:prstGeom>
           <a:solidFill>
-            <a:srgbClr val="7823DC"/>
+            <a:srgbClr val="2563EB"/>
           </a:solidFill>
           <a:ln>
             <a:noFill/>
@@ -10469,7 +11029,7 @@
             <a:r>
               <a:rPr sz="1200" b="1" i="0">
                 <a:solidFill>
-                  <a:srgbClr val="3A106E"/>
+                  <a:srgbClr val="1E40AF"/>
                 </a:solidFill>
                 <a:latin typeface="Yu Gothic"/>
                 <a:ea typeface="Yu Gothic"/>
@@ -10487,7 +11047,7 @@
             <a:r>
               <a:rPr sz="980" b="0" i="0">
                 <a:solidFill>
-                  <a:srgbClr val="262630"/>
+                  <a:srgbClr val="1B1B26"/>
                 </a:solidFill>
                 <a:latin typeface="Yu Gothic"/>
                 <a:ea typeface="Yu Gothic"/>
@@ -10513,7 +11073,7 @@
             <a:avLst/>
           </a:prstGeom>
           <a:solidFill>
-            <a:srgbClr val="7823DC"/>
+            <a:srgbClr val="2563EB"/>
           </a:solidFill>
           <a:ln>
             <a:noFill/>
@@ -10587,7 +11147,7 @@
             <a:r>
               <a:rPr sz="1200" b="1" i="0">
                 <a:solidFill>
-                  <a:srgbClr val="3A106E"/>
+                  <a:srgbClr val="1E40AF"/>
                 </a:solidFill>
                 <a:latin typeface="Yu Gothic"/>
                 <a:ea typeface="Yu Gothic"/>
@@ -10605,7 +11165,7 @@
             <a:r>
               <a:rPr sz="980" b="0" i="0">
                 <a:solidFill>
-                  <a:srgbClr val="262630"/>
+                  <a:srgbClr val="1B1B26"/>
                 </a:solidFill>
                 <a:latin typeface="Yu Gothic"/>
                 <a:ea typeface="Yu Gothic"/>
@@ -10631,7 +11191,7 @@
             <a:avLst/>
           </a:prstGeom>
           <a:solidFill>
-            <a:srgbClr val="7823DC"/>
+            <a:srgbClr val="2563EB"/>
           </a:solidFill>
           <a:ln>
             <a:noFill/>
@@ -10705,7 +11265,7 @@
             <a:r>
               <a:rPr sz="1200" b="1" i="0">
                 <a:solidFill>
-                  <a:srgbClr val="3A106E"/>
+                  <a:srgbClr val="1E40AF"/>
                 </a:solidFill>
                 <a:latin typeface="Yu Gothic"/>
                 <a:ea typeface="Yu Gothic"/>
@@ -10723,7 +11283,7 @@
             <a:r>
               <a:rPr sz="980" b="0" i="0">
                 <a:solidFill>
-                  <a:srgbClr val="262630"/>
+                  <a:srgbClr val="1B1B26"/>
                 </a:solidFill>
                 <a:latin typeface="Yu Gothic"/>
                 <a:ea typeface="Yu Gothic"/>
@@ -10749,7 +11309,7 @@
             <a:avLst/>
           </a:prstGeom>
           <a:solidFill>
-            <a:srgbClr val="3A106E"/>
+            <a:srgbClr val="1E40AF"/>
           </a:solidFill>
           <a:ln>
             <a:noFill/>
@@ -10793,7 +11353,7 @@
             <a:avLst/>
           </a:prstGeom>
           <a:solidFill>
-            <a:srgbClr val="7823DC"/>
+            <a:srgbClr val="2563EB"/>
           </a:solidFill>
           <a:ln>
             <a:noFill/>
@@ -10870,7 +11430,7 @@
             <a:r>
               <a:rPr sz="1250" b="1" i="0">
                 <a:solidFill>
-                  <a:srgbClr val="E0D2F6"/>
+                  <a:srgbClr val="BFD4FE"/>
                 </a:solidFill>
                 <a:latin typeface="Yu Gothic"/>
                 <a:ea typeface="Yu Gothic"/>
@@ -10896,7 +11456,7 @@
             <a:avLst/>
           </a:prstGeom>
           <a:solidFill>
-            <a:srgbClr val="D9D9E0"/>
+            <a:srgbClr val="E5E7EB"/>
           </a:solidFill>
           <a:ln>
             <a:noFill/>
@@ -10955,7 +11515,7 @@
             <a:r>
               <a:rPr sz="750" b="0" i="0">
                 <a:solidFill>
-                  <a:srgbClr val="8A8A99"/>
+                  <a:srgbClr val="8A8F9C"/>
                 </a:solidFill>
                 <a:latin typeface="Yu Gothic"/>
                 <a:ea typeface="Yu Gothic"/>
@@ -10996,7 +11556,7 @@
             <a:r>
               <a:rPr sz="900" b="0" i="0">
                 <a:solidFill>
-                  <a:srgbClr val="5F5F6E"/>
+                  <a:srgbClr val="6B7280"/>
                 </a:solidFill>
                 <a:latin typeface="Yu Gothic"/>
                 <a:ea typeface="Yu Gothic"/>
